--- a/local_dimming_intro.pptx
+++ b/local_dimming_intro.pptx
@@ -6,15 +6,19 @@
   </p:sldMasterIdLst>
   <p:sldIdLst>
     <p:sldId id="256" r:id="rId2"/>
-    <p:sldId id="258" r:id="rId3"/>
-    <p:sldId id="259" r:id="rId4"/>
-    <p:sldId id="260" r:id="rId5"/>
-    <p:sldId id="261" r:id="rId6"/>
-    <p:sldId id="262" r:id="rId7"/>
-    <p:sldId id="263" r:id="rId8"/>
-    <p:sldId id="264" r:id="rId9"/>
-    <p:sldId id="265" r:id="rId10"/>
-    <p:sldId id="267" r:id="rId11"/>
+    <p:sldId id="257" r:id="rId3"/>
+    <p:sldId id="258" r:id="rId4"/>
+    <p:sldId id="259" r:id="rId5"/>
+    <p:sldId id="260" r:id="rId6"/>
+    <p:sldId id="261" r:id="rId7"/>
+    <p:sldId id="262" r:id="rId8"/>
+    <p:sldId id="263" r:id="rId9"/>
+    <p:sldId id="264" r:id="rId10"/>
+    <p:sldId id="265" r:id="rId11"/>
+    <p:sldId id="266" r:id="rId12"/>
+    <p:sldId id="268" r:id="rId13"/>
+    <p:sldId id="269" r:id="rId14"/>
+    <p:sldId id="271" r:id="rId15"/>
   </p:sldIdLst>
   <p:sldSz cx="12188825" cy="6858000"/>
   <p:notesSz cx="6858000" cy="9144000"/>
@@ -313,7 +317,7 @@
           <a:p>
             <a:fld id="{5BCAD085-E8A6-8845-BD4E-CB4CCA059FC4}" type="datetimeFigureOut">
               <a:rPr lang="en-US" smtClean="0"/>
-              <a:t>4/29/2026</a:t>
+              <a:t>5/4/2026</a:t>
             </a:fld>
             <a:endParaRPr lang="en-US"/>
           </a:p>
@@ -483,7 +487,7 @@
           <a:p>
             <a:fld id="{5BCAD085-E8A6-8845-BD4E-CB4CCA059FC4}" type="datetimeFigureOut">
               <a:rPr lang="en-US" smtClean="0"/>
-              <a:t>4/29/2026</a:t>
+              <a:t>5/4/2026</a:t>
             </a:fld>
             <a:endParaRPr lang="en-US"/>
           </a:p>
@@ -663,7 +667,7 @@
           <a:p>
             <a:fld id="{5BCAD085-E8A6-8845-BD4E-CB4CCA059FC4}" type="datetimeFigureOut">
               <a:rPr lang="en-US" smtClean="0"/>
-              <a:t>4/29/2026</a:t>
+              <a:t>5/4/2026</a:t>
             </a:fld>
             <a:endParaRPr lang="en-US"/>
           </a:p>
@@ -833,7 +837,7 @@
           <a:p>
             <a:fld id="{5BCAD085-E8A6-8845-BD4E-CB4CCA059FC4}" type="datetimeFigureOut">
               <a:rPr lang="en-US" smtClean="0"/>
-              <a:t>4/29/2026</a:t>
+              <a:t>5/4/2026</a:t>
             </a:fld>
             <a:endParaRPr lang="en-US"/>
           </a:p>
@@ -1079,7 +1083,7 @@
           <a:p>
             <a:fld id="{5BCAD085-E8A6-8845-BD4E-CB4CCA059FC4}" type="datetimeFigureOut">
               <a:rPr lang="en-US" smtClean="0"/>
-              <a:t>4/29/2026</a:t>
+              <a:t>5/4/2026</a:t>
             </a:fld>
             <a:endParaRPr lang="en-US"/>
           </a:p>
@@ -1367,7 +1371,7 @@
           <a:p>
             <a:fld id="{5BCAD085-E8A6-8845-BD4E-CB4CCA059FC4}" type="datetimeFigureOut">
               <a:rPr lang="en-US" smtClean="0"/>
-              <a:t>4/29/2026</a:t>
+              <a:t>5/4/2026</a:t>
             </a:fld>
             <a:endParaRPr lang="en-US"/>
           </a:p>
@@ -1789,7 +1793,7 @@
           <a:p>
             <a:fld id="{5BCAD085-E8A6-8845-BD4E-CB4CCA059FC4}" type="datetimeFigureOut">
               <a:rPr lang="en-US" smtClean="0"/>
-              <a:t>4/29/2026</a:t>
+              <a:t>5/4/2026</a:t>
             </a:fld>
             <a:endParaRPr lang="en-US"/>
           </a:p>
@@ -1907,7 +1911,7 @@
           <a:p>
             <a:fld id="{5BCAD085-E8A6-8845-BD4E-CB4CCA059FC4}" type="datetimeFigureOut">
               <a:rPr lang="en-US" smtClean="0"/>
-              <a:t>4/29/2026</a:t>
+              <a:t>5/4/2026</a:t>
             </a:fld>
             <a:endParaRPr lang="en-US"/>
           </a:p>
@@ -2002,7 +2006,7 @@
           <a:p>
             <a:fld id="{5BCAD085-E8A6-8845-BD4E-CB4CCA059FC4}" type="datetimeFigureOut">
               <a:rPr lang="en-US" smtClean="0"/>
-              <a:t>4/29/2026</a:t>
+              <a:t>5/4/2026</a:t>
             </a:fld>
             <a:endParaRPr lang="en-US"/>
           </a:p>
@@ -2279,7 +2283,7 @@
           <a:p>
             <a:fld id="{5BCAD085-E8A6-8845-BD4E-CB4CCA059FC4}" type="datetimeFigureOut">
               <a:rPr lang="en-US" smtClean="0"/>
-              <a:t>4/29/2026</a:t>
+              <a:t>5/4/2026</a:t>
             </a:fld>
             <a:endParaRPr lang="en-US"/>
           </a:p>
@@ -2532,7 +2536,7 @@
           <a:p>
             <a:fld id="{5BCAD085-E8A6-8845-BD4E-CB4CCA059FC4}" type="datetimeFigureOut">
               <a:rPr lang="en-US" smtClean="0"/>
-              <a:t>4/29/2026</a:t>
+              <a:t>5/4/2026</a:t>
             </a:fld>
             <a:endParaRPr lang="en-US"/>
           </a:p>
@@ -2745,7 +2749,7 @@
           <a:p>
             <a:fld id="{5BCAD085-E8A6-8845-BD4E-CB4CCA059FC4}" type="datetimeFigureOut">
               <a:rPr lang="en-US" smtClean="0"/>
-              <a:t>4/29/2026</a:t>
+              <a:t>5/4/2026</a:t>
             </a:fld>
             <a:endParaRPr lang="en-US"/>
           </a:p>
@@ -3137,7 +3141,7 @@
         <p:spPr>
           <a:xfrm>
             <a:off x="731520" y="1097280"/>
-            <a:ext cx="10698480" cy="707886"/>
+            <a:ext cx="10698480" cy="1280160"/>
           </a:xfrm>
           <a:prstGeom prst="rect">
             <a:avLst/>
@@ -3152,28 +3156,12 @@
           <a:p>
             <a:pPr algn="ctr"/>
             <a:r>
-              <a:rPr sz="4000" b="1" dirty="0">
+              <a:rPr sz="4000" b="1">
                 <a:solidFill>
                   <a:srgbClr val="89B4FA"/>
                 </a:solidFill>
               </a:rPr>
-              <a:t>Local Dimming </a:t>
-            </a:r>
-            <a:r>
-              <a:rPr sz="4000" b="1" dirty="0" smtClean="0">
-                <a:solidFill>
-                  <a:srgbClr val="89B4FA"/>
-                </a:solidFill>
-              </a:rPr>
-              <a:t> </a:t>
-            </a:r>
-            <a:r>
-              <a:rPr sz="4000" b="1" dirty="0">
-                <a:solidFill>
-                  <a:srgbClr val="89B4FA"/>
-                </a:solidFill>
-              </a:rPr>
-              <a:t>Validator</a:t>
+              <a:t>Local Dimming Alignment Validator</a:t>
             </a:r>
           </a:p>
         </p:txBody>
@@ -3208,6 +3196,40 @@
                 </a:solidFill>
               </a:rPr>
               <a:t>顯示器局部背光控制驗證工具</a:t>
+            </a:r>
+          </a:p>
+        </p:txBody>
+      </p:sp>
+      <p:sp>
+        <p:nvSpPr>
+          <p:cNvPr id="5" name="TextBox 4"/>
+          <p:cNvSpPr txBox="1"/>
+          <p:nvPr/>
+        </p:nvSpPr>
+        <p:spPr>
+          <a:xfrm>
+            <a:off x="731520" y="2834640"/>
+            <a:ext cx="10698480" cy="457200"/>
+          </a:xfrm>
+          <a:prstGeom prst="rect">
+            <a:avLst/>
+          </a:prstGeom>
+          <a:noFill/>
+        </p:spPr>
+        <p:txBody>
+          <a:bodyPr wrap="square">
+            <a:spAutoFit/>
+          </a:bodyPr>
+          <a:lstStyle/>
+          <a:p>
+            <a:pPr algn="ctr"/>
+            <a:r>
+              <a:rPr sz="1600" b="0">
+                <a:solidFill>
+                  <a:srgbClr val="BAC2D8"/>
+                </a:solidFill>
+              </a:rPr>
+              <a:t>v1.7.0　|　1245eric / local-dimming-validator</a:t>
             </a:r>
           </a:p>
         </p:txBody>
@@ -3281,6 +3303,1843 @@
       </p:grpSpPr>
       <p:sp>
         <p:nvSpPr>
+          <p:cNvPr id="2" name="Rectangle 1"/>
+          <p:cNvSpPr/>
+          <p:nvPr/>
+        </p:nvSpPr>
+        <p:spPr>
+          <a:xfrm>
+            <a:off x="0" y="0"/>
+            <a:ext cx="12188952" cy="1097280"/>
+          </a:xfrm>
+          <a:prstGeom prst="rect">
+            <a:avLst/>
+          </a:prstGeom>
+          <a:solidFill>
+            <a:srgbClr val="313552"/>
+          </a:solidFill>
+          <a:ln>
+            <a:noFill/>
+          </a:ln>
+        </p:spPr>
+        <p:style>
+          <a:lnRef idx="1">
+            <a:schemeClr val="accent1"/>
+          </a:lnRef>
+          <a:fillRef idx="3">
+            <a:schemeClr val="accent1"/>
+          </a:fillRef>
+          <a:effectRef idx="2">
+            <a:schemeClr val="accent1"/>
+          </a:effectRef>
+          <a:fontRef idx="minor">
+            <a:schemeClr val="lt1"/>
+          </a:fontRef>
+        </p:style>
+        <p:txBody>
+          <a:bodyPr rtlCol="0" anchor="ctr"/>
+          <a:lstStyle/>
+          <a:p>
+            <a:pPr algn="ctr"/>
+            <a:endParaRPr/>
+          </a:p>
+        </p:txBody>
+      </p:sp>
+      <p:sp>
+        <p:nvSpPr>
+          <p:cNvPr id="3" name="TextBox 2"/>
+          <p:cNvSpPr txBox="1"/>
+          <p:nvPr/>
+        </p:nvSpPr>
+        <p:spPr>
+          <a:xfrm>
+            <a:off x="365760" y="91440"/>
+            <a:ext cx="10972800" cy="640080"/>
+          </a:xfrm>
+          <a:prstGeom prst="rect">
+            <a:avLst/>
+          </a:prstGeom>
+          <a:noFill/>
+        </p:spPr>
+        <p:txBody>
+          <a:bodyPr wrap="square">
+            <a:spAutoFit/>
+          </a:bodyPr>
+          <a:lstStyle/>
+          <a:p>
+            <a:pPr algn="l"/>
+            <a:r>
+              <a:rPr sz="3200" b="1">
+                <a:solidFill>
+                  <a:srgbClr val="89B4FA"/>
+                </a:solidFill>
+              </a:rPr>
+              <a:t>視覺化輸出</a:t>
+            </a:r>
+          </a:p>
+        </p:txBody>
+      </p:sp>
+      <p:sp>
+        <p:nvSpPr>
+          <p:cNvPr id="4" name="TextBox 3"/>
+          <p:cNvSpPr txBox="1"/>
+          <p:nvPr/>
+        </p:nvSpPr>
+        <p:spPr>
+          <a:xfrm>
+            <a:off x="365760" y="685800"/>
+            <a:ext cx="10972800" cy="365760"/>
+          </a:xfrm>
+          <a:prstGeom prst="rect">
+            <a:avLst/>
+          </a:prstGeom>
+          <a:noFill/>
+        </p:spPr>
+        <p:txBody>
+          <a:bodyPr wrap="square">
+            <a:spAutoFit/>
+          </a:bodyPr>
+          <a:lstStyle/>
+          <a:p>
+            <a:pPr algn="l"/>
+            <a:r>
+              <a:rPr sz="1400" b="0">
+                <a:solidFill>
+                  <a:srgbClr val="BAC2D8"/>
+                </a:solidFill>
+              </a:rPr>
+              <a:t>compare/diff_N.png 判讀方式</a:t>
+            </a:r>
+          </a:p>
+        </p:txBody>
+      </p:sp>
+      <p:sp>
+        <p:nvSpPr>
+          <p:cNvPr id="5" name="Rectangle 4"/>
+          <p:cNvSpPr/>
+          <p:nvPr/>
+        </p:nvSpPr>
+        <p:spPr>
+          <a:xfrm>
+            <a:off x="457200" y="1371600"/>
+            <a:ext cx="731520" cy="640080"/>
+          </a:xfrm>
+          <a:prstGeom prst="rect">
+            <a:avLst/>
+          </a:prstGeom>
+          <a:solidFill>
+            <a:srgbClr val="FFFFFF"/>
+          </a:solidFill>
+          <a:ln>
+            <a:noFill/>
+          </a:ln>
+        </p:spPr>
+        <p:style>
+          <a:lnRef idx="1">
+            <a:schemeClr val="accent1"/>
+          </a:lnRef>
+          <a:fillRef idx="3">
+            <a:schemeClr val="accent1"/>
+          </a:fillRef>
+          <a:effectRef idx="2">
+            <a:schemeClr val="accent1"/>
+          </a:effectRef>
+          <a:fontRef idx="minor">
+            <a:schemeClr val="lt1"/>
+          </a:fontRef>
+        </p:style>
+        <p:txBody>
+          <a:bodyPr rtlCol="0" anchor="ctr"/>
+          <a:lstStyle/>
+          <a:p>
+            <a:pPr algn="ctr"/>
+            <a:endParaRPr/>
+          </a:p>
+        </p:txBody>
+      </p:sp>
+      <p:sp>
+        <p:nvSpPr>
+          <p:cNvPr id="6" name="TextBox 5"/>
+          <p:cNvSpPr txBox="1"/>
+          <p:nvPr/>
+        </p:nvSpPr>
+        <p:spPr>
+          <a:xfrm>
+            <a:off x="1371600" y="1417320"/>
+            <a:ext cx="1371600" cy="548640"/>
+          </a:xfrm>
+          <a:prstGeom prst="rect">
+            <a:avLst/>
+          </a:prstGeom>
+          <a:noFill/>
+        </p:spPr>
+        <p:txBody>
+          <a:bodyPr wrap="square">
+            <a:spAutoFit/>
+          </a:bodyPr>
+          <a:lstStyle/>
+          <a:p>
+            <a:pPr algn="l"/>
+            <a:r>
+              <a:rPr sz="1800" b="1">
+                <a:solidFill>
+                  <a:srgbClr val="FFFFFF"/>
+                </a:solidFill>
+              </a:rPr>
+              <a:t>白色</a:t>
+            </a:r>
+          </a:p>
+        </p:txBody>
+      </p:sp>
+      <p:sp>
+        <p:nvSpPr>
+          <p:cNvPr id="7" name="TextBox 6"/>
+          <p:cNvSpPr txBox="1"/>
+          <p:nvPr/>
+        </p:nvSpPr>
+        <p:spPr>
+          <a:xfrm>
+            <a:off x="2834640" y="1417320"/>
+            <a:ext cx="4114800" cy="548640"/>
+          </a:xfrm>
+          <a:prstGeom prst="rect">
+            <a:avLst/>
+          </a:prstGeom>
+          <a:noFill/>
+        </p:spPr>
+        <p:txBody>
+          <a:bodyPr wrap="square">
+            <a:spAutoFit/>
+          </a:bodyPr>
+          <a:lstStyle/>
+          <a:p>
+            <a:pPr algn="l"/>
+            <a:r>
+              <a:rPr sz="1600" b="0">
+                <a:solidFill>
+                  <a:srgbClr val="BAC2D8"/>
+                </a:solidFill>
+              </a:rPr>
+              <a:t>兩者皆亮 (Both ON)</a:t>
+            </a:r>
+          </a:p>
+        </p:txBody>
+      </p:sp>
+      <p:sp>
+        <p:nvSpPr>
+          <p:cNvPr id="8" name="TextBox 7"/>
+          <p:cNvSpPr txBox="1"/>
+          <p:nvPr/>
+        </p:nvSpPr>
+        <p:spPr>
+          <a:xfrm>
+            <a:off x="7132320" y="1417320"/>
+            <a:ext cx="4572000" cy="548640"/>
+          </a:xfrm>
+          <a:prstGeom prst="rect">
+            <a:avLst/>
+          </a:prstGeom>
+          <a:noFill/>
+        </p:spPr>
+        <p:txBody>
+          <a:bodyPr wrap="square">
+            <a:spAutoFit/>
+          </a:bodyPr>
+          <a:lstStyle/>
+          <a:p>
+            <a:pPr algn="l"/>
+            <a:r>
+              <a:rPr sz="1600" b="0">
+                <a:solidFill>
+                  <a:srgbClr val="FFFFFF"/>
+                </a:solidFill>
+              </a:rPr>
+              <a:t>正常點亮，模擬與硬體一致</a:t>
+            </a:r>
+          </a:p>
+        </p:txBody>
+      </p:sp>
+      <p:sp>
+        <p:nvSpPr>
+          <p:cNvPr id="9" name="Rectangle 8"/>
+          <p:cNvSpPr/>
+          <p:nvPr/>
+        </p:nvSpPr>
+        <p:spPr>
+          <a:xfrm>
+            <a:off x="457200" y="2377440"/>
+            <a:ext cx="731520" cy="640080"/>
+          </a:xfrm>
+          <a:prstGeom prst="rect">
+            <a:avLst/>
+          </a:prstGeom>
+          <a:solidFill>
+            <a:srgbClr val="F38BA8"/>
+          </a:solidFill>
+          <a:ln>
+            <a:noFill/>
+          </a:ln>
+        </p:spPr>
+        <p:style>
+          <a:lnRef idx="1">
+            <a:schemeClr val="accent1"/>
+          </a:lnRef>
+          <a:fillRef idx="3">
+            <a:schemeClr val="accent1"/>
+          </a:fillRef>
+          <a:effectRef idx="2">
+            <a:schemeClr val="accent1"/>
+          </a:effectRef>
+          <a:fontRef idx="minor">
+            <a:schemeClr val="lt1"/>
+          </a:fontRef>
+        </p:style>
+        <p:txBody>
+          <a:bodyPr rtlCol="0" anchor="ctr"/>
+          <a:lstStyle/>
+          <a:p>
+            <a:pPr algn="ctr"/>
+            <a:endParaRPr/>
+          </a:p>
+        </p:txBody>
+      </p:sp>
+      <p:sp>
+        <p:nvSpPr>
+          <p:cNvPr id="10" name="TextBox 9"/>
+          <p:cNvSpPr txBox="1"/>
+          <p:nvPr/>
+        </p:nvSpPr>
+        <p:spPr>
+          <a:xfrm>
+            <a:off x="1371600" y="2423160"/>
+            <a:ext cx="1371600" cy="548640"/>
+          </a:xfrm>
+          <a:prstGeom prst="rect">
+            <a:avLst/>
+          </a:prstGeom>
+          <a:noFill/>
+        </p:spPr>
+        <p:txBody>
+          <a:bodyPr wrap="square">
+            <a:spAutoFit/>
+          </a:bodyPr>
+          <a:lstStyle/>
+          <a:p>
+            <a:pPr algn="l"/>
+            <a:r>
+              <a:rPr sz="1800" b="1">
+                <a:solidFill>
+                  <a:srgbClr val="F38BA8"/>
+                </a:solidFill>
+              </a:rPr>
+              <a:t>紅色</a:t>
+            </a:r>
+          </a:p>
+        </p:txBody>
+      </p:sp>
+      <p:sp>
+        <p:nvSpPr>
+          <p:cNvPr id="11" name="TextBox 10"/>
+          <p:cNvSpPr txBox="1"/>
+          <p:nvPr/>
+        </p:nvSpPr>
+        <p:spPr>
+          <a:xfrm>
+            <a:off x="2834640" y="2423160"/>
+            <a:ext cx="4114800" cy="548640"/>
+          </a:xfrm>
+          <a:prstGeom prst="rect">
+            <a:avLst/>
+          </a:prstGeom>
+          <a:noFill/>
+        </p:spPr>
+        <p:txBody>
+          <a:bodyPr wrap="square">
+            <a:spAutoFit/>
+          </a:bodyPr>
+          <a:lstStyle/>
+          <a:p>
+            <a:pPr algn="l"/>
+            <a:r>
+              <a:rPr sz="1600" b="0">
+                <a:solidFill>
+                  <a:srgbClr val="BAC2D8"/>
+                </a:solidFill>
+              </a:rPr>
+              <a:t>漏亮 (sim ON, dump OFF)</a:t>
+            </a:r>
+          </a:p>
+        </p:txBody>
+      </p:sp>
+      <p:sp>
+        <p:nvSpPr>
+          <p:cNvPr id="12" name="TextBox 11"/>
+          <p:cNvSpPr txBox="1"/>
+          <p:nvPr/>
+        </p:nvSpPr>
+        <p:spPr>
+          <a:xfrm>
+            <a:off x="7132320" y="2423160"/>
+            <a:ext cx="4572000" cy="548640"/>
+          </a:xfrm>
+          <a:prstGeom prst="rect">
+            <a:avLst/>
+          </a:prstGeom>
+          <a:noFill/>
+        </p:spPr>
+        <p:txBody>
+          <a:bodyPr wrap="square">
+            <a:spAutoFit/>
+          </a:bodyPr>
+          <a:lstStyle/>
+          <a:p>
+            <a:pPr algn="l"/>
+            <a:r>
+              <a:rPr sz="1600" b="0">
+                <a:solidFill>
+                  <a:srgbClr val="FFFFFF"/>
+                </a:solidFill>
+              </a:rPr>
+              <a:t>韌體未點亮但應該要亮</a:t>
+            </a:r>
+          </a:p>
+        </p:txBody>
+      </p:sp>
+      <p:sp>
+        <p:nvSpPr>
+          <p:cNvPr id="13" name="Rectangle 12"/>
+          <p:cNvSpPr/>
+          <p:nvPr/>
+        </p:nvSpPr>
+        <p:spPr>
+          <a:xfrm>
+            <a:off x="457200" y="3383280"/>
+            <a:ext cx="731520" cy="640080"/>
+          </a:xfrm>
+          <a:prstGeom prst="rect">
+            <a:avLst/>
+          </a:prstGeom>
+          <a:solidFill>
+            <a:srgbClr val="89B4FA"/>
+          </a:solidFill>
+          <a:ln>
+            <a:noFill/>
+          </a:ln>
+        </p:spPr>
+        <p:style>
+          <a:lnRef idx="1">
+            <a:schemeClr val="accent1"/>
+          </a:lnRef>
+          <a:fillRef idx="3">
+            <a:schemeClr val="accent1"/>
+          </a:fillRef>
+          <a:effectRef idx="2">
+            <a:schemeClr val="accent1"/>
+          </a:effectRef>
+          <a:fontRef idx="minor">
+            <a:schemeClr val="lt1"/>
+          </a:fontRef>
+        </p:style>
+        <p:txBody>
+          <a:bodyPr rtlCol="0" anchor="ctr"/>
+          <a:lstStyle/>
+          <a:p>
+            <a:pPr algn="ctr"/>
+            <a:endParaRPr/>
+          </a:p>
+        </p:txBody>
+      </p:sp>
+      <p:sp>
+        <p:nvSpPr>
+          <p:cNvPr id="14" name="TextBox 13"/>
+          <p:cNvSpPr txBox="1"/>
+          <p:nvPr/>
+        </p:nvSpPr>
+        <p:spPr>
+          <a:xfrm>
+            <a:off x="1371600" y="3429000"/>
+            <a:ext cx="1371600" cy="548640"/>
+          </a:xfrm>
+          <a:prstGeom prst="rect">
+            <a:avLst/>
+          </a:prstGeom>
+          <a:noFill/>
+        </p:spPr>
+        <p:txBody>
+          <a:bodyPr wrap="square">
+            <a:spAutoFit/>
+          </a:bodyPr>
+          <a:lstStyle/>
+          <a:p>
+            <a:pPr algn="l"/>
+            <a:r>
+              <a:rPr sz="1800" b="1">
+                <a:solidFill>
+                  <a:srgbClr val="89B4FA"/>
+                </a:solidFill>
+              </a:rPr>
+              <a:t>藍色</a:t>
+            </a:r>
+          </a:p>
+        </p:txBody>
+      </p:sp>
+      <p:sp>
+        <p:nvSpPr>
+          <p:cNvPr id="15" name="TextBox 14"/>
+          <p:cNvSpPr txBox="1"/>
+          <p:nvPr/>
+        </p:nvSpPr>
+        <p:spPr>
+          <a:xfrm>
+            <a:off x="2834640" y="3429000"/>
+            <a:ext cx="4114800" cy="548640"/>
+          </a:xfrm>
+          <a:prstGeom prst="rect">
+            <a:avLst/>
+          </a:prstGeom>
+          <a:noFill/>
+        </p:spPr>
+        <p:txBody>
+          <a:bodyPr wrap="square">
+            <a:spAutoFit/>
+          </a:bodyPr>
+          <a:lstStyle/>
+          <a:p>
+            <a:pPr algn="l"/>
+            <a:r>
+              <a:rPr sz="1600" b="0">
+                <a:solidFill>
+                  <a:srgbClr val="BAC2D8"/>
+                </a:solidFill>
+              </a:rPr>
+              <a:t>多亮 (sim OFF, dump ON)</a:t>
+            </a:r>
+          </a:p>
+        </p:txBody>
+      </p:sp>
+      <p:sp>
+        <p:nvSpPr>
+          <p:cNvPr id="16" name="TextBox 15"/>
+          <p:cNvSpPr txBox="1"/>
+          <p:nvPr/>
+        </p:nvSpPr>
+        <p:spPr>
+          <a:xfrm>
+            <a:off x="7132320" y="3429000"/>
+            <a:ext cx="4572000" cy="548640"/>
+          </a:xfrm>
+          <a:prstGeom prst="rect">
+            <a:avLst/>
+          </a:prstGeom>
+          <a:noFill/>
+        </p:spPr>
+        <p:txBody>
+          <a:bodyPr wrap="square">
+            <a:spAutoFit/>
+          </a:bodyPr>
+          <a:lstStyle/>
+          <a:p>
+            <a:pPr algn="l"/>
+            <a:r>
+              <a:rPr sz="1600" b="0">
+                <a:solidFill>
+                  <a:srgbClr val="FFFFFF"/>
+                </a:solidFill>
+              </a:rPr>
+              <a:t>韌體多點亮，不應該亮</a:t>
+            </a:r>
+          </a:p>
+        </p:txBody>
+      </p:sp>
+      <p:sp>
+        <p:nvSpPr>
+          <p:cNvPr id="17" name="Rectangle 16"/>
+          <p:cNvSpPr/>
+          <p:nvPr/>
+        </p:nvSpPr>
+        <p:spPr>
+          <a:xfrm>
+            <a:off x="457200" y="4389120"/>
+            <a:ext cx="731520" cy="640080"/>
+          </a:xfrm>
+          <a:prstGeom prst="rect">
+            <a:avLst/>
+          </a:prstGeom>
+          <a:solidFill>
+            <a:srgbClr val="BAC2D8"/>
+          </a:solidFill>
+          <a:ln>
+            <a:noFill/>
+          </a:ln>
+        </p:spPr>
+        <p:style>
+          <a:lnRef idx="1">
+            <a:schemeClr val="accent1"/>
+          </a:lnRef>
+          <a:fillRef idx="3">
+            <a:schemeClr val="accent1"/>
+          </a:fillRef>
+          <a:effectRef idx="2">
+            <a:schemeClr val="accent1"/>
+          </a:effectRef>
+          <a:fontRef idx="minor">
+            <a:schemeClr val="lt1"/>
+          </a:fontRef>
+        </p:style>
+        <p:txBody>
+          <a:bodyPr rtlCol="0" anchor="ctr"/>
+          <a:lstStyle/>
+          <a:p>
+            <a:pPr algn="ctr"/>
+            <a:endParaRPr/>
+          </a:p>
+        </p:txBody>
+      </p:sp>
+      <p:sp>
+        <p:nvSpPr>
+          <p:cNvPr id="18" name="TextBox 17"/>
+          <p:cNvSpPr txBox="1"/>
+          <p:nvPr/>
+        </p:nvSpPr>
+        <p:spPr>
+          <a:xfrm>
+            <a:off x="1371600" y="4434840"/>
+            <a:ext cx="1371600" cy="548640"/>
+          </a:xfrm>
+          <a:prstGeom prst="rect">
+            <a:avLst/>
+          </a:prstGeom>
+          <a:noFill/>
+        </p:spPr>
+        <p:txBody>
+          <a:bodyPr wrap="square">
+            <a:spAutoFit/>
+          </a:bodyPr>
+          <a:lstStyle/>
+          <a:p>
+            <a:pPr algn="l"/>
+            <a:r>
+              <a:rPr sz="1800" b="1">
+                <a:solidFill>
+                  <a:srgbClr val="BAC2D8"/>
+                </a:solidFill>
+              </a:rPr>
+              <a:t>黑色</a:t>
+            </a:r>
+          </a:p>
+        </p:txBody>
+      </p:sp>
+      <p:sp>
+        <p:nvSpPr>
+          <p:cNvPr id="19" name="TextBox 18"/>
+          <p:cNvSpPr txBox="1"/>
+          <p:nvPr/>
+        </p:nvSpPr>
+        <p:spPr>
+          <a:xfrm>
+            <a:off x="2834640" y="4434840"/>
+            <a:ext cx="4114800" cy="548640"/>
+          </a:xfrm>
+          <a:prstGeom prst="rect">
+            <a:avLst/>
+          </a:prstGeom>
+          <a:noFill/>
+        </p:spPr>
+        <p:txBody>
+          <a:bodyPr wrap="square">
+            <a:spAutoFit/>
+          </a:bodyPr>
+          <a:lstStyle/>
+          <a:p>
+            <a:pPr algn="l"/>
+            <a:r>
+              <a:rPr sz="1600" b="0">
+                <a:solidFill>
+                  <a:srgbClr val="BAC2D8"/>
+                </a:solidFill>
+              </a:rPr>
+              <a:t>兩者皆滅 (Both OFF)</a:t>
+            </a:r>
+          </a:p>
+        </p:txBody>
+      </p:sp>
+      <p:sp>
+        <p:nvSpPr>
+          <p:cNvPr id="20" name="TextBox 19"/>
+          <p:cNvSpPr txBox="1"/>
+          <p:nvPr/>
+        </p:nvSpPr>
+        <p:spPr>
+          <a:xfrm>
+            <a:off x="7132320" y="4434840"/>
+            <a:ext cx="4572000" cy="548640"/>
+          </a:xfrm>
+          <a:prstGeom prst="rect">
+            <a:avLst/>
+          </a:prstGeom>
+          <a:noFill/>
+        </p:spPr>
+        <p:txBody>
+          <a:bodyPr wrap="square">
+            <a:spAutoFit/>
+          </a:bodyPr>
+          <a:lstStyle/>
+          <a:p>
+            <a:pPr algn="l"/>
+            <a:r>
+              <a:rPr sz="1600" b="0">
+                <a:solidFill>
+                  <a:srgbClr val="FFFFFF"/>
+                </a:solidFill>
+              </a:rPr>
+              <a:t>正常熄滅，背景</a:t>
+            </a:r>
+          </a:p>
+        </p:txBody>
+      </p:sp>
+      <p:sp>
+        <p:nvSpPr>
+          <p:cNvPr id="21" name="TextBox 20"/>
+          <p:cNvSpPr txBox="1"/>
+          <p:nvPr/>
+        </p:nvSpPr>
+        <p:spPr>
+          <a:xfrm>
+            <a:off x="457200" y="5486400"/>
+            <a:ext cx="11247120" cy="457200"/>
+          </a:xfrm>
+          <a:prstGeom prst="rect">
+            <a:avLst/>
+          </a:prstGeom>
+          <a:noFill/>
+        </p:spPr>
+        <p:txBody>
+          <a:bodyPr wrap="square">
+            <a:spAutoFit/>
+          </a:bodyPr>
+          <a:lstStyle/>
+          <a:p>
+            <a:pPr algn="ctr"/>
+            <a:r>
+              <a:rPr sz="1500" b="0">
+                <a:solidFill>
+                  <a:srgbClr val="BAC2D8"/>
+                </a:solidFill>
+              </a:rPr>
+              <a:t>輸出尺寸：1280×640（與輸入影像相同），含圖例文字說明</a:t>
+            </a:r>
+          </a:p>
+        </p:txBody>
+      </p:sp>
+    </p:spTree>
+  </p:cSld>
+  <p:clrMapOvr>
+    <a:masterClrMapping/>
+  </p:clrMapOvr>
+</p:sld>
+</file>
+
+<file path=ppt/slides/slide11.xml><?xml version="1.0" encoding="utf-8"?>
+<p:sld xmlns:a="http://schemas.openxmlformats.org/drawingml/2006/main" xmlns:r="http://schemas.openxmlformats.org/officeDocument/2006/relationships" xmlns:p="http://schemas.openxmlformats.org/presentationml/2006/main">
+  <p:cSld>
+    <p:bg>
+      <p:bgPr>
+        <a:solidFill>
+          <a:srgbClr val="1E1E2E"/>
+        </a:solidFill>
+        <a:effectLst/>
+      </p:bgPr>
+    </p:bg>
+    <p:spTree>
+      <p:nvGrpSpPr>
+        <p:cNvPr id="1" name=""/>
+        <p:cNvGrpSpPr/>
+        <p:nvPr/>
+      </p:nvGrpSpPr>
+      <p:grpSpPr>
+        <a:xfrm>
+          <a:off x="0" y="0"/>
+          <a:ext cx="0" cy="0"/>
+          <a:chOff x="0" y="0"/>
+          <a:chExt cx="0" cy="0"/>
+        </a:xfrm>
+      </p:grpSpPr>
+      <p:sp>
+        <p:nvSpPr>
+          <p:cNvPr id="2" name="Rectangle 1"/>
+          <p:cNvSpPr/>
+          <p:nvPr/>
+        </p:nvSpPr>
+        <p:spPr>
+          <a:xfrm>
+            <a:off x="0" y="0"/>
+            <a:ext cx="12188952" cy="1097280"/>
+          </a:xfrm>
+          <a:prstGeom prst="rect">
+            <a:avLst/>
+          </a:prstGeom>
+          <a:solidFill>
+            <a:srgbClr val="313552"/>
+          </a:solidFill>
+          <a:ln>
+            <a:noFill/>
+          </a:ln>
+        </p:spPr>
+        <p:style>
+          <a:lnRef idx="1">
+            <a:schemeClr val="accent1"/>
+          </a:lnRef>
+          <a:fillRef idx="3">
+            <a:schemeClr val="accent1"/>
+          </a:fillRef>
+          <a:effectRef idx="2">
+            <a:schemeClr val="accent1"/>
+          </a:effectRef>
+          <a:fontRef idx="minor">
+            <a:schemeClr val="lt1"/>
+          </a:fontRef>
+        </p:style>
+        <p:txBody>
+          <a:bodyPr rtlCol="0" anchor="ctr"/>
+          <a:lstStyle/>
+          <a:p>
+            <a:pPr algn="ctr"/>
+            <a:endParaRPr/>
+          </a:p>
+        </p:txBody>
+      </p:sp>
+      <p:sp>
+        <p:nvSpPr>
+          <p:cNvPr id="3" name="TextBox 2"/>
+          <p:cNvSpPr txBox="1"/>
+          <p:nvPr/>
+        </p:nvSpPr>
+        <p:spPr>
+          <a:xfrm>
+            <a:off x="365760" y="91440"/>
+            <a:ext cx="10972800" cy="640080"/>
+          </a:xfrm>
+          <a:prstGeom prst="rect">
+            <a:avLst/>
+          </a:prstGeom>
+          <a:noFill/>
+        </p:spPr>
+        <p:txBody>
+          <a:bodyPr wrap="square">
+            <a:spAutoFit/>
+          </a:bodyPr>
+          <a:lstStyle/>
+          <a:p>
+            <a:pPr algn="l"/>
+            <a:r>
+              <a:rPr sz="3200" b="1">
+                <a:solidFill>
+                  <a:srgbClr val="89B4FA"/>
+                </a:solidFill>
+              </a:rPr>
+              <a:t>實際輸出截圖</a:t>
+            </a:r>
+          </a:p>
+        </p:txBody>
+      </p:sp>
+      <p:sp>
+        <p:nvSpPr>
+          <p:cNvPr id="4" name="TextBox 3"/>
+          <p:cNvSpPr txBox="1"/>
+          <p:nvPr/>
+        </p:nvSpPr>
+        <p:spPr>
+          <a:xfrm>
+            <a:off x="365760" y="685800"/>
+            <a:ext cx="10972800" cy="365760"/>
+          </a:xfrm>
+          <a:prstGeom prst="rect">
+            <a:avLst/>
+          </a:prstGeom>
+          <a:noFill/>
+        </p:spPr>
+        <p:txBody>
+          <a:bodyPr wrap="square">
+            <a:spAutoFit/>
+          </a:bodyPr>
+          <a:lstStyle/>
+          <a:p>
+            <a:pPr algn="l"/>
+            <a:r>
+              <a:rPr sz="1400" b="0">
+                <a:solidFill>
+                  <a:srgbClr val="BAC2D8"/>
+                </a:solidFill>
+              </a:rPr>
+              <a:t>Case 0  —  輸入影像 → 模擬結果 → 差異比對圖</a:t>
+            </a:r>
+          </a:p>
+        </p:txBody>
+      </p:sp>
+      <p:pic>
+        <p:nvPicPr>
+          <p:cNvPr id="5" name="Picture 4" descr="input_0.png"/>
+          <p:cNvPicPr>
+            <a:picLocks noChangeAspect="1"/>
+          </p:cNvPicPr>
+          <p:nvPr/>
+        </p:nvPicPr>
+        <p:blipFill>
+          <a:blip r:embed="rId2"/>
+          <a:stretch>
+            <a:fillRect/>
+          </a:stretch>
+        </p:blipFill>
+        <p:spPr>
+          <a:xfrm>
+            <a:off x="274320" y="1234440"/>
+            <a:ext cx="3657600" cy="1828800"/>
+          </a:xfrm>
+          <a:prstGeom prst="rect">
+            <a:avLst/>
+          </a:prstGeom>
+        </p:spPr>
+      </p:pic>
+      <p:sp>
+        <p:nvSpPr>
+          <p:cNvPr id="6" name="TextBox 5"/>
+          <p:cNvSpPr txBox="1"/>
+          <p:nvPr/>
+        </p:nvSpPr>
+        <p:spPr>
+          <a:xfrm>
+            <a:off x="274320" y="4983480"/>
+            <a:ext cx="3657600" cy="411480"/>
+          </a:xfrm>
+          <a:prstGeom prst="rect">
+            <a:avLst/>
+          </a:prstGeom>
+          <a:noFill/>
+        </p:spPr>
+        <p:txBody>
+          <a:bodyPr wrap="square">
+            <a:spAutoFit/>
+          </a:bodyPr>
+          <a:lstStyle/>
+          <a:p>
+            <a:pPr algn="ctr"/>
+            <a:r>
+              <a:rPr sz="1200" b="0">
+                <a:solidFill>
+                  <a:srgbClr val="89B4FA"/>
+                </a:solidFill>
+              </a:rPr>
+              <a:t>① 輸入影像  (input/input_0.png)</a:t>
+            </a:r>
+          </a:p>
+        </p:txBody>
+      </p:sp>
+      <p:pic>
+        <p:nvPicPr>
+          <p:cNvPr id="7" name="Picture 6" descr="input_0.png"/>
+          <p:cNvPicPr>
+            <a:picLocks noChangeAspect="1"/>
+          </p:cNvPicPr>
+          <p:nvPr/>
+        </p:nvPicPr>
+        <p:blipFill>
+          <a:blip r:embed="rId2"/>
+          <a:stretch>
+            <a:fillRect/>
+          </a:stretch>
+        </p:blipFill>
+        <p:spPr>
+          <a:xfrm>
+            <a:off x="4251960" y="1234440"/>
+            <a:ext cx="3657600" cy="1828800"/>
+          </a:xfrm>
+          <a:prstGeom prst="rect">
+            <a:avLst/>
+          </a:prstGeom>
+        </p:spPr>
+      </p:pic>
+      <p:sp>
+        <p:nvSpPr>
+          <p:cNvPr id="8" name="TextBox 7"/>
+          <p:cNvSpPr txBox="1"/>
+          <p:nvPr/>
+        </p:nvSpPr>
+        <p:spPr>
+          <a:xfrm>
+            <a:off x="4251960" y="4983480"/>
+            <a:ext cx="3657600" cy="411480"/>
+          </a:xfrm>
+          <a:prstGeom prst="rect">
+            <a:avLst/>
+          </a:prstGeom>
+          <a:noFill/>
+        </p:spPr>
+        <p:txBody>
+          <a:bodyPr wrap="square">
+            <a:spAutoFit/>
+          </a:bodyPr>
+          <a:lstStyle/>
+          <a:p>
+            <a:pPr algn="ctr"/>
+            <a:r>
+              <a:rPr sz="1200" b="0">
+                <a:solidFill>
+                  <a:srgbClr val="A6E3A1"/>
+                </a:solidFill>
+              </a:rPr>
+              <a:t>② 模擬輸出  (sim_output/sim_0.png)</a:t>
+            </a:r>
+          </a:p>
+        </p:txBody>
+      </p:sp>
+      <p:pic>
+        <p:nvPicPr>
+          <p:cNvPr id="9" name="Picture 8" descr="diff_0.png"/>
+          <p:cNvPicPr>
+            <a:picLocks noChangeAspect="1"/>
+          </p:cNvPicPr>
+          <p:nvPr/>
+        </p:nvPicPr>
+        <p:blipFill>
+          <a:blip r:embed="rId3"/>
+          <a:stretch>
+            <a:fillRect/>
+          </a:stretch>
+        </p:blipFill>
+        <p:spPr>
+          <a:xfrm>
+            <a:off x="8229600" y="1234440"/>
+            <a:ext cx="3657600" cy="1828800"/>
+          </a:xfrm>
+          <a:prstGeom prst="rect">
+            <a:avLst/>
+          </a:prstGeom>
+        </p:spPr>
+      </p:pic>
+      <p:sp>
+        <p:nvSpPr>
+          <p:cNvPr id="10" name="TextBox 9"/>
+          <p:cNvSpPr txBox="1"/>
+          <p:nvPr/>
+        </p:nvSpPr>
+        <p:spPr>
+          <a:xfrm>
+            <a:off x="8229600" y="4983480"/>
+            <a:ext cx="3657600" cy="411480"/>
+          </a:xfrm>
+          <a:prstGeom prst="rect">
+            <a:avLst/>
+          </a:prstGeom>
+          <a:noFill/>
+        </p:spPr>
+        <p:txBody>
+          <a:bodyPr wrap="square">
+            <a:spAutoFit/>
+          </a:bodyPr>
+          <a:lstStyle/>
+          <a:p>
+            <a:pPr algn="ctr"/>
+            <a:r>
+              <a:rPr sz="1200" b="0">
+                <a:solidFill>
+                  <a:srgbClr val="F9E2AF"/>
+                </a:solidFill>
+              </a:rPr>
+              <a:t>③ 差異比對  (compare/diff_0.png)</a:t>
+            </a:r>
+          </a:p>
+        </p:txBody>
+      </p:sp>
+      <p:sp>
+        <p:nvSpPr>
+          <p:cNvPr id="11" name="TextBox 10"/>
+          <p:cNvSpPr txBox="1"/>
+          <p:nvPr/>
+        </p:nvSpPr>
+        <p:spPr>
+          <a:xfrm>
+            <a:off x="3954780" y="1920240"/>
+            <a:ext cx="274320" cy="457200"/>
+          </a:xfrm>
+          <a:prstGeom prst="rect">
+            <a:avLst/>
+          </a:prstGeom>
+          <a:noFill/>
+        </p:spPr>
+        <p:txBody>
+          <a:bodyPr wrap="square">
+            <a:spAutoFit/>
+          </a:bodyPr>
+          <a:lstStyle/>
+          <a:p>
+            <a:pPr algn="ctr"/>
+            <a:r>
+              <a:rPr sz="2200" b="0" dirty="0">
+                <a:solidFill>
+                  <a:srgbClr val="BAC2D8"/>
+                </a:solidFill>
+              </a:rPr>
+              <a:t>→</a:t>
+            </a:r>
+          </a:p>
+        </p:txBody>
+      </p:sp>
+      <p:sp>
+        <p:nvSpPr>
+          <p:cNvPr id="12" name="TextBox 11"/>
+          <p:cNvSpPr txBox="1"/>
+          <p:nvPr/>
+        </p:nvSpPr>
+        <p:spPr>
+          <a:xfrm>
+            <a:off x="7955280" y="1920240"/>
+            <a:ext cx="274320" cy="457200"/>
+          </a:xfrm>
+          <a:prstGeom prst="rect">
+            <a:avLst/>
+          </a:prstGeom>
+          <a:noFill/>
+        </p:spPr>
+        <p:txBody>
+          <a:bodyPr wrap="square">
+            <a:spAutoFit/>
+          </a:bodyPr>
+          <a:lstStyle/>
+          <a:p>
+            <a:pPr algn="ctr"/>
+            <a:r>
+              <a:rPr sz="2200" b="0" dirty="0">
+                <a:solidFill>
+                  <a:srgbClr val="BAC2D8"/>
+                </a:solidFill>
+              </a:rPr>
+              <a:t>→</a:t>
+            </a:r>
+          </a:p>
+        </p:txBody>
+      </p:sp>
+      <p:sp>
+        <p:nvSpPr>
+          <p:cNvPr id="13" name="TextBox 12"/>
+          <p:cNvSpPr txBox="1"/>
+          <p:nvPr/>
+        </p:nvSpPr>
+        <p:spPr>
+          <a:xfrm>
+            <a:off x="274320" y="5577840"/>
+            <a:ext cx="11612880" cy="411480"/>
+          </a:xfrm>
+          <a:prstGeom prst="rect">
+            <a:avLst/>
+          </a:prstGeom>
+          <a:noFill/>
+        </p:spPr>
+        <p:txBody>
+          <a:bodyPr wrap="square">
+            <a:spAutoFit/>
+          </a:bodyPr>
+          <a:lstStyle/>
+          <a:p>
+            <a:pPr algn="ctr"/>
+            <a:r>
+              <a:rPr sz="1300" b="0">
+                <a:solidFill>
+                  <a:srgbClr val="BAC2D8"/>
+                </a:solidFill>
+              </a:rPr>
+              <a:t>灰階影像 → Max-Pooling 模擬 → 與硬體 Dump 逐 Block 比對，白=正確，紅=漏亮，藍=多亮</a:t>
+            </a:r>
+          </a:p>
+        </p:txBody>
+      </p:sp>
+    </p:spTree>
+  </p:cSld>
+  <p:clrMapOvr>
+    <a:masterClrMapping/>
+  </p:clrMapOvr>
+</p:sld>
+</file>
+
+<file path=ppt/slides/slide12.xml><?xml version="1.0" encoding="utf-8"?>
+<p:sld xmlns:a="http://schemas.openxmlformats.org/drawingml/2006/main" xmlns:r="http://schemas.openxmlformats.org/officeDocument/2006/relationships" xmlns:p="http://schemas.openxmlformats.org/presentationml/2006/main">
+  <p:cSld>
+    <p:bg>
+      <p:bgPr>
+        <a:solidFill>
+          <a:srgbClr val="1E1E2E"/>
+        </a:solidFill>
+        <a:effectLst/>
+      </p:bgPr>
+    </p:bg>
+    <p:spTree>
+      <p:nvGrpSpPr>
+        <p:cNvPr id="1" name=""/>
+        <p:cNvGrpSpPr/>
+        <p:nvPr/>
+      </p:nvGrpSpPr>
+      <p:grpSpPr>
+        <a:xfrm>
+          <a:off x="0" y="0"/>
+          <a:ext cx="0" cy="0"/>
+          <a:chOff x="0" y="0"/>
+          <a:chExt cx="0" cy="0"/>
+        </a:xfrm>
+      </p:grpSpPr>
+      <p:sp>
+        <p:nvSpPr>
+          <p:cNvPr id="2" name="Rectangle 1"/>
+          <p:cNvSpPr/>
+          <p:nvPr/>
+        </p:nvSpPr>
+        <p:spPr>
+          <a:xfrm>
+            <a:off x="0" y="0"/>
+            <a:ext cx="12188952" cy="1097280"/>
+          </a:xfrm>
+          <a:prstGeom prst="rect">
+            <a:avLst/>
+          </a:prstGeom>
+          <a:solidFill>
+            <a:srgbClr val="313552"/>
+          </a:solidFill>
+          <a:ln>
+            <a:noFill/>
+          </a:ln>
+        </p:spPr>
+        <p:style>
+          <a:lnRef idx="1">
+            <a:schemeClr val="accent1"/>
+          </a:lnRef>
+          <a:fillRef idx="3">
+            <a:schemeClr val="accent1"/>
+          </a:fillRef>
+          <a:effectRef idx="2">
+            <a:schemeClr val="accent1"/>
+          </a:effectRef>
+          <a:fontRef idx="minor">
+            <a:schemeClr val="lt1"/>
+          </a:fontRef>
+        </p:style>
+        <p:txBody>
+          <a:bodyPr rtlCol="0" anchor="ctr"/>
+          <a:lstStyle/>
+          <a:p>
+            <a:pPr algn="ctr"/>
+            <a:endParaRPr/>
+          </a:p>
+        </p:txBody>
+      </p:sp>
+      <p:sp>
+        <p:nvSpPr>
+          <p:cNvPr id="3" name="TextBox 2"/>
+          <p:cNvSpPr txBox="1"/>
+          <p:nvPr/>
+        </p:nvSpPr>
+        <p:spPr>
+          <a:xfrm>
+            <a:off x="365760" y="91440"/>
+            <a:ext cx="10972800" cy="640080"/>
+          </a:xfrm>
+          <a:prstGeom prst="rect">
+            <a:avLst/>
+          </a:prstGeom>
+          <a:noFill/>
+        </p:spPr>
+        <p:txBody>
+          <a:bodyPr wrap="square">
+            <a:spAutoFit/>
+          </a:bodyPr>
+          <a:lstStyle/>
+          <a:p>
+            <a:pPr algn="l"/>
+            <a:r>
+              <a:rPr sz="3200" b="1">
+                <a:solidFill>
+                  <a:srgbClr val="89B4FA"/>
+                </a:solidFill>
+              </a:rPr>
+              <a:t>輸出報告</a:t>
+            </a:r>
+          </a:p>
+        </p:txBody>
+      </p:sp>
+      <p:sp>
+        <p:nvSpPr>
+          <p:cNvPr id="4" name="TextBox 3"/>
+          <p:cNvSpPr txBox="1"/>
+          <p:nvPr/>
+        </p:nvSpPr>
+        <p:spPr>
+          <a:xfrm>
+            <a:off x="365760" y="685800"/>
+            <a:ext cx="10972800" cy="365760"/>
+          </a:xfrm>
+          <a:prstGeom prst="rect">
+            <a:avLst/>
+          </a:prstGeom>
+          <a:noFill/>
+        </p:spPr>
+        <p:txBody>
+          <a:bodyPr wrap="square">
+            <a:spAutoFit/>
+          </a:bodyPr>
+          <a:lstStyle/>
+          <a:p>
+            <a:pPr algn="l"/>
+            <a:r>
+              <a:rPr sz="1400" b="0">
+                <a:solidFill>
+                  <a:srgbClr val="BAC2D8"/>
+                </a:solidFill>
+              </a:rPr>
+              <a:t>彙總統計範例</a:t>
+            </a:r>
+          </a:p>
+        </p:txBody>
+      </p:sp>
+      <p:sp>
+        <p:nvSpPr>
+          <p:cNvPr id="5" name="Rectangle 4"/>
+          <p:cNvSpPr/>
+          <p:nvPr/>
+        </p:nvSpPr>
+        <p:spPr>
+          <a:xfrm>
+            <a:off x="457200" y="1280160"/>
+            <a:ext cx="11247120" cy="4389120"/>
+          </a:xfrm>
+          <a:prstGeom prst="rect">
+            <a:avLst/>
+          </a:prstGeom>
+          <a:solidFill>
+            <a:srgbClr val="121420"/>
+          </a:solidFill>
+          <a:ln>
+            <a:noFill/>
+          </a:ln>
+        </p:spPr>
+        <p:style>
+          <a:lnRef idx="1">
+            <a:schemeClr val="accent1"/>
+          </a:lnRef>
+          <a:fillRef idx="3">
+            <a:schemeClr val="accent1"/>
+          </a:fillRef>
+          <a:effectRef idx="2">
+            <a:schemeClr val="accent1"/>
+          </a:effectRef>
+          <a:fontRef idx="minor">
+            <a:schemeClr val="lt1"/>
+          </a:fontRef>
+        </p:style>
+        <p:txBody>
+          <a:bodyPr rtlCol="0" anchor="ctr"/>
+          <a:lstStyle/>
+          <a:p>
+            <a:pPr algn="ctr"/>
+            <a:endParaRPr/>
+          </a:p>
+        </p:txBody>
+      </p:sp>
+      <p:sp>
+        <p:nvSpPr>
+          <p:cNvPr id="6" name="TextBox 5"/>
+          <p:cNvSpPr txBox="1"/>
+          <p:nvPr/>
+        </p:nvSpPr>
+        <p:spPr>
+          <a:xfrm>
+            <a:off x="640080" y="1417320"/>
+            <a:ext cx="10881360" cy="4114800"/>
+          </a:xfrm>
+          <a:prstGeom prst="rect">
+            <a:avLst/>
+          </a:prstGeom>
+          <a:noFill/>
+        </p:spPr>
+        <p:txBody>
+          <a:bodyPr wrap="square">
+            <a:spAutoFit/>
+          </a:bodyPr>
+          <a:lstStyle/>
+          <a:p>
+            <a:pPr algn="l"/>
+            <a:r>
+              <a:rPr sz="1400" b="0">
+                <a:solidFill>
+                  <a:srgbClr val="A6E3A1"/>
+                </a:solidFill>
+              </a:rPr>
+              <a:t>========== 彙總統計 ==========
+成功處理 case 數: 28 / 30
+總 Block 誤差: 1579
+總 Zone 錯誤: 115
+--- Zone 錯誤分佈 ---
+   zone    漏亮    多亮   Total
+  ----------------------------------
+       0       0      28      28
+       1       0      28      28
+       2       1       2       3
+--- Top-5 Block 誤差最高 Case ---
+Case  5 : 87 block diffs
+Case 12 : 74 block diffs
+Case  3 : 68 block diffs</a:t>
+            </a:r>
+          </a:p>
+        </p:txBody>
+      </p:sp>
+    </p:spTree>
+  </p:cSld>
+  <p:clrMapOvr>
+    <a:masterClrMapping/>
+  </p:clrMapOvr>
+</p:sld>
+</file>
+
+<file path=ppt/slides/slide13.xml><?xml version="1.0" encoding="utf-8"?>
+<p:sld xmlns:a="http://schemas.openxmlformats.org/drawingml/2006/main" xmlns:r="http://schemas.openxmlformats.org/officeDocument/2006/relationships" xmlns:p="http://schemas.openxmlformats.org/presentationml/2006/main">
+  <p:cSld>
+    <p:bg>
+      <p:bgPr>
+        <a:solidFill>
+          <a:srgbClr val="1E1E2E"/>
+        </a:solidFill>
+        <a:effectLst/>
+      </p:bgPr>
+    </p:bg>
+    <p:spTree>
+      <p:nvGrpSpPr>
+        <p:cNvPr id="1" name=""/>
+        <p:cNvGrpSpPr/>
+        <p:nvPr/>
+      </p:nvGrpSpPr>
+      <p:grpSpPr>
+        <a:xfrm>
+          <a:off x="0" y="0"/>
+          <a:ext cx="0" cy="0"/>
+          <a:chOff x="0" y="0"/>
+          <a:chExt cx="0" cy="0"/>
+        </a:xfrm>
+      </p:grpSpPr>
+      <p:sp>
+        <p:nvSpPr>
+          <p:cNvPr id="2" name="Rectangle 1"/>
+          <p:cNvSpPr/>
+          <p:nvPr/>
+        </p:nvSpPr>
+        <p:spPr>
+          <a:xfrm>
+            <a:off x="0" y="0"/>
+            <a:ext cx="12188952" cy="1097280"/>
+          </a:xfrm>
+          <a:prstGeom prst="rect">
+            <a:avLst/>
+          </a:prstGeom>
+          <a:solidFill>
+            <a:srgbClr val="313552"/>
+          </a:solidFill>
+          <a:ln>
+            <a:noFill/>
+          </a:ln>
+        </p:spPr>
+        <p:style>
+          <a:lnRef idx="1">
+            <a:schemeClr val="accent1"/>
+          </a:lnRef>
+          <a:fillRef idx="3">
+            <a:schemeClr val="accent1"/>
+          </a:fillRef>
+          <a:effectRef idx="2">
+            <a:schemeClr val="accent1"/>
+          </a:effectRef>
+          <a:fontRef idx="minor">
+            <a:schemeClr val="lt1"/>
+          </a:fontRef>
+        </p:style>
+        <p:txBody>
+          <a:bodyPr rtlCol="0" anchor="ctr"/>
+          <a:lstStyle/>
+          <a:p>
+            <a:pPr algn="ctr"/>
+            <a:endParaRPr/>
+          </a:p>
+        </p:txBody>
+      </p:sp>
+      <p:sp>
+        <p:nvSpPr>
+          <p:cNvPr id="3" name="TextBox 2"/>
+          <p:cNvSpPr txBox="1"/>
+          <p:nvPr/>
+        </p:nvSpPr>
+        <p:spPr>
+          <a:xfrm>
+            <a:off x="365760" y="91440"/>
+            <a:ext cx="10972800" cy="640080"/>
+          </a:xfrm>
+          <a:prstGeom prst="rect">
+            <a:avLst/>
+          </a:prstGeom>
+          <a:noFill/>
+        </p:spPr>
+        <p:txBody>
+          <a:bodyPr wrap="square">
+            <a:spAutoFit/>
+          </a:bodyPr>
+          <a:lstStyle/>
+          <a:p>
+            <a:pPr algn="l"/>
+            <a:r>
+              <a:rPr sz="3200" b="1">
+                <a:solidFill>
+                  <a:srgbClr val="89B4FA"/>
+                </a:solidFill>
+              </a:rPr>
+              <a:t>打包與部署</a:t>
+            </a:r>
+          </a:p>
+        </p:txBody>
+      </p:sp>
+      <p:sp>
+        <p:nvSpPr>
+          <p:cNvPr id="4" name="TextBox 3"/>
+          <p:cNvSpPr txBox="1"/>
+          <p:nvPr/>
+        </p:nvSpPr>
+        <p:spPr>
+          <a:xfrm>
+            <a:off x="365760" y="685800"/>
+            <a:ext cx="10972800" cy="365760"/>
+          </a:xfrm>
+          <a:prstGeom prst="rect">
+            <a:avLst/>
+          </a:prstGeom>
+          <a:noFill/>
+        </p:spPr>
+        <p:txBody>
+          <a:bodyPr wrap="square">
+            <a:spAutoFit/>
+          </a:bodyPr>
+          <a:lstStyle/>
+          <a:p>
+            <a:pPr algn="l"/>
+            <a:r>
+              <a:rPr sz="1400" b="0">
+                <a:solidFill>
+                  <a:srgbClr val="BAC2D8"/>
+                </a:solidFill>
+              </a:rPr>
+              <a:t>Windows 執行檔 — 無需安裝 Python</a:t>
+            </a:r>
+          </a:p>
+        </p:txBody>
+      </p:sp>
+      <p:sp>
+        <p:nvSpPr>
+          <p:cNvPr id="5" name="Rectangle 4"/>
+          <p:cNvSpPr/>
+          <p:nvPr/>
+        </p:nvSpPr>
+        <p:spPr>
+          <a:xfrm>
+            <a:off x="457200" y="1280160"/>
+            <a:ext cx="5303520" cy="3200400"/>
+          </a:xfrm>
+          <a:prstGeom prst="rect">
+            <a:avLst/>
+          </a:prstGeom>
+          <a:solidFill>
+            <a:srgbClr val="282C42"/>
+          </a:solidFill>
+          <a:ln w="12700">
+            <a:solidFill>
+              <a:srgbClr val="89B4FA"/>
+            </a:solidFill>
+          </a:ln>
+        </p:spPr>
+        <p:style>
+          <a:lnRef idx="1">
+            <a:schemeClr val="accent1"/>
+          </a:lnRef>
+          <a:fillRef idx="3">
+            <a:schemeClr val="accent1"/>
+          </a:fillRef>
+          <a:effectRef idx="2">
+            <a:schemeClr val="accent1"/>
+          </a:effectRef>
+          <a:fontRef idx="minor">
+            <a:schemeClr val="lt1"/>
+          </a:fontRef>
+        </p:style>
+        <p:txBody>
+          <a:bodyPr rtlCol="0" anchor="ctr"/>
+          <a:lstStyle/>
+          <a:p>
+            <a:pPr algn="ctr"/>
+            <a:endParaRPr/>
+          </a:p>
+        </p:txBody>
+      </p:sp>
+      <p:sp>
+        <p:nvSpPr>
+          <p:cNvPr id="6" name="TextBox 5"/>
+          <p:cNvSpPr txBox="1"/>
+          <p:nvPr/>
+        </p:nvSpPr>
+        <p:spPr>
+          <a:xfrm>
+            <a:off x="640080" y="1371600"/>
+            <a:ext cx="4937760" cy="457200"/>
+          </a:xfrm>
+          <a:prstGeom prst="rect">
+            <a:avLst/>
+          </a:prstGeom>
+          <a:noFill/>
+        </p:spPr>
+        <p:txBody>
+          <a:bodyPr wrap="square">
+            <a:spAutoFit/>
+          </a:bodyPr>
+          <a:lstStyle/>
+          <a:p>
+            <a:pPr algn="l"/>
+            <a:r>
+              <a:rPr sz="1600" b="1">
+                <a:solidFill>
+                  <a:srgbClr val="89B4FA"/>
+                </a:solidFill>
+              </a:rPr>
+              <a:t>建置方式</a:t>
+            </a:r>
+          </a:p>
+        </p:txBody>
+      </p:sp>
+      <p:sp>
+        <p:nvSpPr>
+          <p:cNvPr id="7" name="TextBox 6"/>
+          <p:cNvSpPr txBox="1"/>
+          <p:nvPr/>
+        </p:nvSpPr>
+        <p:spPr>
+          <a:xfrm>
+            <a:off x="640080" y="1874519"/>
+            <a:ext cx="4937760" cy="2468880"/>
+          </a:xfrm>
+          <a:prstGeom prst="rect">
+            <a:avLst/>
+          </a:prstGeom>
+          <a:noFill/>
+        </p:spPr>
+        <p:txBody>
+          <a:bodyPr wrap="square">
+            <a:spAutoFit/>
+          </a:bodyPr>
+          <a:lstStyle/>
+          <a:p>
+            <a:pPr algn="l"/>
+            <a:r>
+              <a:rPr sz="1400" b="0">
+                <a:solidFill>
+                  <a:srgbClr val="FFFFFF"/>
+                </a:solidFill>
+              </a:rPr>
+              <a:t>pip install pyinstaller
+build.bat
+→ 輸出：local_dimming_validator.exe
+→ 位置：專案根目錄（~55 MB）
+→ 模式：onefile（單一執行檔）
+→ 每次執行解壓至 temp，完成後清除</a:t>
+            </a:r>
+          </a:p>
+        </p:txBody>
+      </p:sp>
+      <p:sp>
+        <p:nvSpPr>
+          <p:cNvPr id="8" name="Rectangle 7"/>
+          <p:cNvSpPr/>
+          <p:nvPr/>
+        </p:nvSpPr>
+        <p:spPr>
+          <a:xfrm>
+            <a:off x="6217920" y="1280160"/>
+            <a:ext cx="5486400" cy="3200400"/>
+          </a:xfrm>
+          <a:prstGeom prst="rect">
+            <a:avLst/>
+          </a:prstGeom>
+          <a:solidFill>
+            <a:srgbClr val="282C42"/>
+          </a:solidFill>
+          <a:ln w="12700">
+            <a:solidFill>
+              <a:srgbClr val="A6E3A1"/>
+            </a:solidFill>
+          </a:ln>
+        </p:spPr>
+        <p:style>
+          <a:lnRef idx="1">
+            <a:schemeClr val="accent1"/>
+          </a:lnRef>
+          <a:fillRef idx="3">
+            <a:schemeClr val="accent1"/>
+          </a:fillRef>
+          <a:effectRef idx="2">
+            <a:schemeClr val="accent1"/>
+          </a:effectRef>
+          <a:fontRef idx="minor">
+            <a:schemeClr val="lt1"/>
+          </a:fontRef>
+        </p:style>
+        <p:txBody>
+          <a:bodyPr rtlCol="0" anchor="ctr"/>
+          <a:lstStyle/>
+          <a:p>
+            <a:pPr algn="ctr"/>
+            <a:endParaRPr/>
+          </a:p>
+        </p:txBody>
+      </p:sp>
+      <p:sp>
+        <p:nvSpPr>
+          <p:cNvPr id="9" name="TextBox 8"/>
+          <p:cNvSpPr txBox="1"/>
+          <p:nvPr/>
+        </p:nvSpPr>
+        <p:spPr>
+          <a:xfrm>
+            <a:off x="6400800" y="1371600"/>
+            <a:ext cx="5120640" cy="457200"/>
+          </a:xfrm>
+          <a:prstGeom prst="rect">
+            <a:avLst/>
+          </a:prstGeom>
+          <a:noFill/>
+        </p:spPr>
+        <p:txBody>
+          <a:bodyPr wrap="square">
+            <a:spAutoFit/>
+          </a:bodyPr>
+          <a:lstStyle/>
+          <a:p>
+            <a:pPr algn="l"/>
+            <a:r>
+              <a:rPr sz="1600" b="1">
+                <a:solidFill>
+                  <a:srgbClr val="A6E3A1"/>
+                </a:solidFill>
+              </a:rPr>
+              <a:t>部署只需三樣東西</a:t>
+            </a:r>
+          </a:p>
+        </p:txBody>
+      </p:sp>
+      <p:sp>
+        <p:nvSpPr>
+          <p:cNvPr id="10" name="TextBox 9"/>
+          <p:cNvSpPr txBox="1"/>
+          <p:nvPr/>
+        </p:nvSpPr>
+        <p:spPr>
+          <a:xfrm>
+            <a:off x="6400800" y="1874519"/>
+            <a:ext cx="5120640" cy="2468880"/>
+          </a:xfrm>
+          <a:prstGeom prst="rect">
+            <a:avLst/>
+          </a:prstGeom>
+          <a:noFill/>
+        </p:spPr>
+        <p:txBody>
+          <a:bodyPr wrap="square">
+            <a:spAutoFit/>
+          </a:bodyPr>
+          <a:lstStyle/>
+          <a:p>
+            <a:pPr algn="l"/>
+            <a:r>
+              <a:rPr sz="1400" b="0">
+                <a:solidFill>
+                  <a:srgbClr val="FFFFFF"/>
+                </a:solidFill>
+              </a:rPr>
+              <a:t>local_dimming_validator.exe
+zone.txt
+input/、dump/、LED/
+執行方式：
+local_dimming_validator.exe
+  [data_dir] [-c COUNT]</a:t>
+            </a:r>
+          </a:p>
+        </p:txBody>
+      </p:sp>
+      <p:sp>
+        <p:nvSpPr>
+          <p:cNvPr id="11" name="TextBox 10"/>
+          <p:cNvSpPr txBox="1"/>
+          <p:nvPr/>
+        </p:nvSpPr>
+        <p:spPr>
+          <a:xfrm>
+            <a:off x="457200" y="4709160"/>
+            <a:ext cx="11247120" cy="457200"/>
+          </a:xfrm>
+          <a:prstGeom prst="rect">
+            <a:avLst/>
+          </a:prstGeom>
+          <a:noFill/>
+        </p:spPr>
+        <p:txBody>
+          <a:bodyPr wrap="square">
+            <a:spAutoFit/>
+          </a:bodyPr>
+          <a:lstStyle/>
+          <a:p>
+            <a:pPr algn="ctr"/>
+            <a:r>
+              <a:rPr sz="1600" b="1">
+                <a:solidFill>
+                  <a:srgbClr val="F9E2AF"/>
+                </a:solidFill>
+              </a:rPr>
+              <a:t>GitHub Releases v1.7.0 — 可直接下載 .exe，無需建置環境</a:t>
+            </a:r>
+          </a:p>
+        </p:txBody>
+      </p:sp>
+    </p:spTree>
+  </p:cSld>
+  <p:clrMapOvr>
+    <a:masterClrMapping/>
+  </p:clrMapOvr>
+</p:sld>
+</file>
+
+<file path=ppt/slides/slide14.xml><?xml version="1.0" encoding="utf-8"?>
+<p:sld xmlns:a="http://schemas.openxmlformats.org/drawingml/2006/main" xmlns:r="http://schemas.openxmlformats.org/officeDocument/2006/relationships" xmlns:p="http://schemas.openxmlformats.org/presentationml/2006/main">
+  <p:cSld>
+    <p:bg>
+      <p:bgPr>
+        <a:solidFill>
+          <a:srgbClr val="1E1E2E"/>
+        </a:solidFill>
+        <a:effectLst/>
+      </p:bgPr>
+    </p:bg>
+    <p:spTree>
+      <p:nvGrpSpPr>
+        <p:cNvPr id="1" name=""/>
+        <p:cNvGrpSpPr/>
+        <p:nvPr/>
+      </p:nvGrpSpPr>
+      <p:grpSpPr>
+        <a:xfrm>
+          <a:off x="0" y="0"/>
+          <a:ext cx="0" cy="0"/>
+          <a:chOff x="0" y="0"/>
+          <a:chExt cx="0" cy="0"/>
+        </a:xfrm>
+      </p:grpSpPr>
+      <p:sp>
+        <p:nvSpPr>
           <p:cNvPr id="3" name="TextBox 2"/>
           <p:cNvSpPr txBox="1"/>
           <p:nvPr/>
@@ -3321,7 +5180,7 @@
         </p:nvSpPr>
         <p:spPr>
           <a:xfrm>
-            <a:off x="1371600" y="1884316"/>
+            <a:off x="1371600" y="1965960"/>
             <a:ext cx="9418320" cy="685800"/>
           </a:xfrm>
           <a:prstGeom prst="rect">
@@ -3405,42 +5264,13 @@
           <a:p>
             <a:pPr algn="l"/>
             <a:r>
-              <a:rPr sz="1700" b="0" dirty="0">
+              <a:rPr sz="1700" b="0">
                 <a:solidFill>
                   <a:srgbClr val="FFFFFF"/>
                 </a:solidFill>
               </a:rPr>
-              <a:t>✅  </a:t>
-            </a:r>
-            <a:r>
-              <a:rPr sz="1700" b="0" dirty="0" err="1">
-                <a:solidFill>
-                  <a:srgbClr val="FFFFFF"/>
-                </a:solidFill>
-              </a:rPr>
-              <a:t>相容性：支援新舊兩種</a:t>
-            </a:r>
-            <a:r>
-              <a:rPr sz="1700" b="0" dirty="0">
-                <a:solidFill>
-                  <a:srgbClr val="FFFFFF"/>
-                </a:solidFill>
-              </a:rPr>
-              <a:t> Dump </a:t>
-            </a:r>
-            <a:r>
-              <a:rPr sz="1700" b="0" dirty="0" err="1">
-                <a:solidFill>
-                  <a:srgbClr val="FFFFFF"/>
-                </a:solidFill>
-              </a:rPr>
-              <a:t>格式，影像尺寸自動驗證</a:t>
-            </a:r>
-            <a:endParaRPr sz="1700" b="0" dirty="0">
-              <a:solidFill>
-                <a:srgbClr val="FFFFFF"/>
-              </a:solidFill>
-            </a:endParaRPr>
+              <a:t>✅  相容性：支援新舊兩種 Dump 格式，影像尺寸自動驗證</a:t>
+            </a:r>
           </a:p>
         </p:txBody>
       </p:sp>
@@ -3468,42 +5298,13 @@
           <a:p>
             <a:pPr algn="l"/>
             <a:r>
-              <a:rPr sz="1700" b="0" dirty="0">
+              <a:rPr sz="1700" b="0">
                 <a:solidFill>
                   <a:srgbClr val="FFFFFF"/>
                 </a:solidFill>
               </a:rPr>
-              <a:t>✅  </a:t>
-            </a:r>
-            <a:r>
-              <a:rPr sz="1700" b="0" dirty="0" err="1">
-                <a:solidFill>
-                  <a:srgbClr val="FFFFFF"/>
-                </a:solidFill>
-              </a:rPr>
-              <a:t>效能：NumPy</a:t>
-            </a:r>
-            <a:r>
-              <a:rPr sz="1700" b="0" dirty="0">
-                <a:solidFill>
-                  <a:srgbClr val="FFFFFF"/>
-                </a:solidFill>
-              </a:rPr>
-              <a:t> </a:t>
-            </a:r>
-            <a:r>
-              <a:rPr sz="1700" b="0" dirty="0" err="1">
-                <a:solidFill>
-                  <a:srgbClr val="FFFFFF"/>
-                </a:solidFill>
-              </a:rPr>
-              <a:t>向量化，告別雙層迴圈</a:t>
-            </a:r>
-            <a:endParaRPr sz="1700" b="0" dirty="0">
-              <a:solidFill>
-                <a:srgbClr val="FFFFFF"/>
-              </a:solidFill>
-            </a:endParaRPr>
+              <a:t>✅  效能：NumPy 向量化，告別雙層迴圈</a:t>
+            </a:r>
           </a:p>
         </p:txBody>
       </p:sp>
@@ -3531,74 +5332,13 @@
           <a:p>
             <a:pPr algn="l"/>
             <a:r>
-              <a:rPr sz="1700" b="0" dirty="0">
+              <a:rPr sz="1700" b="0">
                 <a:solidFill>
                   <a:srgbClr val="FFFFFF"/>
                 </a:solidFill>
               </a:rPr>
-              <a:t>✅  </a:t>
-            </a:r>
-            <a:r>
-              <a:rPr sz="1700" b="0" dirty="0" err="1">
-                <a:solidFill>
-                  <a:srgbClr val="FFFFFF"/>
-                </a:solidFill>
-              </a:rPr>
-              <a:t>易部署：單一</a:t>
-            </a:r>
-            <a:r>
-              <a:rPr sz="1700" b="0" dirty="0">
-                <a:solidFill>
-                  <a:srgbClr val="FFFFFF"/>
-                </a:solidFill>
-              </a:rPr>
-              <a:t> .</a:t>
-            </a:r>
-            <a:r>
-              <a:rPr sz="1700" b="0" dirty="0" err="1">
-                <a:solidFill>
-                  <a:srgbClr val="FFFFFF"/>
-                </a:solidFill>
-              </a:rPr>
-              <a:t>exe，免安裝</a:t>
-            </a:r>
-            <a:r>
-              <a:rPr sz="1700" b="0" dirty="0">
-                <a:solidFill>
-                  <a:srgbClr val="FFFFFF"/>
-                </a:solidFill>
-              </a:rPr>
-              <a:t> </a:t>
-            </a:r>
-            <a:r>
-              <a:rPr sz="1700" b="0" dirty="0" err="1">
-                <a:solidFill>
-                  <a:srgbClr val="FFFFFF"/>
-                </a:solidFill>
-              </a:rPr>
-              <a:t>Python，GitHub</a:t>
-            </a:r>
-            <a:r>
-              <a:rPr sz="1700" b="0" dirty="0">
-                <a:solidFill>
-                  <a:srgbClr val="FFFFFF"/>
-                </a:solidFill>
-              </a:rPr>
-              <a:t> Releases </a:t>
-            </a:r>
-            <a:r>
-              <a:rPr sz="1700" b="0" dirty="0" err="1">
-                <a:solidFill>
-                  <a:srgbClr val="FFFFFF"/>
-                </a:solidFill>
-              </a:rPr>
-              <a:t>提供下載</a:t>
-            </a:r>
-            <a:endParaRPr sz="1700" b="0" dirty="0">
-              <a:solidFill>
-                <a:srgbClr val="FFFFFF"/>
-              </a:solidFill>
-            </a:endParaRPr>
+              <a:t>✅  易部署：單一 .exe，免安裝 Python，GitHub Releases 提供下載</a:t>
+            </a:r>
           </a:p>
         </p:txBody>
       </p:sp>
@@ -3708,7 +5448,7 @@
                   <a:srgbClr val="89B4FA"/>
                 </a:solidFill>
               </a:rPr>
-              <a:t>問題定義</a:t>
+              <a:t>什麼是 Local Dimming？</a:t>
             </a:r>
           </a:p>
         </p:txBody>
@@ -3742,54 +5482,42 @@
                   <a:srgbClr val="BAC2D8"/>
                 </a:solidFill>
               </a:rPr>
-              <a:t>為什麼需要這個工具？</a:t>
-            </a:r>
-          </a:p>
-        </p:txBody>
-      </p:sp>
-      <p:sp>
-        <p:nvSpPr>
-          <p:cNvPr id="5" name="Rectangle 4"/>
-          <p:cNvSpPr/>
-          <p:nvPr/>
-        </p:nvSpPr>
-        <p:spPr>
-          <a:xfrm>
-            <a:off x="457200" y="1463040"/>
-            <a:ext cx="3474720" cy="2286000"/>
-          </a:xfrm>
-          <a:prstGeom prst="rect">
-            <a:avLst/>
-          </a:prstGeom>
-          <a:solidFill>
-            <a:srgbClr val="313552"/>
-          </a:solidFill>
-          <a:ln w="12700">
-            <a:solidFill>
-              <a:srgbClr val="F38BA8"/>
-            </a:solidFill>
-          </a:ln>
-        </p:spPr>
-        <p:style>
-          <a:lnRef idx="1">
-            <a:schemeClr val="accent1"/>
-          </a:lnRef>
-          <a:fillRef idx="3">
-            <a:schemeClr val="accent1"/>
-          </a:fillRef>
-          <a:effectRef idx="2">
-            <a:schemeClr val="accent1"/>
-          </a:effectRef>
-          <a:fontRef idx="minor">
-            <a:schemeClr val="lt1"/>
-          </a:fontRef>
-        </p:style>
-        <p:txBody>
-          <a:bodyPr rtlCol="0" anchor="ctr"/>
-          <a:lstStyle/>
-          <a:p>
-            <a:pPr algn="ctr"/>
-            <a:endParaRPr/>
+              <a:t>顯示器背光技術背景</a:t>
+            </a:r>
+          </a:p>
+        </p:txBody>
+      </p:sp>
+      <p:sp>
+        <p:nvSpPr>
+          <p:cNvPr id="5" name="TextBox 4"/>
+          <p:cNvSpPr txBox="1"/>
+          <p:nvPr/>
+        </p:nvSpPr>
+        <p:spPr>
+          <a:xfrm>
+            <a:off x="365760" y="1280160"/>
+            <a:ext cx="365760" cy="640080"/>
+          </a:xfrm>
+          <a:prstGeom prst="rect">
+            <a:avLst/>
+          </a:prstGeom>
+          <a:noFill/>
+        </p:spPr>
+        <p:txBody>
+          <a:bodyPr wrap="square">
+            <a:spAutoFit/>
+          </a:bodyPr>
+          <a:lstStyle/>
+          <a:p>
+            <a:pPr algn="l"/>
+            <a:r>
+              <a:rPr sz="2000" b="1">
+                <a:solidFill>
+                  <a:srgbClr val="89B4FA"/>
+                </a:solidFill>
+              </a:rPr>
+              <a:t>💡</a:t>
+            </a:r>
           </a:p>
         </p:txBody>
       </p:sp>
@@ -3801,8 +5529,8 @@
         </p:nvSpPr>
         <p:spPr>
           <a:xfrm>
-            <a:off x="594360" y="1600200"/>
-            <a:ext cx="3200400" cy="548640"/>
+            <a:off x="822960" y="1280160"/>
+            <a:ext cx="10789920" cy="685800"/>
           </a:xfrm>
           <a:prstGeom prst="rect">
             <a:avLst/>
@@ -3817,12 +5545,12 @@
           <a:p>
             <a:pPr algn="l"/>
             <a:r>
-              <a:rPr sz="1800" b="1">
-                <a:solidFill>
-                  <a:srgbClr val="F38BA8"/>
-                </a:solidFill>
-              </a:rPr>
-              <a:t>漏亮 (Missing Light)</a:t>
+              <a:rPr sz="1800" b="0">
+                <a:solidFill>
+                  <a:srgbClr val="FFFFFF"/>
+                </a:solidFill>
+              </a:rPr>
+              <a:t>LED 背光顯示器將螢幕分成數十個獨立區域（Zone），各自控制亮度</a:t>
             </a:r>
           </a:p>
         </p:txBody>
@@ -3835,8 +5563,8 @@
         </p:nvSpPr>
         <p:spPr>
           <a:xfrm>
-            <a:off x="594360" y="2194560"/>
-            <a:ext cx="3200400" cy="1280160"/>
+            <a:off x="365760" y="2057400"/>
+            <a:ext cx="365760" cy="640080"/>
           </a:xfrm>
           <a:prstGeom prst="rect">
             <a:avLst/>
@@ -3851,59 +5579,47 @@
           <a:p>
             <a:pPr algn="l"/>
             <a:r>
-              <a:rPr sz="1500" b="0">
+              <a:rPr sz="2000" b="1">
+                <a:solidFill>
+                  <a:srgbClr val="89B4FA"/>
+                </a:solidFill>
+              </a:rPr>
+              <a:t>🎯</a:t>
+            </a:r>
+          </a:p>
+        </p:txBody>
+      </p:sp>
+      <p:sp>
+        <p:nvSpPr>
+          <p:cNvPr id="8" name="TextBox 7"/>
+          <p:cNvSpPr txBox="1"/>
+          <p:nvPr/>
+        </p:nvSpPr>
+        <p:spPr>
+          <a:xfrm>
+            <a:off x="822960" y="2057400"/>
+            <a:ext cx="10789920" cy="685800"/>
+          </a:xfrm>
+          <a:prstGeom prst="rect">
+            <a:avLst/>
+          </a:prstGeom>
+          <a:noFill/>
+        </p:spPr>
+        <p:txBody>
+          <a:bodyPr wrap="square">
+            <a:spAutoFit/>
+          </a:bodyPr>
+          <a:lstStyle/>
+          <a:p>
+            <a:pPr algn="l"/>
+            <a:r>
+              <a:rPr sz="1800" b="0">
                 <a:solidFill>
                   <a:srgbClr val="FFFFFF"/>
                 </a:solidFill>
               </a:rPr>
-              <a:t>模擬應亮，硬體未亮 → 畫面偏暗</a:t>
-            </a:r>
-          </a:p>
-        </p:txBody>
-      </p:sp>
-      <p:sp>
-        <p:nvSpPr>
-          <p:cNvPr id="8" name="Rectangle 7"/>
-          <p:cNvSpPr/>
-          <p:nvPr/>
-        </p:nvSpPr>
-        <p:spPr>
-          <a:xfrm>
-            <a:off x="4297680" y="1463040"/>
-            <a:ext cx="3474720" cy="2286000"/>
-          </a:xfrm>
-          <a:prstGeom prst="rect">
-            <a:avLst/>
-          </a:prstGeom>
-          <a:solidFill>
-            <a:srgbClr val="313552"/>
-          </a:solidFill>
-          <a:ln w="12700">
-            <a:solidFill>
-              <a:srgbClr val="F9E2AF"/>
-            </a:solidFill>
-          </a:ln>
-        </p:spPr>
-        <p:style>
-          <a:lnRef idx="1">
-            <a:schemeClr val="accent1"/>
-          </a:lnRef>
-          <a:fillRef idx="3">
-            <a:schemeClr val="accent1"/>
-          </a:fillRef>
-          <a:effectRef idx="2">
-            <a:schemeClr val="accent1"/>
-          </a:effectRef>
-          <a:fontRef idx="minor">
-            <a:schemeClr val="lt1"/>
-          </a:fontRef>
-        </p:style>
-        <p:txBody>
-          <a:bodyPr rtlCol="0" anchor="ctr"/>
-          <a:lstStyle/>
-          <a:p>
-            <a:pPr algn="ctr"/>
-            <a:endParaRPr/>
+              <a:t>高對比場景下，暗部 Zone 關燈、亮部 Zone 全亮，以提升對比度與省電</a:t>
+            </a:r>
           </a:p>
         </p:txBody>
       </p:sp>
@@ -3915,8 +5631,8 @@
         </p:nvSpPr>
         <p:spPr>
           <a:xfrm>
-            <a:off x="4434840" y="1600200"/>
-            <a:ext cx="3200400" cy="548640"/>
+            <a:off x="365760" y="2834639"/>
+            <a:ext cx="365760" cy="640080"/>
           </a:xfrm>
           <a:prstGeom prst="rect">
             <a:avLst/>
@@ -3931,12 +5647,12 @@
           <a:p>
             <a:pPr algn="l"/>
             <a:r>
-              <a:rPr sz="1800" b="1">
-                <a:solidFill>
-                  <a:srgbClr val="F9E2AF"/>
-                </a:solidFill>
-              </a:rPr>
-              <a:t>多亮 (Extra Light)</a:t>
+              <a:rPr sz="2000" b="1">
+                <a:solidFill>
+                  <a:srgbClr val="89B4FA"/>
+                </a:solidFill>
+              </a:rPr>
+              <a:t>🔧</a:t>
             </a:r>
           </a:p>
         </p:txBody>
@@ -3949,8 +5665,8 @@
         </p:nvSpPr>
         <p:spPr>
           <a:xfrm>
-            <a:off x="4434840" y="2194560"/>
-            <a:ext cx="3200400" cy="1280160"/>
+            <a:off x="822960" y="2834639"/>
+            <a:ext cx="10789920" cy="685800"/>
           </a:xfrm>
           <a:prstGeom prst="rect">
             <a:avLst/>
@@ -3965,59 +5681,47 @@
           <a:p>
             <a:pPr algn="l"/>
             <a:r>
-              <a:rPr sz="1500" b="0">
+              <a:rPr sz="1800" b="0">
                 <a:solidFill>
                   <a:srgbClr val="FFFFFF"/>
                 </a:solidFill>
               </a:rPr>
-              <a:t>模擬應滅，硬體多亮 → 對比度下降</a:t>
-            </a:r>
-          </a:p>
-        </p:txBody>
-      </p:sp>
-      <p:sp>
-        <p:nvSpPr>
-          <p:cNvPr id="11" name="Rectangle 10"/>
-          <p:cNvSpPr/>
-          <p:nvPr/>
-        </p:nvSpPr>
-        <p:spPr>
-          <a:xfrm>
-            <a:off x="8138160" y="1463040"/>
-            <a:ext cx="3474720" cy="2286000"/>
-          </a:xfrm>
-          <a:prstGeom prst="rect">
-            <a:avLst/>
-          </a:prstGeom>
-          <a:solidFill>
-            <a:srgbClr val="313552"/>
-          </a:solidFill>
-          <a:ln w="12700">
-            <a:solidFill>
-              <a:srgbClr val="89B4FA"/>
-            </a:solidFill>
-          </a:ln>
-        </p:spPr>
-        <p:style>
-          <a:lnRef idx="1">
-            <a:schemeClr val="accent1"/>
-          </a:lnRef>
-          <a:fillRef idx="3">
-            <a:schemeClr val="accent1"/>
-          </a:fillRef>
-          <a:effectRef idx="2">
-            <a:schemeClr val="accent1"/>
-          </a:effectRef>
-          <a:fontRef idx="minor">
-            <a:schemeClr val="lt1"/>
-          </a:fontRef>
-        </p:style>
-        <p:txBody>
-          <a:bodyPr rtlCol="0" anchor="ctr"/>
-          <a:lstStyle/>
-          <a:p>
-            <a:pPr algn="ctr"/>
-            <a:endParaRPr/>
+              <a:t>Local Dimming 控制器需判斷每個 Zone 的亮度需求，驅動對應 LED</a:t>
+            </a:r>
+          </a:p>
+        </p:txBody>
+      </p:sp>
+      <p:sp>
+        <p:nvSpPr>
+          <p:cNvPr id="11" name="TextBox 10"/>
+          <p:cNvSpPr txBox="1"/>
+          <p:nvPr/>
+        </p:nvSpPr>
+        <p:spPr>
+          <a:xfrm>
+            <a:off x="365760" y="3611879"/>
+            <a:ext cx="365760" cy="640080"/>
+          </a:xfrm>
+          <a:prstGeom prst="rect">
+            <a:avLst/>
+          </a:prstGeom>
+          <a:noFill/>
+        </p:spPr>
+        <p:txBody>
+          <a:bodyPr wrap="square">
+            <a:spAutoFit/>
+          </a:bodyPr>
+          <a:lstStyle/>
+          <a:p>
+            <a:pPr algn="l"/>
+            <a:r>
+              <a:rPr sz="2000" b="1">
+                <a:solidFill>
+                  <a:srgbClr val="89B4FA"/>
+                </a:solidFill>
+              </a:rPr>
+              <a:t>✅</a:t>
+            </a:r>
           </a:p>
         </p:txBody>
       </p:sp>
@@ -4029,8 +5733,8 @@
         </p:nvSpPr>
         <p:spPr>
           <a:xfrm>
-            <a:off x="8275320" y="1600200"/>
-            <a:ext cx="3200400" cy="548640"/>
+            <a:off x="822960" y="3611879"/>
+            <a:ext cx="10789920" cy="685800"/>
           </a:xfrm>
           <a:prstGeom prst="rect">
             <a:avLst/>
@@ -4045,86 +5749,13 @@
           <a:p>
             <a:pPr algn="l"/>
             <a:r>
-              <a:rPr sz="1800" b="1">
-                <a:solidFill>
-                  <a:srgbClr val="89B4FA"/>
-                </a:solidFill>
-              </a:rPr>
-              <a:t>Block 誤差</a:t>
-            </a:r>
-          </a:p>
-        </p:txBody>
-      </p:sp>
-      <p:sp>
-        <p:nvSpPr>
-          <p:cNvPr id="13" name="TextBox 12"/>
-          <p:cNvSpPr txBox="1"/>
-          <p:nvPr/>
-        </p:nvSpPr>
-        <p:spPr>
-          <a:xfrm>
-            <a:off x="8275320" y="2194560"/>
-            <a:ext cx="3200400" cy="1280160"/>
-          </a:xfrm>
-          <a:prstGeom prst="rect">
-            <a:avLst/>
-          </a:prstGeom>
-          <a:noFill/>
-        </p:spPr>
-        <p:txBody>
-          <a:bodyPr wrap="square">
-            <a:spAutoFit/>
-          </a:bodyPr>
-          <a:lstStyle/>
-          <a:p>
-            <a:pPr algn="l"/>
-            <a:r>
-              <a:rPr sz="1500" b="0">
+              <a:rPr sz="1800" b="0">
                 <a:solidFill>
                   <a:srgbClr val="FFFFFF"/>
                 </a:solidFill>
               </a:rPr>
-              <a:t>40×80 Grid 中每格亮度值不一致</a:t>
-            </a:r>
-          </a:p>
-        </p:txBody>
-      </p:sp>
-      <p:sp>
-        <p:nvSpPr>
-          <p:cNvPr id="14" name="TextBox 13"/>
-          <p:cNvSpPr txBox="1"/>
-          <p:nvPr/>
-        </p:nvSpPr>
-        <p:spPr>
-          <a:xfrm>
-            <a:off x="914400" y="4023360"/>
-            <a:ext cx="10332720" cy="548640"/>
-          </a:xfrm>
-          <a:prstGeom prst="rect">
-            <a:avLst/>
-          </a:prstGeom>
-          <a:noFill/>
-        </p:spPr>
-        <p:txBody>
-          <a:bodyPr wrap="square">
-            <a:spAutoFit/>
-          </a:bodyPr>
-          <a:lstStyle/>
-          <a:p>
-            <a:pPr algn="ctr"/>
-            <a:r>
-              <a:rPr sz="1800" b="1" dirty="0" err="1">
-                <a:solidFill>
-                  <a:srgbClr val="A6E3A1"/>
-                </a:solidFill>
-              </a:rPr>
-              <a:t>本工具自動比對所有測試組，輸出視覺化差異圖與統計報告</a:t>
-            </a:r>
-            <a:endParaRPr sz="1800" b="1" dirty="0">
-              <a:solidFill>
-                <a:srgbClr val="A6E3A1"/>
-              </a:solidFill>
-            </a:endParaRPr>
+              <a:t>驗證：確認韌體邏輯與理論模擬結果一致，避免「漏亮」或「多亮」</a:t>
+            </a:r>
           </a:p>
         </p:txBody>
       </p:sp>
@@ -4234,7 +5865,7 @@
                   <a:srgbClr val="89B4FA"/>
                 </a:solidFill>
               </a:rPr>
-              <a:t>專案架構</a:t>
+              <a:t>問題定義</a:t>
             </a:r>
           </a:p>
         </p:txBody>
@@ -4268,7 +5899,7 @@
                   <a:srgbClr val="BAC2D8"/>
                 </a:solidFill>
               </a:rPr>
-              <a:t>目錄結構與主要元件</a:t>
+              <a:t>為什麼需要這個工具？</a:t>
             </a:r>
           </a:p>
         </p:txBody>
@@ -4281,17 +5912,19 @@
         </p:nvSpPr>
         <p:spPr>
           <a:xfrm>
-            <a:off x="5989320" y="1234440"/>
-            <a:ext cx="27432" cy="5303520"/>
+            <a:off x="457200" y="1463040"/>
+            <a:ext cx="3474720" cy="2286000"/>
           </a:xfrm>
           <a:prstGeom prst="rect">
             <a:avLst/>
           </a:prstGeom>
           <a:solidFill>
-            <a:srgbClr val="BAC2D8"/>
+            <a:srgbClr val="313552"/>
           </a:solidFill>
-          <a:ln>
-            <a:noFill/>
+          <a:ln w="12700">
+            <a:solidFill>
+              <a:srgbClr val="F38BA8"/>
+            </a:solidFill>
           </a:ln>
         </p:spPr>
         <p:style>
@@ -4325,8 +5958,8 @@
         </p:nvSpPr>
         <p:spPr>
           <a:xfrm>
-            <a:off x="365760" y="1234440"/>
-            <a:ext cx="5394960" cy="457200"/>
+            <a:off x="594360" y="1600200"/>
+            <a:ext cx="3200400" cy="548640"/>
           </a:xfrm>
           <a:prstGeom prst="rect">
             <a:avLst/>
@@ -4341,12 +5974,12 @@
           <a:p>
             <a:pPr algn="l"/>
             <a:r>
-              <a:rPr sz="1600" b="1">
-                <a:solidFill>
-                  <a:srgbClr val="A6E3A1"/>
-                </a:solidFill>
-              </a:rPr>
-              <a:t>程式元件</a:t>
+              <a:rPr sz="1800" b="1">
+                <a:solidFill>
+                  <a:srgbClr val="F38BA8"/>
+                </a:solidFill>
+              </a:rPr>
+              <a:t>漏亮 (Missing Light)</a:t>
             </a:r>
           </a:p>
         </p:txBody>
@@ -4359,8 +5992,8 @@
         </p:nvSpPr>
         <p:spPr>
           <a:xfrm>
-            <a:off x="365760" y="1737360"/>
-            <a:ext cx="5394960" cy="640080"/>
+            <a:off x="594360" y="2194560"/>
+            <a:ext cx="3200400" cy="1280160"/>
           </a:xfrm>
           <a:prstGeom prst="rect">
             <a:avLst/>
@@ -4375,26 +6008,72 @@
           <a:p>
             <a:pPr algn="l"/>
             <a:r>
-              <a:rPr sz="1600" b="0">
+              <a:rPr sz="1500" b="0">
                 <a:solidFill>
                   <a:srgbClr val="FFFFFF"/>
                 </a:solidFill>
               </a:rPr>
-              <a:t>• local_dimming_align.py　主程式</a:t>
-            </a:r>
-          </a:p>
-        </p:txBody>
-      </p:sp>
-      <p:sp>
-        <p:nvSpPr>
-          <p:cNvPr id="8" name="TextBox 7"/>
-          <p:cNvSpPr txBox="1"/>
-          <p:nvPr/>
-        </p:nvSpPr>
-        <p:spPr>
-          <a:xfrm>
-            <a:off x="365760" y="2423160"/>
-            <a:ext cx="5394960" cy="640080"/>
+              <a:t>模擬應亮，硬體未亮 → 畫面偏暗</a:t>
+            </a:r>
+          </a:p>
+        </p:txBody>
+      </p:sp>
+      <p:sp>
+        <p:nvSpPr>
+          <p:cNvPr id="8" name="Rectangle 7"/>
+          <p:cNvSpPr/>
+          <p:nvPr/>
+        </p:nvSpPr>
+        <p:spPr>
+          <a:xfrm>
+            <a:off x="4297680" y="1463040"/>
+            <a:ext cx="3474720" cy="2286000"/>
+          </a:xfrm>
+          <a:prstGeom prst="rect">
+            <a:avLst/>
+          </a:prstGeom>
+          <a:solidFill>
+            <a:srgbClr val="313552"/>
+          </a:solidFill>
+          <a:ln w="12700">
+            <a:solidFill>
+              <a:srgbClr val="F9E2AF"/>
+            </a:solidFill>
+          </a:ln>
+        </p:spPr>
+        <p:style>
+          <a:lnRef idx="1">
+            <a:schemeClr val="accent1"/>
+          </a:lnRef>
+          <a:fillRef idx="3">
+            <a:schemeClr val="accent1"/>
+          </a:fillRef>
+          <a:effectRef idx="2">
+            <a:schemeClr val="accent1"/>
+          </a:effectRef>
+          <a:fontRef idx="minor">
+            <a:schemeClr val="lt1"/>
+          </a:fontRef>
+        </p:style>
+        <p:txBody>
+          <a:bodyPr rtlCol="0" anchor="ctr"/>
+          <a:lstStyle/>
+          <a:p>
+            <a:pPr algn="ctr"/>
+            <a:endParaRPr/>
+          </a:p>
+        </p:txBody>
+      </p:sp>
+      <p:sp>
+        <p:nvSpPr>
+          <p:cNvPr id="9" name="TextBox 8"/>
+          <p:cNvSpPr txBox="1"/>
+          <p:nvPr/>
+        </p:nvSpPr>
+        <p:spPr>
+          <a:xfrm>
+            <a:off x="4434840" y="1600200"/>
+            <a:ext cx="3200400" cy="548640"/>
           </a:xfrm>
           <a:prstGeom prst="rect">
             <a:avLst/>
@@ -4409,26 +6088,106 @@
           <a:p>
             <a:pPr algn="l"/>
             <a:r>
-              <a:rPr sz="1600" b="0">
+              <a:rPr sz="1800" b="1">
+                <a:solidFill>
+                  <a:srgbClr val="F9E2AF"/>
+                </a:solidFill>
+              </a:rPr>
+              <a:t>多亮 (Extra Light)</a:t>
+            </a:r>
+          </a:p>
+        </p:txBody>
+      </p:sp>
+      <p:sp>
+        <p:nvSpPr>
+          <p:cNvPr id="10" name="TextBox 9"/>
+          <p:cNvSpPr txBox="1"/>
+          <p:nvPr/>
+        </p:nvSpPr>
+        <p:spPr>
+          <a:xfrm>
+            <a:off x="4434840" y="2194560"/>
+            <a:ext cx="3200400" cy="1280160"/>
+          </a:xfrm>
+          <a:prstGeom prst="rect">
+            <a:avLst/>
+          </a:prstGeom>
+          <a:noFill/>
+        </p:spPr>
+        <p:txBody>
+          <a:bodyPr wrap="square">
+            <a:spAutoFit/>
+          </a:bodyPr>
+          <a:lstStyle/>
+          <a:p>
+            <a:pPr algn="l"/>
+            <a:r>
+              <a:rPr sz="1500" b="0">
                 <a:solidFill>
                   <a:srgbClr val="FFFFFF"/>
                 </a:solidFill>
               </a:rPr>
-              <a:t>• visualize_diff.py　獨立視覺化腳本</a:t>
-            </a:r>
-          </a:p>
-        </p:txBody>
-      </p:sp>
-      <p:sp>
-        <p:nvSpPr>
-          <p:cNvPr id="9" name="TextBox 8"/>
-          <p:cNvSpPr txBox="1"/>
-          <p:nvPr/>
-        </p:nvSpPr>
-        <p:spPr>
-          <a:xfrm>
-            <a:off x="365760" y="3108960"/>
-            <a:ext cx="5394960" cy="640080"/>
+              <a:t>模擬應滅，硬體多亮 → 對比度下降</a:t>
+            </a:r>
+          </a:p>
+        </p:txBody>
+      </p:sp>
+      <p:sp>
+        <p:nvSpPr>
+          <p:cNvPr id="11" name="Rectangle 10"/>
+          <p:cNvSpPr/>
+          <p:nvPr/>
+        </p:nvSpPr>
+        <p:spPr>
+          <a:xfrm>
+            <a:off x="8138160" y="1463040"/>
+            <a:ext cx="3474720" cy="2286000"/>
+          </a:xfrm>
+          <a:prstGeom prst="rect">
+            <a:avLst/>
+          </a:prstGeom>
+          <a:solidFill>
+            <a:srgbClr val="313552"/>
+          </a:solidFill>
+          <a:ln w="12700">
+            <a:solidFill>
+              <a:srgbClr val="89B4FA"/>
+            </a:solidFill>
+          </a:ln>
+        </p:spPr>
+        <p:style>
+          <a:lnRef idx="1">
+            <a:schemeClr val="accent1"/>
+          </a:lnRef>
+          <a:fillRef idx="3">
+            <a:schemeClr val="accent1"/>
+          </a:fillRef>
+          <a:effectRef idx="2">
+            <a:schemeClr val="accent1"/>
+          </a:effectRef>
+          <a:fontRef idx="minor">
+            <a:schemeClr val="lt1"/>
+          </a:fontRef>
+        </p:style>
+        <p:txBody>
+          <a:bodyPr rtlCol="0" anchor="ctr"/>
+          <a:lstStyle/>
+          <a:p>
+            <a:pPr algn="ctr"/>
+            <a:endParaRPr/>
+          </a:p>
+        </p:txBody>
+      </p:sp>
+      <p:sp>
+        <p:nvSpPr>
+          <p:cNvPr id="12" name="TextBox 11"/>
+          <p:cNvSpPr txBox="1"/>
+          <p:nvPr/>
+        </p:nvSpPr>
+        <p:spPr>
+          <a:xfrm>
+            <a:off x="8275320" y="1600200"/>
+            <a:ext cx="3200400" cy="548640"/>
           </a:xfrm>
           <a:prstGeom prst="rect">
             <a:avLst/>
@@ -4443,39 +6202,60 @@
           <a:p>
             <a:pPr algn="l"/>
             <a:r>
-              <a:rPr sz="1600" b="0" dirty="0">
+              <a:rPr sz="1800" b="1">
+                <a:solidFill>
+                  <a:srgbClr val="89B4FA"/>
+                </a:solidFill>
+              </a:rPr>
+              <a:t>Block 誤差</a:t>
+            </a:r>
+          </a:p>
+        </p:txBody>
+      </p:sp>
+      <p:sp>
+        <p:nvSpPr>
+          <p:cNvPr id="13" name="TextBox 12"/>
+          <p:cNvSpPr txBox="1"/>
+          <p:nvPr/>
+        </p:nvSpPr>
+        <p:spPr>
+          <a:xfrm>
+            <a:off x="8275320" y="2194560"/>
+            <a:ext cx="3200400" cy="1280160"/>
+          </a:xfrm>
+          <a:prstGeom prst="rect">
+            <a:avLst/>
+          </a:prstGeom>
+          <a:noFill/>
+        </p:spPr>
+        <p:txBody>
+          <a:bodyPr wrap="square">
+            <a:spAutoFit/>
+          </a:bodyPr>
+          <a:lstStyle/>
+          <a:p>
+            <a:pPr algn="l"/>
+            <a:r>
+              <a:rPr sz="1500" b="0">
                 <a:solidFill>
                   <a:srgbClr val="FFFFFF"/>
                 </a:solidFill>
               </a:rPr>
-              <a:t>• zone.txt　30 個 LED Zone </a:t>
-            </a:r>
-            <a:r>
-              <a:rPr sz="1600" b="0" dirty="0" err="1">
-                <a:solidFill>
-                  <a:srgbClr val="FFFFFF"/>
-                </a:solidFill>
-              </a:rPr>
-              <a:t>座標定義</a:t>
-            </a:r>
-            <a:endParaRPr sz="1600" b="0" dirty="0">
-              <a:solidFill>
-                <a:srgbClr val="FFFFFF"/>
-              </a:solidFill>
-            </a:endParaRPr>
-          </a:p>
-        </p:txBody>
-      </p:sp>
-      <p:sp>
-        <p:nvSpPr>
-          <p:cNvPr id="10" name="TextBox 9"/>
-          <p:cNvSpPr txBox="1"/>
-          <p:nvPr/>
-        </p:nvSpPr>
-        <p:spPr>
-          <a:xfrm>
-            <a:off x="365760" y="3794760"/>
-            <a:ext cx="5394960" cy="640080"/>
+              <a:t>40×80 Grid 中每格亮度值不一致</a:t>
+            </a:r>
+          </a:p>
+        </p:txBody>
+      </p:sp>
+      <p:sp>
+        <p:nvSpPr>
+          <p:cNvPr id="14" name="TextBox 13"/>
+          <p:cNvSpPr txBox="1"/>
+          <p:nvPr/>
+        </p:nvSpPr>
+        <p:spPr>
+          <a:xfrm>
+            <a:off x="914400" y="4023360"/>
+            <a:ext cx="10332720" cy="548640"/>
           </a:xfrm>
           <a:prstGeom prst="rect">
             <a:avLst/>
@@ -4488,328 +6268,14 @@
           </a:bodyPr>
           <a:lstStyle/>
           <a:p>
-            <a:pPr algn="l"/>
-            <a:r>
-              <a:rPr sz="1600" b="0">
-                <a:solidFill>
-                  <a:srgbClr val="FFFFFF"/>
-                </a:solidFill>
-              </a:rPr>
-              <a:t>• build.bat + .spec　PyInstaller 打包</a:t>
-            </a:r>
-          </a:p>
-        </p:txBody>
-      </p:sp>
-      <p:sp>
-        <p:nvSpPr>
-          <p:cNvPr id="11" name="TextBox 10"/>
-          <p:cNvSpPr txBox="1"/>
-          <p:nvPr/>
-        </p:nvSpPr>
-        <p:spPr>
-          <a:xfrm>
-            <a:off x="365760" y="4480560"/>
-            <a:ext cx="5394960" cy="640080"/>
-          </a:xfrm>
-          <a:prstGeom prst="rect">
-            <a:avLst/>
-          </a:prstGeom>
-          <a:noFill/>
-        </p:spPr>
-        <p:txBody>
-          <a:bodyPr wrap="square">
-            <a:spAutoFit/>
-          </a:bodyPr>
-          <a:lstStyle/>
-          <a:p>
-            <a:pPr algn="l"/>
-            <a:r>
-              <a:rPr sz="1600" b="0">
-                <a:solidFill>
-                  <a:srgbClr val="FFFFFF"/>
-                </a:solidFill>
-              </a:rPr>
-              <a:t>• local_dimming_validator.exe　發佈執行檔</a:t>
-            </a:r>
-          </a:p>
-        </p:txBody>
-      </p:sp>
-      <p:sp>
-        <p:nvSpPr>
-          <p:cNvPr id="12" name="TextBox 11"/>
-          <p:cNvSpPr txBox="1"/>
-          <p:nvPr/>
-        </p:nvSpPr>
-        <p:spPr>
-          <a:xfrm>
-            <a:off x="6217920" y="1234440"/>
-            <a:ext cx="5577840" cy="457200"/>
-          </a:xfrm>
-          <a:prstGeom prst="rect">
-            <a:avLst/>
-          </a:prstGeom>
-          <a:noFill/>
-        </p:spPr>
-        <p:txBody>
-          <a:bodyPr wrap="square">
-            <a:spAutoFit/>
-          </a:bodyPr>
-          <a:lstStyle/>
-          <a:p>
-            <a:pPr algn="l"/>
-            <a:r>
-              <a:rPr sz="1600" b="1">
-                <a:solidFill>
-                  <a:srgbClr val="A6E3A1"/>
-                </a:solidFill>
-              </a:rPr>
-              <a:t>資料目錄</a:t>
-            </a:r>
-          </a:p>
-        </p:txBody>
-      </p:sp>
-      <p:sp>
-        <p:nvSpPr>
-          <p:cNvPr id="13" name="TextBox 12"/>
-          <p:cNvSpPr txBox="1"/>
-          <p:nvPr/>
-        </p:nvSpPr>
-        <p:spPr>
-          <a:xfrm>
-            <a:off x="6217920" y="1737360"/>
-            <a:ext cx="5577840" cy="640080"/>
-          </a:xfrm>
-          <a:prstGeom prst="rect">
-            <a:avLst/>
-          </a:prstGeom>
-          <a:noFill/>
-        </p:spPr>
-        <p:txBody>
-          <a:bodyPr wrap="square">
-            <a:spAutoFit/>
-          </a:bodyPr>
-          <a:lstStyle/>
-          <a:p>
-            <a:pPr algn="l"/>
-            <a:r>
-              <a:rPr sz="1600" b="0">
-                <a:solidFill>
-                  <a:srgbClr val="FFFFFF"/>
-                </a:solidFill>
-              </a:rPr>
-              <a:t>• input/　灰階輸入影像 (1280×640)</a:t>
-            </a:r>
-          </a:p>
-        </p:txBody>
-      </p:sp>
-      <p:sp>
-        <p:nvSpPr>
-          <p:cNvPr id="14" name="TextBox 13"/>
-          <p:cNvSpPr txBox="1"/>
-          <p:nvPr/>
-        </p:nvSpPr>
-        <p:spPr>
-          <a:xfrm>
-            <a:off x="6217920" y="2423160"/>
-            <a:ext cx="5577840" cy="640080"/>
-          </a:xfrm>
-          <a:prstGeom prst="rect">
-            <a:avLst/>
-          </a:prstGeom>
-          <a:noFill/>
-        </p:spPr>
-        <p:txBody>
-          <a:bodyPr wrap="square">
-            <a:spAutoFit/>
-          </a:bodyPr>
-          <a:lstStyle/>
-          <a:p>
-            <a:pPr algn="l"/>
-            <a:r>
-              <a:rPr sz="1600" b="0">
-                <a:solidFill>
-                  <a:srgbClr val="FFFFFF"/>
-                </a:solidFill>
-              </a:rPr>
-              <a:t>• dump/　硬體 Dump txt 檔</a:t>
-            </a:r>
-          </a:p>
-        </p:txBody>
-      </p:sp>
-      <p:sp>
-        <p:nvSpPr>
-          <p:cNvPr id="15" name="TextBox 14"/>
-          <p:cNvSpPr txBox="1"/>
-          <p:nvPr/>
-        </p:nvSpPr>
-        <p:spPr>
-          <a:xfrm>
-            <a:off x="6217920" y="3108960"/>
-            <a:ext cx="5577840" cy="640080"/>
-          </a:xfrm>
-          <a:prstGeom prst="rect">
-            <a:avLst/>
-          </a:prstGeom>
-          <a:noFill/>
-        </p:spPr>
-        <p:txBody>
-          <a:bodyPr wrap="square">
-            <a:spAutoFit/>
-          </a:bodyPr>
-          <a:lstStyle/>
-          <a:p>
-            <a:pPr algn="l"/>
-            <a:r>
-              <a:rPr sz="1600" b="0">
-                <a:solidFill>
-                  <a:srgbClr val="FFFFFF"/>
-                </a:solidFill>
-              </a:rPr>
-              <a:t>• LED/　LED 亮滅 log 檔</a:t>
-            </a:r>
-          </a:p>
-        </p:txBody>
-      </p:sp>
-      <p:sp>
-        <p:nvSpPr>
-          <p:cNvPr id="16" name="TextBox 15"/>
-          <p:cNvSpPr txBox="1"/>
-          <p:nvPr/>
-        </p:nvSpPr>
-        <p:spPr>
-          <a:xfrm>
-            <a:off x="6217920" y="3794760"/>
-            <a:ext cx="5577840" cy="640080"/>
-          </a:xfrm>
-          <a:prstGeom prst="rect">
-            <a:avLst/>
-          </a:prstGeom>
-          <a:noFill/>
-        </p:spPr>
-        <p:txBody>
-          <a:bodyPr wrap="square">
-            <a:spAutoFit/>
-          </a:bodyPr>
-          <a:lstStyle/>
-          <a:p>
-            <a:pPr algn="l"/>
-            <a:r>
-              <a:rPr sz="1600" b="0" dirty="0">
-                <a:solidFill>
-                  <a:srgbClr val="FFFFFF"/>
-                </a:solidFill>
-              </a:rPr>
-              <a:t>• compare/　</a:t>
-            </a:r>
-            <a:r>
-              <a:rPr sz="1600" b="0" dirty="0" err="1">
-                <a:solidFill>
-                  <a:srgbClr val="FFFFFF"/>
-                </a:solidFill>
-              </a:rPr>
-              <a:t>比對結果影像</a:t>
-            </a:r>
-            <a:endParaRPr sz="1600" b="0" dirty="0">
-              <a:solidFill>
-                <a:srgbClr val="FFFFFF"/>
-              </a:solidFill>
-            </a:endParaRPr>
-          </a:p>
-        </p:txBody>
-      </p:sp>
-      <p:sp>
-        <p:nvSpPr>
-          <p:cNvPr id="17" name="TextBox 16"/>
-          <p:cNvSpPr txBox="1"/>
-          <p:nvPr/>
-        </p:nvSpPr>
-        <p:spPr>
-          <a:xfrm>
-            <a:off x="6217920" y="4480560"/>
-            <a:ext cx="5577840" cy="640080"/>
-          </a:xfrm>
-          <a:prstGeom prst="rect">
-            <a:avLst/>
-          </a:prstGeom>
-          <a:noFill/>
-        </p:spPr>
-        <p:txBody>
-          <a:bodyPr wrap="square">
-            <a:spAutoFit/>
-          </a:bodyPr>
-          <a:lstStyle/>
-          <a:p>
-            <a:pPr algn="l"/>
-            <a:r>
-              <a:rPr sz="1600" b="0" dirty="0">
-                <a:solidFill>
-                  <a:srgbClr val="FFFFFF"/>
-                </a:solidFill>
-              </a:rPr>
-              <a:t>• </a:t>
-            </a:r>
-            <a:r>
-              <a:rPr sz="1600" b="0" dirty="0" err="1">
-                <a:solidFill>
-                  <a:srgbClr val="FFFFFF"/>
-                </a:solidFill>
-              </a:rPr>
-              <a:t>sim_output</a:t>
-            </a:r>
-            <a:r>
-              <a:rPr sz="1600" b="0" dirty="0">
-                <a:solidFill>
-                  <a:srgbClr val="FFFFFF"/>
-                </a:solidFill>
-              </a:rPr>
-              <a:t>/　</a:t>
-            </a:r>
-            <a:r>
-              <a:rPr sz="1600" b="0" dirty="0" err="1">
-                <a:solidFill>
-                  <a:srgbClr val="FFFFFF"/>
-                </a:solidFill>
-              </a:rPr>
-              <a:t>模擬輸出影像</a:t>
-            </a:r>
-            <a:endParaRPr sz="1600" b="0" dirty="0">
-              <a:solidFill>
-                <a:srgbClr val="FFFFFF"/>
-              </a:solidFill>
-            </a:endParaRPr>
-          </a:p>
-        </p:txBody>
-      </p:sp>
-      <p:sp>
-        <p:nvSpPr>
-          <p:cNvPr id="18" name="TextBox 17"/>
-          <p:cNvSpPr txBox="1"/>
-          <p:nvPr/>
-        </p:nvSpPr>
-        <p:spPr>
-          <a:xfrm>
-            <a:off x="6217920" y="5166360"/>
-            <a:ext cx="5577840" cy="640080"/>
-          </a:xfrm>
-          <a:prstGeom prst="rect">
-            <a:avLst/>
-          </a:prstGeom>
-          <a:noFill/>
-        </p:spPr>
-        <p:txBody>
-          <a:bodyPr wrap="square">
-            <a:spAutoFit/>
-          </a:bodyPr>
-          <a:lstStyle/>
-          <a:p>
-            <a:pPr algn="l"/>
-            <a:r>
-              <a:rPr sz="1600" b="0">
-                <a:solidFill>
-                  <a:srgbClr val="FFFFFF"/>
-                </a:solidFill>
-              </a:rPr>
-              <a:t>• logs/　執行日誌（UTC+8 時戳）</a:t>
+            <a:pPr algn="ctr"/>
+            <a:r>
+              <a:rPr sz="1800" b="1">
+                <a:solidFill>
+                  <a:srgbClr val="A6E3A1"/>
+                </a:solidFill>
+              </a:rPr>
+              <a:t>本工具自動比對所有測試組，輸出視覺化差異圖與統計報告</a:t>
             </a:r>
           </a:p>
         </p:txBody>
@@ -4920,7 +6386,7 @@
                   <a:srgbClr val="89B4FA"/>
                 </a:solidFill>
               </a:rPr>
-              <a:t>核心流程</a:t>
+              <a:t>專案架構</a:t>
             </a:r>
           </a:p>
         </p:txBody>
@@ -4954,7 +6420,7 @@
                   <a:srgbClr val="BAC2D8"/>
                 </a:solidFill>
               </a:rPr>
-              <a:t>三個主要處理步驟</a:t>
+              <a:t>目錄結構與主要元件</a:t>
             </a:r>
           </a:p>
         </p:txBody>
@@ -4967,19 +6433,17 @@
         </p:nvSpPr>
         <p:spPr>
           <a:xfrm>
-            <a:off x="548640" y="1371600"/>
-            <a:ext cx="3383280" cy="2926080"/>
+            <a:off x="5989320" y="1234440"/>
+            <a:ext cx="27432" cy="5303520"/>
           </a:xfrm>
           <a:prstGeom prst="rect">
             <a:avLst/>
           </a:prstGeom>
           <a:solidFill>
-            <a:srgbClr val="282C42"/>
+            <a:srgbClr val="BAC2D8"/>
           </a:solidFill>
-          <a:ln w="12700">
-            <a:solidFill>
-              <a:srgbClr val="89B4FA"/>
-            </a:solidFill>
+          <a:ln>
+            <a:noFill/>
           </a:ln>
         </p:spPr>
         <p:style>
@@ -5013,8 +6477,8 @@
         </p:nvSpPr>
         <p:spPr>
           <a:xfrm>
-            <a:off x="685800" y="1463040"/>
-            <a:ext cx="548640" cy="640080"/>
+            <a:off x="365760" y="1234440"/>
+            <a:ext cx="5394960" cy="457200"/>
           </a:xfrm>
           <a:prstGeom prst="rect">
             <a:avLst/>
@@ -5029,12 +6493,12 @@
           <a:p>
             <a:pPr algn="l"/>
             <a:r>
-              <a:rPr sz="2800" b="1">
-                <a:solidFill>
-                  <a:srgbClr val="89B4FA"/>
-                </a:solidFill>
-              </a:rPr>
-              <a:t>1</a:t>
+              <a:rPr sz="1600" b="1">
+                <a:solidFill>
+                  <a:srgbClr val="A6E3A1"/>
+                </a:solidFill>
+              </a:rPr>
+              <a:t>程式元件</a:t>
             </a:r>
           </a:p>
         </p:txBody>
@@ -5047,8 +6511,8 @@
         </p:nvSpPr>
         <p:spPr>
           <a:xfrm>
-            <a:off x="685800" y="2011680"/>
-            <a:ext cx="3017520" cy="548640"/>
+            <a:off x="365760" y="1737360"/>
+            <a:ext cx="5394960" cy="640080"/>
           </a:xfrm>
           <a:prstGeom prst="rect">
             <a:avLst/>
@@ -5063,12 +6527,12 @@
           <a:p>
             <a:pPr algn="l"/>
             <a:r>
-              <a:rPr sz="2000" b="1">
-                <a:solidFill>
-                  <a:srgbClr val="89B4FA"/>
-                </a:solidFill>
-              </a:rPr>
-              <a:t>Max-Pooling</a:t>
+              <a:rPr sz="1600" b="0">
+                <a:solidFill>
+                  <a:srgbClr val="FFFFFF"/>
+                </a:solidFill>
+              </a:rPr>
+              <a:t>• local_dimming_align.py　主程式</a:t>
             </a:r>
           </a:p>
         </p:txBody>
@@ -5081,8 +6545,8 @@
         </p:nvSpPr>
         <p:spPr>
           <a:xfrm>
-            <a:off x="685800" y="2606040"/>
-            <a:ext cx="3017520" cy="1554480"/>
+            <a:off x="365760" y="2423160"/>
+            <a:ext cx="5394960" cy="640080"/>
           </a:xfrm>
           <a:prstGeom prst="rect">
             <a:avLst/>
@@ -5097,61 +6561,60 @@
           <a:p>
             <a:pPr algn="l"/>
             <a:r>
-              <a:rPr sz="1500" b="0">
+              <a:rPr sz="1600" b="0" dirty="0">
                 <a:solidFill>
                   <a:srgbClr val="FFFFFF"/>
                 </a:solidFill>
               </a:rPr>
-              <a:t>1280×640 影像 → 40×80 Grid
-每格 16×16 像素取最大值
-模擬 LED 亮度分布</a:t>
-            </a:r>
-          </a:p>
-        </p:txBody>
-      </p:sp>
-      <p:sp>
-        <p:nvSpPr>
-          <p:cNvPr id="9" name="Rectangle 8"/>
-          <p:cNvSpPr/>
-          <p:nvPr/>
-        </p:nvSpPr>
-        <p:spPr>
-          <a:xfrm>
-            <a:off x="4297679" y="1371600"/>
-            <a:ext cx="3383280" cy="2926080"/>
-          </a:xfrm>
-          <a:prstGeom prst="rect">
-            <a:avLst/>
-          </a:prstGeom>
-          <a:solidFill>
-            <a:srgbClr val="282C42"/>
-          </a:solidFill>
-          <a:ln w="12700">
-            <a:solidFill>
-              <a:srgbClr val="A6E3A1"/>
-            </a:solidFill>
-          </a:ln>
-        </p:spPr>
-        <p:style>
-          <a:lnRef idx="1">
-            <a:schemeClr val="accent1"/>
-          </a:lnRef>
-          <a:fillRef idx="3">
-            <a:schemeClr val="accent1"/>
-          </a:fillRef>
-          <a:effectRef idx="2">
-            <a:schemeClr val="accent1"/>
-          </a:effectRef>
-          <a:fontRef idx="minor">
-            <a:schemeClr val="lt1"/>
-          </a:fontRef>
-        </p:style>
-        <p:txBody>
-          <a:bodyPr rtlCol="0" anchor="ctr"/>
-          <a:lstStyle/>
-          <a:p>
-            <a:pPr algn="ctr"/>
-            <a:endParaRPr/>
+              <a:t>• visualize_diff.py　</a:t>
+            </a:r>
+            <a:r>
+              <a:rPr sz="1600" b="0" dirty="0" err="1">
+                <a:solidFill>
+                  <a:srgbClr val="FFFFFF"/>
+                </a:solidFill>
+              </a:rPr>
+              <a:t>獨立視覺化腳本</a:t>
+            </a:r>
+            <a:endParaRPr sz="1600" b="0" dirty="0">
+              <a:solidFill>
+                <a:srgbClr val="FFFFFF"/>
+              </a:solidFill>
+            </a:endParaRPr>
+          </a:p>
+        </p:txBody>
+      </p:sp>
+      <p:sp>
+        <p:nvSpPr>
+          <p:cNvPr id="9" name="TextBox 8"/>
+          <p:cNvSpPr txBox="1"/>
+          <p:nvPr/>
+        </p:nvSpPr>
+        <p:spPr>
+          <a:xfrm>
+            <a:off x="365760" y="3108960"/>
+            <a:ext cx="5394960" cy="640080"/>
+          </a:xfrm>
+          <a:prstGeom prst="rect">
+            <a:avLst/>
+          </a:prstGeom>
+          <a:noFill/>
+        </p:spPr>
+        <p:txBody>
+          <a:bodyPr wrap="square">
+            <a:spAutoFit/>
+          </a:bodyPr>
+          <a:lstStyle/>
+          <a:p>
+            <a:pPr algn="l"/>
+            <a:r>
+              <a:rPr sz="1600" b="0">
+                <a:solidFill>
+                  <a:srgbClr val="FFFFFF"/>
+                </a:solidFill>
+              </a:rPr>
+              <a:t>• zone.txt　30 個 LED Zone 座標定義</a:t>
+            </a:r>
           </a:p>
         </p:txBody>
       </p:sp>
@@ -5163,8 +6626,8 @@
         </p:nvSpPr>
         <p:spPr>
           <a:xfrm>
-            <a:off x="4434840" y="1463040"/>
-            <a:ext cx="548640" cy="640080"/>
+            <a:off x="365760" y="3794760"/>
+            <a:ext cx="5394960" cy="640080"/>
           </a:xfrm>
           <a:prstGeom prst="rect">
             <a:avLst/>
@@ -5179,12 +6642,12 @@
           <a:p>
             <a:pPr algn="l"/>
             <a:r>
-              <a:rPr sz="2800" b="1">
-                <a:solidFill>
-                  <a:srgbClr val="A6E3A1"/>
-                </a:solidFill>
-              </a:rPr>
-              <a:t>2</a:t>
+              <a:rPr sz="1600" b="0">
+                <a:solidFill>
+                  <a:srgbClr val="FFFFFF"/>
+                </a:solidFill>
+              </a:rPr>
+              <a:t>• build.bat + .spec　PyInstaller 打包</a:t>
             </a:r>
           </a:p>
         </p:txBody>
@@ -5197,8 +6660,8 @@
         </p:nvSpPr>
         <p:spPr>
           <a:xfrm>
-            <a:off x="4434840" y="2011680"/>
-            <a:ext cx="3017520" cy="548640"/>
+            <a:off x="365760" y="4480560"/>
+            <a:ext cx="5394960" cy="640080"/>
           </a:xfrm>
           <a:prstGeom prst="rect">
             <a:avLst/>
@@ -5213,12 +6676,12 @@
           <a:p>
             <a:pPr algn="l"/>
             <a:r>
-              <a:rPr sz="2000" b="1">
-                <a:solidFill>
-                  <a:srgbClr val="A6E3A1"/>
-                </a:solidFill>
-              </a:rPr>
-              <a:t>Block 比對</a:t>
+              <a:rPr sz="1600" b="0">
+                <a:solidFill>
+                  <a:srgbClr val="FFFFFF"/>
+                </a:solidFill>
+              </a:rPr>
+              <a:t>• local_dimming_validator.exe　發佈執行檔</a:t>
             </a:r>
           </a:p>
         </p:txBody>
@@ -5231,8 +6694,8 @@
         </p:nvSpPr>
         <p:spPr>
           <a:xfrm>
-            <a:off x="4434840" y="2606040"/>
-            <a:ext cx="3017520" cy="1554480"/>
+            <a:off x="6217920" y="1234440"/>
+            <a:ext cx="5577840" cy="457200"/>
           </a:xfrm>
           <a:prstGeom prst="rect">
             <a:avLst/>
@@ -5247,61 +6710,47 @@
           <a:p>
             <a:pPr algn="l"/>
             <a:r>
-              <a:rPr sz="1500" b="0">
+              <a:rPr sz="1600" b="1">
+                <a:solidFill>
+                  <a:srgbClr val="A6E3A1"/>
+                </a:solidFill>
+              </a:rPr>
+              <a:t>資料目錄</a:t>
+            </a:r>
+          </a:p>
+        </p:txBody>
+      </p:sp>
+      <p:sp>
+        <p:nvSpPr>
+          <p:cNvPr id="13" name="TextBox 12"/>
+          <p:cNvSpPr txBox="1"/>
+          <p:nvPr/>
+        </p:nvSpPr>
+        <p:spPr>
+          <a:xfrm>
+            <a:off x="6217920" y="1737360"/>
+            <a:ext cx="5577840" cy="640080"/>
+          </a:xfrm>
+          <a:prstGeom prst="rect">
+            <a:avLst/>
+          </a:prstGeom>
+          <a:noFill/>
+        </p:spPr>
+        <p:txBody>
+          <a:bodyPr wrap="square">
+            <a:spAutoFit/>
+          </a:bodyPr>
+          <a:lstStyle/>
+          <a:p>
+            <a:pPr algn="l"/>
+            <a:r>
+              <a:rPr sz="1600" b="0">
                 <a:solidFill>
                   <a:srgbClr val="FFFFFF"/>
                 </a:solidFill>
               </a:rPr>
-              <a:t>逐格比較 Dump 與模擬結果
-統計差異格數 (block_diffs)
-輸出 diff 視覺化圖</a:t>
-            </a:r>
-          </a:p>
-        </p:txBody>
-      </p:sp>
-      <p:sp>
-        <p:nvSpPr>
-          <p:cNvPr id="13" name="Rectangle 12"/>
-          <p:cNvSpPr/>
-          <p:nvPr/>
-        </p:nvSpPr>
-        <p:spPr>
-          <a:xfrm>
-            <a:off x="8046719" y="1371600"/>
-            <a:ext cx="3383280" cy="2926080"/>
-          </a:xfrm>
-          <a:prstGeom prst="rect">
-            <a:avLst/>
-          </a:prstGeom>
-          <a:solidFill>
-            <a:srgbClr val="282C42"/>
-          </a:solidFill>
-          <a:ln w="12700">
-            <a:solidFill>
-              <a:srgbClr val="F9E2AF"/>
-            </a:solidFill>
-          </a:ln>
-        </p:spPr>
-        <p:style>
-          <a:lnRef idx="1">
-            <a:schemeClr val="accent1"/>
-          </a:lnRef>
-          <a:fillRef idx="3">
-            <a:schemeClr val="accent1"/>
-          </a:fillRef>
-          <a:effectRef idx="2">
-            <a:schemeClr val="accent1"/>
-          </a:effectRef>
-          <a:fontRef idx="minor">
-            <a:schemeClr val="lt1"/>
-          </a:fontRef>
-        </p:style>
-        <p:txBody>
-          <a:bodyPr rtlCol="0" anchor="ctr"/>
-          <a:lstStyle/>
-          <a:p>
-            <a:pPr algn="ctr"/>
-            <a:endParaRPr/>
+              <a:t>• input/　灰階輸入影像 (1280×640)</a:t>
+            </a:r>
           </a:p>
         </p:txBody>
       </p:sp>
@@ -5313,8 +6762,8 @@
         </p:nvSpPr>
         <p:spPr>
           <a:xfrm>
-            <a:off x="8183879" y="1463040"/>
-            <a:ext cx="548640" cy="640080"/>
+            <a:off x="6217920" y="2423160"/>
+            <a:ext cx="5577840" cy="640080"/>
           </a:xfrm>
           <a:prstGeom prst="rect">
             <a:avLst/>
@@ -5329,12 +6778,12 @@
           <a:p>
             <a:pPr algn="l"/>
             <a:r>
-              <a:rPr sz="2800" b="1">
-                <a:solidFill>
-                  <a:srgbClr val="F9E2AF"/>
-                </a:solidFill>
-              </a:rPr>
-              <a:t>3</a:t>
+              <a:rPr sz="1600" b="0">
+                <a:solidFill>
+                  <a:srgbClr val="FFFFFF"/>
+                </a:solidFill>
+              </a:rPr>
+              <a:t>• dump/　硬體 Dump txt 檔</a:t>
             </a:r>
           </a:p>
         </p:txBody>
@@ -5347,8 +6796,8 @@
         </p:nvSpPr>
         <p:spPr>
           <a:xfrm>
-            <a:off x="8183879" y="2011680"/>
-            <a:ext cx="3017520" cy="548640"/>
+            <a:off x="6217920" y="3108960"/>
+            <a:ext cx="5577840" cy="640080"/>
           </a:xfrm>
           <a:prstGeom prst="rect">
             <a:avLst/>
@@ -5363,12 +6812,12 @@
           <a:p>
             <a:pPr algn="l"/>
             <a:r>
-              <a:rPr sz="2000" b="1">
-                <a:solidFill>
-                  <a:srgbClr val="F9E2AF"/>
-                </a:solidFill>
-              </a:rPr>
-              <a:t>Zone 比對</a:t>
+              <a:rPr sz="1600" b="0">
+                <a:solidFill>
+                  <a:srgbClr val="FFFFFF"/>
+                </a:solidFill>
+              </a:rPr>
+              <a:t>• LED/　LED 亮滅 log 檔</a:t>
             </a:r>
           </a:p>
         </p:txBody>
@@ -5381,8 +6830,8 @@
         </p:nvSpPr>
         <p:spPr>
           <a:xfrm>
-            <a:off x="8183879" y="2606040"/>
-            <a:ext cx="3017520" cy="1554480"/>
+            <a:off x="6217920" y="3794760"/>
+            <a:ext cx="5577840" cy="640080"/>
           </a:xfrm>
           <a:prstGeom prst="rect">
             <a:avLst/>
@@ -5397,14 +6846,12 @@
           <a:p>
             <a:pPr algn="l"/>
             <a:r>
-              <a:rPr sz="1500" b="0">
+              <a:rPr sz="1600" b="0">
                 <a:solidFill>
                   <a:srgbClr val="FFFFFF"/>
                 </a:solidFill>
               </a:rPr>
-              <a:t>依 zone.txt 座標聚合亮度
-判定漏亮 / 多亮
-輸出 Zone 層級報告</a:t>
+              <a:t>• compare/　比對結果影像</a:t>
             </a:r>
           </a:p>
         </p:txBody>
@@ -5417,8 +6864,8 @@
         </p:nvSpPr>
         <p:spPr>
           <a:xfrm>
-            <a:off x="3794760" y="2560320"/>
-            <a:ext cx="365760" cy="457200"/>
+            <a:off x="6217920" y="4480560"/>
+            <a:ext cx="5577840" cy="640080"/>
           </a:xfrm>
           <a:prstGeom prst="rect">
             <a:avLst/>
@@ -5431,14 +6878,14 @@
           </a:bodyPr>
           <a:lstStyle/>
           <a:p>
-            <a:pPr algn="ctr"/>
-            <a:r>
-              <a:rPr sz="2800" b="0">
-                <a:solidFill>
-                  <a:srgbClr val="BAC2D8"/>
-                </a:solidFill>
-              </a:rPr>
-              <a:t>→</a:t>
+            <a:pPr algn="l"/>
+            <a:r>
+              <a:rPr sz="1600" b="0">
+                <a:solidFill>
+                  <a:srgbClr val="FFFFFF"/>
+                </a:solidFill>
+              </a:rPr>
+              <a:t>• sim_output/　模擬輸出影像</a:t>
             </a:r>
           </a:p>
         </p:txBody>
@@ -5451,8 +6898,8 @@
         </p:nvSpPr>
         <p:spPr>
           <a:xfrm>
-            <a:off x="7543800" y="2560320"/>
-            <a:ext cx="365760" cy="457200"/>
+            <a:off x="6217920" y="5166360"/>
+            <a:ext cx="5577840" cy="640080"/>
           </a:xfrm>
           <a:prstGeom prst="rect">
             <a:avLst/>
@@ -5465,48 +6912,14 @@
           </a:bodyPr>
           <a:lstStyle/>
           <a:p>
-            <a:pPr algn="ctr"/>
-            <a:r>
-              <a:rPr sz="2800" b="0">
-                <a:solidFill>
-                  <a:srgbClr val="BAC2D8"/>
-                </a:solidFill>
-              </a:rPr>
-              <a:t>→</a:t>
-            </a:r>
-          </a:p>
-        </p:txBody>
-      </p:sp>
-      <p:sp>
-        <p:nvSpPr>
-          <p:cNvPr id="19" name="TextBox 18"/>
-          <p:cNvSpPr txBox="1"/>
-          <p:nvPr/>
-        </p:nvSpPr>
-        <p:spPr>
-          <a:xfrm>
-            <a:off x="457200" y="4663440"/>
-            <a:ext cx="11247120" cy="457200"/>
-          </a:xfrm>
-          <a:prstGeom prst="rect">
-            <a:avLst/>
-          </a:prstGeom>
-          <a:noFill/>
-        </p:spPr>
-        <p:txBody>
-          <a:bodyPr wrap="square">
-            <a:spAutoFit/>
-          </a:bodyPr>
-          <a:lstStyle/>
-          <a:p>
-            <a:pPr algn="ctr"/>
+            <a:pPr algn="l"/>
             <a:r>
               <a:rPr sz="1600" b="0">
                 <a:solidFill>
-                  <a:srgbClr val="BAC2D8"/>
-                </a:solidFill>
-              </a:rPr>
-              <a:t>輸入影像 → 模擬 → 與硬體 Dump 比對 → 彙總統計報告</a:t>
+                  <a:srgbClr val="FFFFFF"/>
+                </a:solidFill>
+              </a:rPr>
+              <a:t>• logs/　執行日誌（UTC+8 時戳）</a:t>
             </a:r>
           </a:p>
         </p:txBody>
@@ -5617,7 +7030,7 @@
                   <a:srgbClr val="89B4FA"/>
                 </a:solidFill>
               </a:rPr>
-              <a:t>輸入格式</a:t>
+              <a:t>核心流程</a:t>
             </a:r>
           </a:p>
         </p:txBody>
@@ -5651,7 +7064,7 @@
                   <a:srgbClr val="BAC2D8"/>
                 </a:solidFill>
               </a:rPr>
-              <a:t>影像、Dump 檔、Zone 定義</a:t>
+              <a:t>三個主要處理步驟</a:t>
             </a:r>
           </a:p>
         </p:txBody>
@@ -5664,8 +7077,8 @@
         </p:nvSpPr>
         <p:spPr>
           <a:xfrm>
-            <a:off x="365760" y="1280160"/>
-            <a:ext cx="3291840" cy="1972491"/>
+            <a:off x="548640" y="1371600"/>
+            <a:ext cx="3383280" cy="2926080"/>
           </a:xfrm>
           <a:prstGeom prst="rect">
             <a:avLst/>
@@ -5710,8 +7123,8 @@
         </p:nvSpPr>
         <p:spPr>
           <a:xfrm>
-            <a:off x="502920" y="1371600"/>
-            <a:ext cx="3017520" cy="457200"/>
+            <a:off x="685800" y="1463040"/>
+            <a:ext cx="548640" cy="640080"/>
           </a:xfrm>
           <a:prstGeom prst="rect">
             <a:avLst/>
@@ -5726,12 +7139,12 @@
           <a:p>
             <a:pPr algn="l"/>
             <a:r>
-              <a:rPr sz="1600" b="1">
+              <a:rPr sz="2800" b="1">
                 <a:solidFill>
                   <a:srgbClr val="89B4FA"/>
                 </a:solidFill>
               </a:rPr>
-              <a:t>影像規格</a:t>
+              <a:t>1</a:t>
             </a:r>
           </a:p>
         </p:txBody>
@@ -5744,8 +7157,8 @@
         </p:nvSpPr>
         <p:spPr>
           <a:xfrm>
-            <a:off x="502920" y="1828800"/>
-            <a:ext cx="3017520" cy="1371600"/>
+            <a:off x="685800" y="2011680"/>
+            <a:ext cx="3017520" cy="548640"/>
           </a:xfrm>
           <a:prstGeom prst="rect">
             <a:avLst/>
@@ -5760,29 +7173,62 @@
           <a:p>
             <a:pPr algn="l"/>
             <a:r>
-              <a:rPr sz="1400" b="0">
+              <a:rPr sz="2000" b="1">
+                <a:solidFill>
+                  <a:srgbClr val="89B4FA"/>
+                </a:solidFill>
+              </a:rPr>
+              <a:t>Max-Pooling</a:t>
+            </a:r>
+          </a:p>
+        </p:txBody>
+      </p:sp>
+      <p:sp>
+        <p:nvSpPr>
+          <p:cNvPr id="8" name="TextBox 7"/>
+          <p:cNvSpPr txBox="1"/>
+          <p:nvPr/>
+        </p:nvSpPr>
+        <p:spPr>
+          <a:xfrm>
+            <a:off x="685800" y="2606040"/>
+            <a:ext cx="3017520" cy="1554480"/>
+          </a:xfrm>
+          <a:prstGeom prst="rect">
+            <a:avLst/>
+          </a:prstGeom>
+          <a:noFill/>
+        </p:spPr>
+        <p:txBody>
+          <a:bodyPr wrap="square">
+            <a:spAutoFit/>
+          </a:bodyPr>
+          <a:lstStyle/>
+          <a:p>
+            <a:pPr algn="l"/>
+            <a:r>
+              <a:rPr sz="1500" b="0">
                 <a:solidFill>
                   <a:srgbClr val="FFFFFF"/>
                 </a:solidFill>
               </a:rPr>
-              <a:t>路徑：input/input_{N}.png
-尺寸：1280 × 640 px
-チャンネル：灰階單通道
-→ 不符尺寸自動跳過</a:t>
-            </a:r>
-          </a:p>
-        </p:txBody>
-      </p:sp>
-      <p:sp>
-        <p:nvSpPr>
-          <p:cNvPr id="8" name="Rectangle 7"/>
+              <a:t>1280×640 影像 → 40×80 Grid
+每格 16×16 像素取最大值
+模擬 LED 亮度分布</a:t>
+            </a:r>
+          </a:p>
+        </p:txBody>
+      </p:sp>
+      <p:sp>
+        <p:nvSpPr>
+          <p:cNvPr id="9" name="Rectangle 8"/>
           <p:cNvSpPr/>
           <p:nvPr/>
         </p:nvSpPr>
         <p:spPr>
           <a:xfrm>
-            <a:off x="3931920" y="1280160"/>
-            <a:ext cx="3931920" cy="2011680"/>
+            <a:off x="4297679" y="1371600"/>
+            <a:ext cx="3383280" cy="2926080"/>
           </a:xfrm>
           <a:prstGeom prst="rect">
             <a:avLst/>
@@ -5821,14 +7267,14 @@
       </p:sp>
       <p:sp>
         <p:nvSpPr>
-          <p:cNvPr id="9" name="TextBox 8"/>
-          <p:cNvSpPr txBox="1"/>
-          <p:nvPr/>
-        </p:nvSpPr>
-        <p:spPr>
-          <a:xfrm>
-            <a:off x="4069080" y="1371600"/>
-            <a:ext cx="3657600" cy="457200"/>
+          <p:cNvPr id="10" name="TextBox 9"/>
+          <p:cNvSpPr txBox="1"/>
+          <p:nvPr/>
+        </p:nvSpPr>
+        <p:spPr>
+          <a:xfrm>
+            <a:off x="4434840" y="1463040"/>
+            <a:ext cx="548640" cy="640080"/>
           </a:xfrm>
           <a:prstGeom prst="rect">
             <a:avLst/>
@@ -5843,26 +7289,26 @@
           <a:p>
             <a:pPr algn="l"/>
             <a:r>
-              <a:rPr sz="1600" b="1">
-                <a:solidFill>
-                  <a:srgbClr val="A6E3A1"/>
-                </a:solidFill>
-              </a:rPr>
-              <a:t>Dump 格式（兩種）</a:t>
-            </a:r>
-          </a:p>
-        </p:txBody>
-      </p:sp>
-      <p:sp>
-        <p:nvSpPr>
-          <p:cNvPr id="10" name="TextBox 9"/>
-          <p:cNvSpPr txBox="1"/>
-          <p:nvPr/>
-        </p:nvSpPr>
-        <p:spPr>
-          <a:xfrm>
-            <a:off x="4069080" y="1828800"/>
-            <a:ext cx="3657600" cy="1371600"/>
+              <a:rPr sz="2800" b="1">
+                <a:solidFill>
+                  <a:srgbClr val="A6E3A1"/>
+                </a:solidFill>
+              </a:rPr>
+              <a:t>2</a:t>
+            </a:r>
+          </a:p>
+        </p:txBody>
+      </p:sp>
+      <p:sp>
+        <p:nvSpPr>
+          <p:cNvPr id="11" name="TextBox 10"/>
+          <p:cNvSpPr txBox="1"/>
+          <p:nvPr/>
+        </p:nvSpPr>
+        <p:spPr>
+          <a:xfrm>
+            <a:off x="4434840" y="2011680"/>
+            <a:ext cx="3017520" cy="548640"/>
           </a:xfrm>
           <a:prstGeom prst="rect">
             <a:avLst/>
@@ -5877,70 +7323,62 @@
           <a:p>
             <a:pPr algn="l"/>
             <a:r>
-              <a:rPr sz="1300" b="0" dirty="0" err="1">
+              <a:rPr sz="2000" b="1">
+                <a:solidFill>
+                  <a:srgbClr val="A6E3A1"/>
+                </a:solidFill>
+              </a:rPr>
+              <a:t>Block 比對</a:t>
+            </a:r>
+          </a:p>
+        </p:txBody>
+      </p:sp>
+      <p:sp>
+        <p:nvSpPr>
+          <p:cNvPr id="12" name="TextBox 11"/>
+          <p:cNvSpPr txBox="1"/>
+          <p:nvPr/>
+        </p:nvSpPr>
+        <p:spPr>
+          <a:xfrm>
+            <a:off x="4434840" y="2606040"/>
+            <a:ext cx="3017520" cy="1554480"/>
+          </a:xfrm>
+          <a:prstGeom prst="rect">
+            <a:avLst/>
+          </a:prstGeom>
+          <a:noFill/>
+        </p:spPr>
+        <p:txBody>
+          <a:bodyPr wrap="square">
+            <a:spAutoFit/>
+          </a:bodyPr>
+          <a:lstStyle/>
+          <a:p>
+            <a:pPr algn="l"/>
+            <a:r>
+              <a:rPr sz="1500" b="0">
                 <a:solidFill>
                   <a:srgbClr val="FFFFFF"/>
                 </a:solidFill>
               </a:rPr>
-              <a:t>新格式（Tab</a:t>
-            </a:r>
-            <a:r>
-              <a:rPr sz="1300" b="0" dirty="0">
-                <a:solidFill>
-                  <a:srgbClr val="FFFFFF"/>
-                </a:solidFill>
-              </a:rPr>
-              <a:t> </a:t>
-            </a:r>
-            <a:r>
-              <a:rPr sz="1300" b="0" dirty="0" err="1">
-                <a:solidFill>
-                  <a:srgbClr val="FFFFFF"/>
-                </a:solidFill>
-              </a:rPr>
-              <a:t>分隔</a:t>
-            </a:r>
-            <a:r>
-              <a:rPr sz="1300" b="0" dirty="0">
-                <a:solidFill>
-                  <a:srgbClr val="FFFFFF"/>
-                </a:solidFill>
-              </a:rPr>
-              <a:t>）：
-[0]  0  0x2000'8f1c  UCHAR
-</a:t>
-            </a:r>
-            <a:r>
-              <a:rPr sz="1300" b="0" dirty="0" err="1">
-                <a:solidFill>
-                  <a:srgbClr val="FFFFFF"/>
-                </a:solidFill>
-              </a:rPr>
-              <a:t>舊格式（無分隔符</a:t>
-            </a:r>
-            <a:r>
-              <a:rPr sz="1300" b="0" dirty="0">
-                <a:solidFill>
-                  <a:srgbClr val="FFFFFF"/>
-                </a:solidFill>
-              </a:rPr>
-              <a:t>）：
-[168]1750x2000'8fc4UCHAR
-共 3200 筆（40×80 Grid）</a:t>
-            </a:r>
-          </a:p>
-        </p:txBody>
-      </p:sp>
-      <p:sp>
-        <p:nvSpPr>
-          <p:cNvPr id="11" name="Rectangle 10"/>
+              <a:t>逐格比較 Dump 與模擬結果
+統計差異格數 (block_diffs)
+輸出 diff 視覺化圖</a:t>
+            </a:r>
+          </a:p>
+        </p:txBody>
+      </p:sp>
+      <p:sp>
+        <p:nvSpPr>
+          <p:cNvPr id="13" name="Rectangle 12"/>
           <p:cNvSpPr/>
           <p:nvPr/>
         </p:nvSpPr>
         <p:spPr>
           <a:xfrm>
-            <a:off x="8138160" y="1280160"/>
-            <a:ext cx="3657600" cy="2011680"/>
+            <a:off x="8046719" y="1371600"/>
+            <a:ext cx="3383280" cy="2926080"/>
           </a:xfrm>
           <a:prstGeom prst="rect">
             <a:avLst/>
@@ -5979,14 +7417,14 @@
       </p:sp>
       <p:sp>
         <p:nvSpPr>
-          <p:cNvPr id="12" name="TextBox 11"/>
-          <p:cNvSpPr txBox="1"/>
-          <p:nvPr/>
-        </p:nvSpPr>
-        <p:spPr>
-          <a:xfrm>
-            <a:off x="8275320" y="1371600"/>
-            <a:ext cx="3383280" cy="457200"/>
+          <p:cNvPr id="14" name="TextBox 13"/>
+          <p:cNvSpPr txBox="1"/>
+          <p:nvPr/>
+        </p:nvSpPr>
+        <p:spPr>
+          <a:xfrm>
+            <a:off x="8183879" y="1463040"/>
+            <a:ext cx="548640" cy="640080"/>
           </a:xfrm>
           <a:prstGeom prst="rect">
             <a:avLst/>
@@ -6001,26 +7439,26 @@
           <a:p>
             <a:pPr algn="l"/>
             <a:r>
-              <a:rPr sz="1600" b="1">
+              <a:rPr sz="2800" b="1">
                 <a:solidFill>
                   <a:srgbClr val="F9E2AF"/>
                 </a:solidFill>
               </a:rPr>
-              <a:t>Zone 定義 (zone.txt)</a:t>
-            </a:r>
-          </a:p>
-        </p:txBody>
-      </p:sp>
-      <p:sp>
-        <p:nvSpPr>
-          <p:cNvPr id="13" name="TextBox 12"/>
-          <p:cNvSpPr txBox="1"/>
-          <p:nvPr/>
-        </p:nvSpPr>
-        <p:spPr>
-          <a:xfrm>
-            <a:off x="8275320" y="1828800"/>
-            <a:ext cx="3383280" cy="1371600"/>
+              <a:t>3</a:t>
+            </a:r>
+          </a:p>
+        </p:txBody>
+      </p:sp>
+      <p:sp>
+        <p:nvSpPr>
+          <p:cNvPr id="15" name="TextBox 14"/>
+          <p:cNvSpPr txBox="1"/>
+          <p:nvPr/>
+        </p:nvSpPr>
+        <p:spPr>
+          <a:xfrm>
+            <a:off x="8183879" y="2011680"/>
+            <a:ext cx="3017520" cy="548640"/>
           </a:xfrm>
           <a:prstGeom prst="rect">
             <a:avLst/>
@@ -6035,142 +7473,129 @@
           <a:p>
             <a:pPr algn="l"/>
             <a:r>
-              <a:rPr sz="1300" b="0" dirty="0">
+              <a:rPr sz="2000" b="1">
+                <a:solidFill>
+                  <a:srgbClr val="F9E2AF"/>
+                </a:solidFill>
+              </a:rPr>
+              <a:t>Zone 比對</a:t>
+            </a:r>
+          </a:p>
+        </p:txBody>
+      </p:sp>
+      <p:sp>
+        <p:nvSpPr>
+          <p:cNvPr id="16" name="TextBox 15"/>
+          <p:cNvSpPr txBox="1"/>
+          <p:nvPr/>
+        </p:nvSpPr>
+        <p:spPr>
+          <a:xfrm>
+            <a:off x="8183879" y="2606040"/>
+            <a:ext cx="3017520" cy="1554480"/>
+          </a:xfrm>
+          <a:prstGeom prst="rect">
+            <a:avLst/>
+          </a:prstGeom>
+          <a:noFill/>
+        </p:spPr>
+        <p:txBody>
+          <a:bodyPr wrap="square">
+            <a:spAutoFit/>
+          </a:bodyPr>
+          <a:lstStyle/>
+          <a:p>
+            <a:pPr algn="l"/>
+            <a:r>
+              <a:rPr sz="1500" b="0">
                 <a:solidFill>
                   <a:srgbClr val="FFFFFF"/>
                 </a:solidFill>
               </a:rPr>
-              <a:t>case 0:
-  </a:t>
-            </a:r>
-            <a:r>
-              <a:rPr sz="1300" b="0" dirty="0" err="1">
-                <a:solidFill>
-                  <a:srgbClr val="FFFFFF"/>
-                </a:solidFill>
-              </a:rPr>
-              <a:t>j_start</a:t>
-            </a:r>
-            <a:r>
-              <a:rPr sz="1300" b="0" dirty="0">
-                <a:solidFill>
-                  <a:srgbClr val="FFFFFF"/>
-                </a:solidFill>
-              </a:rPr>
-              <a:t>=4; </a:t>
-            </a:r>
-            <a:r>
-              <a:rPr sz="1300" b="0" dirty="0" err="1">
-                <a:solidFill>
-                  <a:srgbClr val="FFFFFF"/>
-                </a:solidFill>
-              </a:rPr>
-              <a:t>j_end</a:t>
-            </a:r>
-            <a:r>
-              <a:rPr sz="1300" b="0" dirty="0">
-                <a:solidFill>
-                  <a:srgbClr val="FFFFFF"/>
-                </a:solidFill>
-              </a:rPr>
-              <a:t>=10;
-  </a:t>
-            </a:r>
-            <a:r>
-              <a:rPr sz="1300" b="0" dirty="0" err="1">
-                <a:solidFill>
-                  <a:srgbClr val="FFFFFF"/>
-                </a:solidFill>
-              </a:rPr>
-              <a:t>i_start</a:t>
-            </a:r>
-            <a:r>
-              <a:rPr sz="1300" b="0" dirty="0">
-                <a:solidFill>
-                  <a:srgbClr val="FFFFFF"/>
-                </a:solidFill>
-              </a:rPr>
-              <a:t>=0; </a:t>
-            </a:r>
-            <a:r>
-              <a:rPr sz="1300" b="0" dirty="0" err="1">
-                <a:solidFill>
-                  <a:srgbClr val="FFFFFF"/>
-                </a:solidFill>
-              </a:rPr>
-              <a:t>i_end</a:t>
-            </a:r>
-            <a:r>
-              <a:rPr sz="1300" b="0" dirty="0">
-                <a:solidFill>
-                  <a:srgbClr val="FFFFFF"/>
-                </a:solidFill>
-              </a:rPr>
-              <a:t>=14;
-j = row (</a:t>
-            </a:r>
-            <a:r>
-              <a:rPr sz="1300" b="0" dirty="0" err="1">
-                <a:solidFill>
-                  <a:srgbClr val="FFFFFF"/>
-                </a:solidFill>
-              </a:rPr>
-              <a:t>垂直</a:t>
-            </a:r>
-            <a:r>
-              <a:rPr sz="1300" b="0" dirty="0">
-                <a:solidFill>
-                  <a:srgbClr val="FFFFFF"/>
-                </a:solidFill>
-              </a:rPr>
-              <a:t>, 0–39)
-</a:t>
-            </a:r>
-            <a:r>
-              <a:rPr sz="1300" b="0" dirty="0" err="1">
-                <a:solidFill>
-                  <a:srgbClr val="FFFFFF"/>
-                </a:solidFill>
-              </a:rPr>
-              <a:t>i</a:t>
-            </a:r>
-            <a:r>
-              <a:rPr sz="1300" b="0" dirty="0">
-                <a:solidFill>
-                  <a:srgbClr val="FFFFFF"/>
-                </a:solidFill>
-              </a:rPr>
-              <a:t> = col (</a:t>
-            </a:r>
-            <a:r>
-              <a:rPr sz="1300" b="0" dirty="0" err="1">
-                <a:solidFill>
-                  <a:srgbClr val="FFFFFF"/>
-                </a:solidFill>
-              </a:rPr>
-              <a:t>水平</a:t>
-            </a:r>
-            <a:r>
-              <a:rPr sz="1300" b="0" dirty="0">
-                <a:solidFill>
-                  <a:srgbClr val="FFFFFF"/>
-                </a:solidFill>
-              </a:rPr>
-              <a:t>, 0–79)
-共 30 個 Zone</a:t>
-            </a:r>
-          </a:p>
-        </p:txBody>
-      </p:sp>
-      <p:sp>
-        <p:nvSpPr>
-          <p:cNvPr id="14" name="TextBox 13"/>
-          <p:cNvSpPr txBox="1"/>
-          <p:nvPr/>
-        </p:nvSpPr>
-        <p:spPr>
-          <a:xfrm>
-            <a:off x="457200" y="3520440"/>
+              <a:t>依 zone.txt 座標聚合亮度
+判定漏亮 / 多亮
+輸出 Zone 層級報告</a:t>
+            </a:r>
+          </a:p>
+        </p:txBody>
+      </p:sp>
+      <p:sp>
+        <p:nvSpPr>
+          <p:cNvPr id="17" name="TextBox 16"/>
+          <p:cNvSpPr txBox="1"/>
+          <p:nvPr/>
+        </p:nvSpPr>
+        <p:spPr>
+          <a:xfrm>
+            <a:off x="3794760" y="2560320"/>
+            <a:ext cx="365760" cy="457200"/>
+          </a:xfrm>
+          <a:prstGeom prst="rect">
+            <a:avLst/>
+          </a:prstGeom>
+          <a:noFill/>
+        </p:spPr>
+        <p:txBody>
+          <a:bodyPr wrap="square">
+            <a:spAutoFit/>
+          </a:bodyPr>
+          <a:lstStyle/>
+          <a:p>
+            <a:pPr algn="ctr"/>
+            <a:r>
+              <a:rPr sz="2800" b="0">
+                <a:solidFill>
+                  <a:srgbClr val="BAC2D8"/>
+                </a:solidFill>
+              </a:rPr>
+              <a:t>→</a:t>
+            </a:r>
+          </a:p>
+        </p:txBody>
+      </p:sp>
+      <p:sp>
+        <p:nvSpPr>
+          <p:cNvPr id="18" name="TextBox 17"/>
+          <p:cNvSpPr txBox="1"/>
+          <p:nvPr/>
+        </p:nvSpPr>
+        <p:spPr>
+          <a:xfrm>
+            <a:off x="7543800" y="2560320"/>
+            <a:ext cx="365760" cy="457200"/>
+          </a:xfrm>
+          <a:prstGeom prst="rect">
+            <a:avLst/>
+          </a:prstGeom>
+          <a:noFill/>
+        </p:spPr>
+        <p:txBody>
+          <a:bodyPr wrap="square">
+            <a:spAutoFit/>
+          </a:bodyPr>
+          <a:lstStyle/>
+          <a:p>
+            <a:pPr algn="ctr"/>
+            <a:r>
+              <a:rPr sz="2800" b="0">
+                <a:solidFill>
+                  <a:srgbClr val="BAC2D8"/>
+                </a:solidFill>
+              </a:rPr>
+              <a:t>→</a:t>
+            </a:r>
+          </a:p>
+        </p:txBody>
+      </p:sp>
+      <p:sp>
+        <p:nvSpPr>
+          <p:cNvPr id="19" name="TextBox 18"/>
+          <p:cNvSpPr txBox="1"/>
+          <p:nvPr/>
+        </p:nvSpPr>
+        <p:spPr>
+          <a:xfrm>
+            <a:off x="457200" y="4663440"/>
             <a:ext cx="11247120" cy="457200"/>
           </a:xfrm>
           <a:prstGeom prst="rect">
@@ -6186,34 +7611,13 @@
           <a:p>
             <a:pPr algn="ctr"/>
             <a:r>
-              <a:rPr sz="1500" b="1" dirty="0" err="1">
-                <a:solidFill>
-                  <a:srgbClr val="A6E3A1"/>
-                </a:solidFill>
-              </a:rPr>
-              <a:t>工具同時支援新舊兩種</a:t>
-            </a:r>
-            <a:r>
-              <a:rPr sz="1500" b="1" dirty="0">
-                <a:solidFill>
-                  <a:srgbClr val="A6E3A1"/>
-                </a:solidFill>
-              </a:rPr>
-              <a:t> Dump </a:t>
-            </a:r>
-            <a:r>
-              <a:rPr sz="1500" b="1" dirty="0" err="1">
-                <a:solidFill>
-                  <a:srgbClr val="A6E3A1"/>
-                </a:solidFill>
-              </a:rPr>
-              <a:t>格式，自動偵測，不需手動切換</a:t>
-            </a:r>
-            <a:endParaRPr sz="1500" b="1" dirty="0">
-              <a:solidFill>
-                <a:srgbClr val="A6E3A1"/>
-              </a:solidFill>
-            </a:endParaRPr>
+              <a:rPr sz="1600" b="0">
+                <a:solidFill>
+                  <a:srgbClr val="BAC2D8"/>
+                </a:solidFill>
+              </a:rPr>
+              <a:t>輸入影像 → 模擬 → 與硬體 Dump 比對 → 彙總統計報告</a:t>
+            </a:r>
           </a:p>
         </p:txBody>
       </p:sp>
@@ -6323,7 +7727,7 @@
                   <a:srgbClr val="89B4FA"/>
                 </a:solidFill>
               </a:rPr>
-              <a:t>程式碼改善</a:t>
+              <a:t>關鍵程式碼 ①</a:t>
             </a:r>
           </a:p>
         </p:txBody>
@@ -6357,7 +7761,7 @@
                   <a:srgbClr val="BAC2D8"/>
                 </a:solidFill>
               </a:rPr>
-              <a:t>Code Review 重構摘要 (v1.5.0)</a:t>
+              <a:t>Max-Pooling 核心 &amp; 差異視覺化向量化</a:t>
             </a:r>
           </a:p>
         </p:txBody>
@@ -6370,17 +7774,19 @@
         </p:nvSpPr>
         <p:spPr>
           <a:xfrm>
-            <a:off x="5989320" y="1234440"/>
-            <a:ext cx="27432" cy="5303520"/>
+            <a:off x="365760" y="1234440"/>
+            <a:ext cx="5486400" cy="4114800"/>
           </a:xfrm>
           <a:prstGeom prst="rect">
             <a:avLst/>
           </a:prstGeom>
           <a:solidFill>
-            <a:srgbClr val="BAC2D8"/>
+            <a:srgbClr val="0D0F18"/>
           </a:solidFill>
-          <a:ln>
-            <a:noFill/>
+          <a:ln w="12700">
+            <a:solidFill>
+              <a:srgbClr val="89B4FA"/>
+            </a:solidFill>
           </a:ln>
         </p:spPr>
         <p:style>
@@ -6414,8 +7820,8 @@
         </p:nvSpPr>
         <p:spPr>
           <a:xfrm>
-            <a:off x="365760" y="1234440"/>
-            <a:ext cx="5394960" cy="457200"/>
+            <a:off x="502920" y="1280160"/>
+            <a:ext cx="5303520" cy="320040"/>
           </a:xfrm>
           <a:prstGeom prst="rect">
             <a:avLst/>
@@ -6430,26 +7836,304 @@
           <a:p>
             <a:pPr algn="l"/>
             <a:r>
-              <a:rPr sz="1600" b="1">
-                <a:solidFill>
-                  <a:srgbClr val="A6E3A1"/>
-                </a:solidFill>
-              </a:rPr>
-              <a:t>修正項目</a:t>
-            </a:r>
-          </a:p>
-        </p:txBody>
-      </p:sp>
-      <p:sp>
-        <p:nvSpPr>
-          <p:cNvPr id="8" name="TextBox 7"/>
-          <p:cNvSpPr txBox="1"/>
-          <p:nvPr/>
-        </p:nvSpPr>
-        <p:spPr>
-          <a:xfrm>
-            <a:off x="365760" y="1906637"/>
-            <a:ext cx="5394960" cy="338554"/>
+              <a:rPr sz="1300" b="1">
+                <a:solidFill>
+                  <a:srgbClr val="89B4FA"/>
+                </a:solidFill>
+              </a:rPr>
+              <a:t>process_local_dimming()  —  NumPy reshape + max</a:t>
+            </a:r>
+          </a:p>
+        </p:txBody>
+      </p:sp>
+      <p:sp>
+        <p:nvSpPr>
+          <p:cNvPr id="7" name="TextBox 6"/>
+          <p:cNvSpPr txBox="1"/>
+          <p:nvPr/>
+        </p:nvSpPr>
+        <p:spPr>
+          <a:xfrm>
+            <a:off x="457200" y="1627632"/>
+            <a:ext cx="5303520" cy="3630168"/>
+          </a:xfrm>
+          <a:prstGeom prst="rect">
+            <a:avLst/>
+          </a:prstGeom>
+          <a:noFill/>
+        </p:spPr>
+        <p:txBody>
+          <a:bodyPr wrap="none">
+            <a:spAutoFit/>
+          </a:bodyPr>
+          <a:lstStyle/>
+          <a:p>
+            <a:pPr algn="l">
+              <a:spcBef>
+                <a:spcPts val="0"/>
+              </a:spcBef>
+              <a:spcAft>
+                <a:spcPts val="100"/>
+              </a:spcAft>
+            </a:pPr>
+            <a:r>
+              <a:rPr sz="1300">
+                <a:solidFill>
+                  <a:srgbClr val="A6E3A1"/>
+                </a:solidFill>
+                <a:latin typeface="Courier New"/>
+              </a:rPr>
+              <a:t>def process_local_dimming(img):</a:t>
+            </a:r>
+          </a:p>
+          <a:p>
+            <a:pPr algn="l">
+              <a:spcBef>
+                <a:spcPts val="0"/>
+              </a:spcBef>
+              <a:spcAft>
+                <a:spcPts val="100"/>
+              </a:spcAft>
+            </a:pPr>
+            <a:r>
+              <a:rPr sz="1300">
+                <a:solidFill>
+                  <a:srgbClr val="A6E3A1"/>
+                </a:solidFill>
+                <a:latin typeface="Courier New"/>
+              </a:rPr>
+              <a:t>    # 切出符合 Grid 尺寸的區域，重塑為四維張量</a:t>
+            </a:r>
+          </a:p>
+          <a:p>
+            <a:pPr algn="l">
+              <a:spcBef>
+                <a:spcPts val="0"/>
+              </a:spcBef>
+              <a:spcAft>
+                <a:spcPts val="100"/>
+              </a:spcAft>
+            </a:pPr>
+            <a:r>
+              <a:rPr sz="1300">
+                <a:solidFill>
+                  <a:srgbClr val="A6E3A1"/>
+                </a:solidFill>
+                <a:latin typeface="Courier New"/>
+              </a:rPr>
+              <a:t>    tiles = img[</a:t>
+            </a:r>
+          </a:p>
+          <a:p>
+            <a:pPr algn="l">
+              <a:spcBef>
+                <a:spcPts val="0"/>
+              </a:spcBef>
+              <a:spcAft>
+                <a:spcPts val="100"/>
+              </a:spcAft>
+            </a:pPr>
+            <a:r>
+              <a:rPr sz="1300">
+                <a:solidFill>
+                  <a:srgbClr val="A6E3A1"/>
+                </a:solidFill>
+                <a:latin typeface="Courier New"/>
+              </a:rPr>
+              <a:t>        :GRID_H * BLOCK_H,   # 640 px</a:t>
+            </a:r>
+          </a:p>
+          <a:p>
+            <a:pPr algn="l">
+              <a:spcBef>
+                <a:spcPts val="0"/>
+              </a:spcBef>
+              <a:spcAft>
+                <a:spcPts val="100"/>
+              </a:spcAft>
+            </a:pPr>
+            <a:r>
+              <a:rPr sz="1300">
+                <a:solidFill>
+                  <a:srgbClr val="A6E3A1"/>
+                </a:solidFill>
+                <a:latin typeface="Courier New"/>
+              </a:rPr>
+              <a:t>        :GRID_W * BLOCK_W    # 1280 px</a:t>
+            </a:r>
+          </a:p>
+          <a:p>
+            <a:pPr algn="l">
+              <a:spcBef>
+                <a:spcPts val="0"/>
+              </a:spcBef>
+              <a:spcAft>
+                <a:spcPts val="100"/>
+              </a:spcAft>
+            </a:pPr>
+            <a:r>
+              <a:rPr sz="1300">
+                <a:solidFill>
+                  <a:srgbClr val="A6E3A1"/>
+                </a:solidFill>
+                <a:latin typeface="Courier New"/>
+              </a:rPr>
+              <a:t>    ].reshape(</a:t>
+            </a:r>
+          </a:p>
+          <a:p>
+            <a:pPr algn="l">
+              <a:spcBef>
+                <a:spcPts val="0"/>
+              </a:spcBef>
+              <a:spcAft>
+                <a:spcPts val="100"/>
+              </a:spcAft>
+            </a:pPr>
+            <a:r>
+              <a:rPr sz="1300">
+                <a:solidFill>
+                  <a:srgbClr val="A6E3A1"/>
+                </a:solidFill>
+                <a:latin typeface="Courier New"/>
+              </a:rPr>
+              <a:t>        GRID_H, BLOCK_H,     # 40, 16</a:t>
+            </a:r>
+          </a:p>
+          <a:p>
+            <a:pPr algn="l">
+              <a:spcBef>
+                <a:spcPts val="0"/>
+              </a:spcBef>
+              <a:spcAft>
+                <a:spcPts val="100"/>
+              </a:spcAft>
+            </a:pPr>
+            <a:r>
+              <a:rPr sz="1300">
+                <a:solidFill>
+                  <a:srgbClr val="A6E3A1"/>
+                </a:solidFill>
+                <a:latin typeface="Courier New"/>
+              </a:rPr>
+              <a:t>        GRID_W, BLOCK_W      # 80, 16</a:t>
+            </a:r>
+          </a:p>
+          <a:p>
+            <a:pPr algn="l">
+              <a:spcBef>
+                <a:spcPts val="0"/>
+              </a:spcBef>
+              <a:spcAft>
+                <a:spcPts val="100"/>
+              </a:spcAft>
+            </a:pPr>
+            <a:r>
+              <a:rPr sz="1300">
+                <a:solidFill>
+                  <a:srgbClr val="A6E3A1"/>
+                </a:solidFill>
+                <a:latin typeface="Courier New"/>
+              </a:rPr>
+              <a:t>    )</a:t>
+            </a:r>
+          </a:p>
+          <a:p>
+            <a:pPr algn="l">
+              <a:spcBef>
+                <a:spcPts val="0"/>
+              </a:spcBef>
+              <a:spcAft>
+                <a:spcPts val="100"/>
+              </a:spcAft>
+            </a:pPr>
+            <a:r>
+              <a:rPr sz="1300">
+                <a:solidFill>
+                  <a:srgbClr val="A6E3A1"/>
+                </a:solidFill>
+                <a:latin typeface="Courier New"/>
+              </a:rPr>
+              <a:t>    # 沿 Block 維度取最大值 → 40×80 Grid</a:t>
+            </a:r>
+          </a:p>
+          <a:p>
+            <a:pPr algn="l">
+              <a:spcBef>
+                <a:spcPts val="0"/>
+              </a:spcBef>
+              <a:spcAft>
+                <a:spcPts val="100"/>
+              </a:spcAft>
+            </a:pPr>
+            <a:r>
+              <a:rPr sz="1300">
+                <a:solidFill>
+                  <a:srgbClr val="A6E3A1"/>
+                </a:solidFill>
+                <a:latin typeface="Courier New"/>
+              </a:rPr>
+              <a:t>    return tiles.max(axis=(1, 3)).astype(np.int32)</a:t>
+            </a:r>
+          </a:p>
+        </p:txBody>
+      </p:sp>
+      <p:sp>
+        <p:nvSpPr>
+          <p:cNvPr id="8" name="Rectangle 7"/>
+          <p:cNvSpPr/>
+          <p:nvPr/>
+        </p:nvSpPr>
+        <p:spPr>
+          <a:xfrm>
+            <a:off x="6217920" y="1234440"/>
+            <a:ext cx="5577840" cy="4114800"/>
+          </a:xfrm>
+          <a:prstGeom prst="rect">
+            <a:avLst/>
+          </a:prstGeom>
+          <a:solidFill>
+            <a:srgbClr val="0D0F18"/>
+          </a:solidFill>
+          <a:ln w="12700">
+            <a:solidFill>
+              <a:srgbClr val="89B4FA"/>
+            </a:solidFill>
+          </a:ln>
+        </p:spPr>
+        <p:style>
+          <a:lnRef idx="1">
+            <a:schemeClr val="accent1"/>
+          </a:lnRef>
+          <a:fillRef idx="3">
+            <a:schemeClr val="accent1"/>
+          </a:fillRef>
+          <a:effectRef idx="2">
+            <a:schemeClr val="accent1"/>
+          </a:effectRef>
+          <a:fontRef idx="minor">
+            <a:schemeClr val="lt1"/>
+          </a:fontRef>
+        </p:style>
+        <p:txBody>
+          <a:bodyPr rtlCol="0" anchor="ctr"/>
+          <a:lstStyle/>
+          <a:p>
+            <a:pPr algn="ctr"/>
+            <a:endParaRPr/>
+          </a:p>
+        </p:txBody>
+      </p:sp>
+      <p:sp>
+        <p:nvSpPr>
+          <p:cNvPr id="9" name="TextBox 8"/>
+          <p:cNvSpPr txBox="1"/>
+          <p:nvPr/>
+        </p:nvSpPr>
+        <p:spPr>
+          <a:xfrm>
+            <a:off x="6355080" y="1280160"/>
+            <a:ext cx="5394959" cy="320040"/>
           </a:xfrm>
           <a:prstGeom prst="rect">
             <a:avLst/>
@@ -6464,36 +8148,12 @@
           <a:p>
             <a:pPr algn="l"/>
             <a:r>
-              <a:rPr sz="1600" b="0" dirty="0">
-                <a:solidFill>
-                  <a:srgbClr val="FFFFFF"/>
-                </a:solidFill>
-              </a:rPr>
-              <a:t>• </a:t>
-            </a:r>
-            <a:r>
-              <a:rPr lang="zh-TW" altLang="en-US" sz="1600" b="0" dirty="0" smtClean="0">
-                <a:solidFill>
-                  <a:srgbClr val="FFFFFF"/>
-                </a:solidFill>
-              </a:rPr>
-              <a:t>定值</a:t>
-            </a:r>
-            <a:r>
-              <a:rPr sz="1600" b="0" dirty="0" smtClean="0">
-                <a:solidFill>
-                  <a:srgbClr val="FFFFFF"/>
-                </a:solidFill>
-              </a:rPr>
-              <a:t>3200 </a:t>
-            </a:r>
-            <a:r>
-              <a:rPr sz="1600" b="0" dirty="0">
-                <a:solidFill>
-                  <a:srgbClr val="FFFFFF"/>
-                </a:solidFill>
-              </a:rPr>
-              <a:t>→ GRID_H × GRID_W</a:t>
+              <a:rPr sz="1300" b="1">
+                <a:solidFill>
+                  <a:srgbClr val="A6E3A1"/>
+                </a:solidFill>
+              </a:rPr>
+              <a:t>visualize_diff()  —  Boolean mask 向量化</a:t>
             </a:r>
           </a:p>
         </p:txBody>
@@ -6506,8 +8166,269 @@
         </p:nvSpPr>
         <p:spPr>
           <a:xfrm>
-            <a:off x="365760" y="2638157"/>
-            <a:ext cx="5394960" cy="640080"/>
+            <a:off x="6309359" y="1627632"/>
+            <a:ext cx="5394959" cy="3630168"/>
+          </a:xfrm>
+          <a:prstGeom prst="rect">
+            <a:avLst/>
+          </a:prstGeom>
+          <a:noFill/>
+        </p:spPr>
+        <p:txBody>
+          <a:bodyPr wrap="none">
+            <a:spAutoFit/>
+          </a:bodyPr>
+          <a:lstStyle/>
+          <a:p>
+            <a:pPr algn="l">
+              <a:spcBef>
+                <a:spcPts val="0"/>
+              </a:spcBef>
+              <a:spcAft>
+                <a:spcPts val="100"/>
+              </a:spcAft>
+            </a:pPr>
+            <a:r>
+              <a:rPr sz="1300">
+                <a:solidFill>
+                  <a:srgbClr val="A6E3A1"/>
+                </a:solidFill>
+                <a:latin typeface="Courier New"/>
+              </a:rPr>
+              <a:t>def visualize_diff(dump_arr, sim_arr, ...):</a:t>
+            </a:r>
+          </a:p>
+          <a:p>
+            <a:pPr algn="l">
+              <a:spcBef>
+                <a:spcPts val="0"/>
+              </a:spcBef>
+              <a:spcAft>
+                <a:spcPts val="100"/>
+              </a:spcAft>
+            </a:pPr>
+            <a:r>
+              <a:rPr sz="1300">
+                <a:solidFill>
+                  <a:srgbClr val="A6E3A1"/>
+                </a:solidFill>
+                <a:latin typeface="Courier New"/>
+              </a:rPr>
+              <a:t>    vis_img = np.zeros((GRID_H, GRID_W, 3), np.uint8)</a:t>
+            </a:r>
+          </a:p>
+          <a:p>
+            <a:pPr algn="l">
+              <a:spcBef>
+                <a:spcPts val="0"/>
+              </a:spcBef>
+              <a:spcAft>
+                <a:spcPts val="100"/>
+              </a:spcAft>
+            </a:pPr>
+            <a:endParaRPr sz="1300">
+              <a:solidFill>
+                <a:srgbClr val="A6E3A1"/>
+              </a:solidFill>
+              <a:latin typeface="Courier New"/>
+            </a:endParaRPr>
+          </a:p>
+          <a:p>
+            <a:pPr algn="l">
+              <a:spcBef>
+                <a:spcPts val="0"/>
+              </a:spcBef>
+              <a:spcAft>
+                <a:spcPts val="100"/>
+              </a:spcAft>
+            </a:pPr>
+            <a:r>
+              <a:rPr sz="1300">
+                <a:solidFill>
+                  <a:srgbClr val="A6E3A1"/>
+                </a:solidFill>
+                <a:latin typeface="Courier New"/>
+              </a:rPr>
+              <a:t>    # Boolean mask 向量化，取代逐格迴圈</a:t>
+            </a:r>
+          </a:p>
+          <a:p>
+            <a:pPr algn="l">
+              <a:spcBef>
+                <a:spcPts val="0"/>
+              </a:spcBef>
+              <a:spcAft>
+                <a:spcPts val="100"/>
+              </a:spcAft>
+            </a:pPr>
+            <a:r>
+              <a:rPr sz="1300">
+                <a:solidFill>
+                  <a:srgbClr val="A6E3A1"/>
+                </a:solidFill>
+                <a:latin typeface="Courier New"/>
+              </a:rPr>
+              <a:t>    both_on = (dump_arr &gt; 0) &amp; (sim_arr &gt; 0)</a:t>
+            </a:r>
+          </a:p>
+          <a:p>
+            <a:pPr algn="l">
+              <a:spcBef>
+                <a:spcPts val="0"/>
+              </a:spcBef>
+              <a:spcAft>
+                <a:spcPts val="100"/>
+              </a:spcAft>
+            </a:pPr>
+            <a:r>
+              <a:rPr sz="1300">
+                <a:solidFill>
+                  <a:srgbClr val="A6E3A1"/>
+                </a:solidFill>
+                <a:latin typeface="Courier New"/>
+              </a:rPr>
+              <a:t>    missing = (dump_arr == 0) &amp; (sim_arr &gt; 0)  # 漏亮</a:t>
+            </a:r>
+          </a:p>
+          <a:p>
+            <a:pPr algn="l">
+              <a:spcBef>
+                <a:spcPts val="0"/>
+              </a:spcBef>
+              <a:spcAft>
+                <a:spcPts val="100"/>
+              </a:spcAft>
+            </a:pPr>
+            <a:r>
+              <a:rPr sz="1300">
+                <a:solidFill>
+                  <a:srgbClr val="A6E3A1"/>
+                </a:solidFill>
+                <a:latin typeface="Courier New"/>
+              </a:rPr>
+              <a:t>    extra   = (dump_arr &gt; 0) &amp; (sim_arr == 0)  # 多亮</a:t>
+            </a:r>
+          </a:p>
+          <a:p>
+            <a:pPr algn="l">
+              <a:spcBef>
+                <a:spcPts val="0"/>
+              </a:spcBef>
+              <a:spcAft>
+                <a:spcPts val="100"/>
+              </a:spcAft>
+            </a:pPr>
+            <a:endParaRPr sz="1300">
+              <a:solidFill>
+                <a:srgbClr val="A6E3A1"/>
+              </a:solidFill>
+              <a:latin typeface="Courier New"/>
+            </a:endParaRPr>
+          </a:p>
+          <a:p>
+            <a:pPr algn="l">
+              <a:spcBef>
+                <a:spcPts val="0"/>
+              </a:spcBef>
+              <a:spcAft>
+                <a:spcPts val="100"/>
+              </a:spcAft>
+            </a:pPr>
+            <a:r>
+              <a:rPr sz="1300">
+                <a:solidFill>
+                  <a:srgbClr val="A6E3A1"/>
+                </a:solidFill>
+                <a:latin typeface="Courier New"/>
+              </a:rPr>
+              <a:t>    vis_img[both_on] = (255, 255, 255)  # 白：正常點亮</a:t>
+            </a:r>
+          </a:p>
+          <a:p>
+            <a:pPr algn="l">
+              <a:spcBef>
+                <a:spcPts val="0"/>
+              </a:spcBef>
+              <a:spcAft>
+                <a:spcPts val="100"/>
+              </a:spcAft>
+            </a:pPr>
+            <a:r>
+              <a:rPr sz="1300">
+                <a:solidFill>
+                  <a:srgbClr val="A6E3A1"/>
+                </a:solidFill>
+                <a:latin typeface="Courier New"/>
+              </a:rPr>
+              <a:t>    vis_img[missing] = (  0,   0, 255)  # 紅：漏亮</a:t>
+            </a:r>
+          </a:p>
+          <a:p>
+            <a:pPr algn="l">
+              <a:spcBef>
+                <a:spcPts val="0"/>
+              </a:spcBef>
+              <a:spcAft>
+                <a:spcPts val="100"/>
+              </a:spcAft>
+            </a:pPr>
+            <a:r>
+              <a:rPr sz="1300">
+                <a:solidFill>
+                  <a:srgbClr val="A6E3A1"/>
+                </a:solidFill>
+                <a:latin typeface="Courier New"/>
+              </a:rPr>
+              <a:t>    vis_img[extra  ] = (255,   0,   0)  # 藍：多亮</a:t>
+            </a:r>
+          </a:p>
+          <a:p>
+            <a:pPr algn="l">
+              <a:spcBef>
+                <a:spcPts val="0"/>
+              </a:spcBef>
+              <a:spcAft>
+                <a:spcPts val="100"/>
+              </a:spcAft>
+            </a:pPr>
+            <a:endParaRPr sz="1300">
+              <a:solidFill>
+                <a:srgbClr val="A6E3A1"/>
+              </a:solidFill>
+              <a:latin typeface="Courier New"/>
+            </a:endParaRPr>
+          </a:p>
+          <a:p>
+            <a:pPr algn="l">
+              <a:spcBef>
+                <a:spcPts val="0"/>
+              </a:spcBef>
+              <a:spcAft>
+                <a:spcPts val="100"/>
+              </a:spcAft>
+            </a:pPr>
+            <a:r>
+              <a:rPr sz="1300">
+                <a:solidFill>
+                  <a:srgbClr val="A6E3A1"/>
+                </a:solidFill>
+                <a:latin typeface="Courier New"/>
+              </a:rPr>
+              <a:t>    diff_count = int(np.sum(missing) + np.sum(extra))</a:t>
+            </a:r>
+          </a:p>
+        </p:txBody>
+      </p:sp>
+      <p:sp>
+        <p:nvSpPr>
+          <p:cNvPr id="11" name="TextBox 10"/>
+          <p:cNvSpPr txBox="1"/>
+          <p:nvPr/>
+        </p:nvSpPr>
+        <p:spPr>
+          <a:xfrm>
+            <a:off x="457200" y="5577840"/>
+            <a:ext cx="11247120" cy="457200"/>
           </a:xfrm>
           <a:prstGeom prst="rect">
             <a:avLst/>
@@ -6520,252 +8441,14 @@
           </a:bodyPr>
           <a:lstStyle/>
           <a:p>
-            <a:pPr algn="l"/>
-            <a:r>
-              <a:rPr sz="1600" b="0">
-                <a:solidFill>
-                  <a:srgbClr val="FFFFFF"/>
-                </a:solidFill>
-              </a:rPr>
-              <a:t>• 新增影像尺寸驗證，不符早返回</a:t>
-            </a:r>
-          </a:p>
-        </p:txBody>
-      </p:sp>
-      <p:sp>
-        <p:nvSpPr>
-          <p:cNvPr id="11" name="TextBox 10"/>
-          <p:cNvSpPr txBox="1"/>
-          <p:nvPr/>
-        </p:nvSpPr>
-        <p:spPr>
-          <a:xfrm>
-            <a:off x="365760" y="3246120"/>
-            <a:ext cx="5394960" cy="640080"/>
-          </a:xfrm>
-          <a:prstGeom prst="rect">
-            <a:avLst/>
-          </a:prstGeom>
-          <a:noFill/>
-        </p:spPr>
-        <p:txBody>
-          <a:bodyPr wrap="square">
-            <a:spAutoFit/>
-          </a:bodyPr>
-          <a:lstStyle/>
-          <a:p>
-            <a:pPr algn="l"/>
-            <a:r>
-              <a:rPr sz="1600" b="0">
-                <a:solidFill>
-                  <a:srgbClr val="FFFFFF"/>
-                </a:solidFill>
-              </a:rPr>
-              <a:t>• 彙整報告只列有異常的測試組</a:t>
-            </a:r>
-          </a:p>
-        </p:txBody>
-      </p:sp>
-      <p:sp>
-        <p:nvSpPr>
-          <p:cNvPr id="12" name="TextBox 11"/>
-          <p:cNvSpPr txBox="1"/>
-          <p:nvPr/>
-        </p:nvSpPr>
-        <p:spPr>
-          <a:xfrm>
-            <a:off x="6217920" y="1234440"/>
-            <a:ext cx="5577840" cy="457200"/>
-          </a:xfrm>
-          <a:prstGeom prst="rect">
-            <a:avLst/>
-          </a:prstGeom>
-          <a:noFill/>
-        </p:spPr>
-        <p:txBody>
-          <a:bodyPr wrap="square">
-            <a:spAutoFit/>
-          </a:bodyPr>
-          <a:lstStyle/>
-          <a:p>
-            <a:pPr algn="l"/>
-            <a:r>
-              <a:rPr sz="1600" b="1">
-                <a:solidFill>
-                  <a:srgbClr val="A6E3A1"/>
-                </a:solidFill>
-              </a:rPr>
-              <a:t>效能優化</a:t>
-            </a:r>
-          </a:p>
-        </p:txBody>
-      </p:sp>
-      <p:sp>
-        <p:nvSpPr>
-          <p:cNvPr id="13" name="TextBox 12"/>
-          <p:cNvSpPr txBox="1"/>
-          <p:nvPr/>
-        </p:nvSpPr>
-        <p:spPr>
-          <a:xfrm>
-            <a:off x="6217920" y="1737360"/>
-            <a:ext cx="5577840" cy="640080"/>
-          </a:xfrm>
-          <a:prstGeom prst="rect">
-            <a:avLst/>
-          </a:prstGeom>
-          <a:noFill/>
-        </p:spPr>
-        <p:txBody>
-          <a:bodyPr wrap="square">
-            <a:spAutoFit/>
-          </a:bodyPr>
-          <a:lstStyle/>
-          <a:p>
-            <a:pPr algn="l"/>
-            <a:r>
-              <a:rPr sz="1600" b="0">
-                <a:solidFill>
-                  <a:srgbClr val="FFFFFF"/>
-                </a:solidFill>
-              </a:rPr>
-              <a:t>• process_local_dimming：雙層迴圈 → NumPy reshape+max</a:t>
-            </a:r>
-          </a:p>
-        </p:txBody>
-      </p:sp>
-      <p:sp>
-        <p:nvSpPr>
-          <p:cNvPr id="14" name="TextBox 13"/>
-          <p:cNvSpPr txBox="1"/>
-          <p:nvPr/>
-        </p:nvSpPr>
-        <p:spPr>
-          <a:xfrm>
-            <a:off x="6217920" y="2423160"/>
-            <a:ext cx="5577840" cy="640080"/>
-          </a:xfrm>
-          <a:prstGeom prst="rect">
-            <a:avLst/>
-          </a:prstGeom>
-          <a:noFill/>
-        </p:spPr>
-        <p:txBody>
-          <a:bodyPr wrap="square">
-            <a:spAutoFit/>
-          </a:bodyPr>
-          <a:lstStyle/>
-          <a:p>
-            <a:pPr algn="l"/>
-            <a:r>
-              <a:rPr sz="1600" b="0">
-                <a:solidFill>
-                  <a:srgbClr val="FFFFFF"/>
-                </a:solidFill>
-              </a:rPr>
-              <a:t>• visualize_diff：條件迴圈 → Boolean mask 向量化</a:t>
-            </a:r>
-          </a:p>
-        </p:txBody>
-      </p:sp>
-      <p:sp>
-        <p:nvSpPr>
-          <p:cNvPr id="15" name="TextBox 14"/>
-          <p:cNvSpPr txBox="1"/>
-          <p:nvPr/>
-        </p:nvSpPr>
-        <p:spPr>
-          <a:xfrm>
-            <a:off x="6217920" y="3108960"/>
-            <a:ext cx="5577840" cy="640080"/>
-          </a:xfrm>
-          <a:prstGeom prst="rect">
-            <a:avLst/>
-          </a:prstGeom>
-          <a:noFill/>
-        </p:spPr>
-        <p:txBody>
-          <a:bodyPr wrap="square">
-            <a:spAutoFit/>
-          </a:bodyPr>
-          <a:lstStyle/>
-          <a:p>
-            <a:pPr algn="l"/>
-            <a:r>
-              <a:rPr sz="1600" b="0">
-                <a:solidFill>
-                  <a:srgbClr val="FFFFFF"/>
-                </a:solidFill>
-              </a:rPr>
-              <a:t>• sim_out_img 填色 → repeat × 255 向量化</a:t>
-            </a:r>
-          </a:p>
-        </p:txBody>
-      </p:sp>
-      <p:sp>
-        <p:nvSpPr>
-          <p:cNvPr id="16" name="TextBox 15"/>
-          <p:cNvSpPr txBox="1"/>
-          <p:nvPr/>
-        </p:nvSpPr>
-        <p:spPr>
-          <a:xfrm>
-            <a:off x="6217920" y="3794760"/>
-            <a:ext cx="5577840" cy="640080"/>
-          </a:xfrm>
-          <a:prstGeom prst="rect">
-            <a:avLst/>
-          </a:prstGeom>
-          <a:noFill/>
-        </p:spPr>
-        <p:txBody>
-          <a:bodyPr wrap="square">
-            <a:spAutoFit/>
-          </a:bodyPr>
-          <a:lstStyle/>
-          <a:p>
-            <a:pPr algn="l"/>
-            <a:r>
-              <a:rPr sz="1600" b="0">
-                <a:solidFill>
-                  <a:srgbClr val="FFFFFF"/>
-                </a:solidFill>
-              </a:rPr>
-              <a:t>• 運算速度大幅提升，記憶體更友好</a:t>
-            </a:r>
-          </a:p>
-        </p:txBody>
-      </p:sp>
-      <p:sp>
-        <p:nvSpPr>
-          <p:cNvPr id="17" name="TextBox 16"/>
-          <p:cNvSpPr txBox="1"/>
-          <p:nvPr/>
-        </p:nvSpPr>
-        <p:spPr>
-          <a:xfrm>
-            <a:off x="6217920" y="4480560"/>
-            <a:ext cx="5577840" cy="640080"/>
-          </a:xfrm>
-          <a:prstGeom prst="rect">
-            <a:avLst/>
-          </a:prstGeom>
-          <a:noFill/>
-        </p:spPr>
-        <p:txBody>
-          <a:bodyPr wrap="square">
-            <a:spAutoFit/>
-          </a:bodyPr>
-          <a:lstStyle/>
-          <a:p>
-            <a:pPr algn="l"/>
-            <a:r>
-              <a:rPr sz="1600" b="0">
-                <a:solidFill>
-                  <a:srgbClr val="FFFFFF"/>
-                </a:solidFill>
-              </a:rPr>
-              <a:t>• 邏輯與 visualize_diff.py 完全同步</a:t>
+            <a:pPr algn="ctr"/>
+            <a:r>
+              <a:rPr sz="1500" b="1">
+                <a:solidFill>
+                  <a:srgbClr val="F9E2AF"/>
+                </a:solidFill>
+              </a:rPr>
+              <a:t>雙層迴圈 → reshape+max / Boolean mask：速度大幅提升，程式碼更簡潔</a:t>
             </a:r>
           </a:p>
         </p:txBody>
@@ -6775,6 +8458,13 @@
   <p:clrMapOvr>
     <a:masterClrMapping/>
   </p:clrMapOvr>
+  <p:timing>
+    <p:tnLst>
+      <p:par>
+        <p:cTn id="1" dur="indefinite" restart="never" nodeType="tmRoot"/>
+      </p:par>
+    </p:tnLst>
+  </p:timing>
 </p:sld>
 </file>
 
@@ -6876,7 +8566,7 @@
                   <a:srgbClr val="89B4FA"/>
                 </a:solidFill>
               </a:rPr>
-              <a:t>視覺化輸出</a:t>
+              <a:t>關鍵程式碼 ②</a:t>
             </a:r>
           </a:p>
         </p:txBody>
@@ -6910,7 +8600,7 @@
                   <a:srgbClr val="BAC2D8"/>
                 </a:solidFill>
               </a:rPr>
-              <a:t>compare/diff_N.png 判讀方式</a:t>
+              <a:t>Dump 格式自動偵測 &amp; Zone 層級漏亮判斷</a:t>
             </a:r>
           </a:p>
         </p:txBody>
@@ -6923,17 +8613,19 @@
         </p:nvSpPr>
         <p:spPr>
           <a:xfrm>
-            <a:off x="457200" y="1371600"/>
-            <a:ext cx="731520" cy="640080"/>
+            <a:off x="365760" y="1234440"/>
+            <a:ext cx="5486400" cy="4572000"/>
           </a:xfrm>
           <a:prstGeom prst="rect">
             <a:avLst/>
           </a:prstGeom>
           <a:solidFill>
-            <a:srgbClr val="FFFFFF"/>
+            <a:srgbClr val="0D0F18"/>
           </a:solidFill>
-          <a:ln>
-            <a:noFill/>
+          <a:ln w="12700">
+            <a:solidFill>
+              <a:srgbClr val="89B4FA"/>
+            </a:solidFill>
           </a:ln>
         </p:spPr>
         <p:style>
@@ -6967,8 +8659,8 @@
         </p:nvSpPr>
         <p:spPr>
           <a:xfrm>
-            <a:off x="1371600" y="1417320"/>
-            <a:ext cx="1371600" cy="548640"/>
+            <a:off x="502920" y="1280160"/>
+            <a:ext cx="5303520" cy="320040"/>
           </a:xfrm>
           <a:prstGeom prst="rect">
             <a:avLst/>
@@ -6983,12 +8675,12 @@
           <a:p>
             <a:pPr algn="l"/>
             <a:r>
-              <a:rPr sz="1800" b="1">
-                <a:solidFill>
-                  <a:srgbClr val="FFFFFF"/>
-                </a:solidFill>
-              </a:rPr>
-              <a:t>白色</a:t>
+              <a:rPr sz="1300" b="1">
+                <a:solidFill>
+                  <a:srgbClr val="89B4FA"/>
+                </a:solidFill>
+              </a:rPr>
+              <a:t>parse_dump()  —  新舊格式自動偵測</a:t>
             </a:r>
           </a:p>
         </p:txBody>
@@ -7001,85 +8693,784 @@
         </p:nvSpPr>
         <p:spPr>
           <a:xfrm>
-            <a:off x="2834640" y="1417320"/>
-            <a:ext cx="4114800" cy="548640"/>
-          </a:xfrm>
-          <a:prstGeom prst="rect">
-            <a:avLst/>
-          </a:prstGeom>
-          <a:noFill/>
-        </p:spPr>
-        <p:txBody>
-          <a:bodyPr wrap="square">
-            <a:spAutoFit/>
-          </a:bodyPr>
-          <a:lstStyle/>
-          <a:p>
-            <a:pPr algn="l"/>
-            <a:r>
-              <a:rPr sz="1600" b="0">
-                <a:solidFill>
-                  <a:srgbClr val="BAC2D8"/>
-                </a:solidFill>
-              </a:rPr>
-              <a:t>兩者皆亮 (Both ON)</a:t>
-            </a:r>
-          </a:p>
-        </p:txBody>
-      </p:sp>
-      <p:sp>
-        <p:nvSpPr>
-          <p:cNvPr id="8" name="TextBox 7"/>
-          <p:cNvSpPr txBox="1"/>
-          <p:nvPr/>
-        </p:nvSpPr>
-        <p:spPr>
-          <a:xfrm>
-            <a:off x="7132320" y="1417320"/>
-            <a:ext cx="4572000" cy="548640"/>
-          </a:xfrm>
-          <a:prstGeom prst="rect">
-            <a:avLst/>
-          </a:prstGeom>
-          <a:noFill/>
-        </p:spPr>
-        <p:txBody>
-          <a:bodyPr wrap="square">
-            <a:spAutoFit/>
-          </a:bodyPr>
-          <a:lstStyle/>
-          <a:p>
-            <a:pPr algn="l"/>
-            <a:r>
-              <a:rPr sz="1600" b="0">
-                <a:solidFill>
-                  <a:srgbClr val="FFFFFF"/>
-                </a:solidFill>
-              </a:rPr>
-              <a:t>正常點亮，模擬與硬體一致</a:t>
-            </a:r>
-          </a:p>
-        </p:txBody>
-      </p:sp>
-      <p:sp>
-        <p:nvSpPr>
-          <p:cNvPr id="9" name="Rectangle 8"/>
+            <a:off x="457200" y="1627632"/>
+            <a:ext cx="5303520" cy="4087368"/>
+          </a:xfrm>
+          <a:prstGeom prst="rect">
+            <a:avLst/>
+          </a:prstGeom>
+          <a:noFill/>
+        </p:spPr>
+        <p:txBody>
+          <a:bodyPr wrap="none">
+            <a:spAutoFit/>
+          </a:bodyPr>
+          <a:lstStyle/>
+          <a:p>
+            <a:pPr algn="l">
+              <a:spcBef>
+                <a:spcPts val="0"/>
+              </a:spcBef>
+              <a:spcAft>
+                <a:spcPts val="100"/>
+              </a:spcAft>
+            </a:pPr>
+            <a:r>
+              <a:rPr sz="1200" dirty="0" err="1">
+                <a:solidFill>
+                  <a:srgbClr val="A6E3A1"/>
+                </a:solidFill>
+                <a:latin typeface="Courier New"/>
+              </a:rPr>
+              <a:t>def</a:t>
+            </a:r>
+            <a:r>
+              <a:rPr sz="1200" dirty="0">
+                <a:solidFill>
+                  <a:srgbClr val="A6E3A1"/>
+                </a:solidFill>
+                <a:latin typeface="Courier New"/>
+              </a:rPr>
+              <a:t> </a:t>
+            </a:r>
+            <a:r>
+              <a:rPr sz="1200" dirty="0" err="1">
+                <a:solidFill>
+                  <a:srgbClr val="A6E3A1"/>
+                </a:solidFill>
+                <a:latin typeface="Courier New"/>
+              </a:rPr>
+              <a:t>parse_dump</a:t>
+            </a:r>
+            <a:r>
+              <a:rPr sz="1200" dirty="0">
+                <a:solidFill>
+                  <a:srgbClr val="A6E3A1"/>
+                </a:solidFill>
+                <a:latin typeface="Courier New"/>
+              </a:rPr>
+              <a:t>(</a:t>
+            </a:r>
+            <a:r>
+              <a:rPr sz="1200" dirty="0" err="1">
+                <a:solidFill>
+                  <a:srgbClr val="A6E3A1"/>
+                </a:solidFill>
+                <a:latin typeface="Courier New"/>
+              </a:rPr>
+              <a:t>file_path</a:t>
+            </a:r>
+            <a:r>
+              <a:rPr sz="1200" dirty="0">
+                <a:solidFill>
+                  <a:srgbClr val="A6E3A1"/>
+                </a:solidFill>
+                <a:latin typeface="Courier New"/>
+              </a:rPr>
+              <a:t>, logger):</a:t>
+            </a:r>
+          </a:p>
+          <a:p>
+            <a:pPr algn="l">
+              <a:spcBef>
+                <a:spcPts val="0"/>
+              </a:spcBef>
+              <a:spcAft>
+                <a:spcPts val="100"/>
+              </a:spcAft>
+            </a:pPr>
+            <a:r>
+              <a:rPr sz="1200" dirty="0">
+                <a:solidFill>
+                  <a:srgbClr val="A6E3A1"/>
+                </a:solidFill>
+                <a:latin typeface="Courier New"/>
+              </a:rPr>
+              <a:t>    </a:t>
+            </a:r>
+            <a:r>
+              <a:rPr sz="1200" dirty="0" err="1">
+                <a:solidFill>
+                  <a:srgbClr val="A6E3A1"/>
+                </a:solidFill>
+                <a:latin typeface="Courier New"/>
+              </a:rPr>
+              <a:t>dump_data</a:t>
+            </a:r>
+            <a:r>
+              <a:rPr sz="1200" dirty="0">
+                <a:solidFill>
+                  <a:srgbClr val="A6E3A1"/>
+                </a:solidFill>
+                <a:latin typeface="Courier New"/>
+              </a:rPr>
+              <a:t> = </a:t>
+            </a:r>
+            <a:r>
+              <a:rPr sz="1200" dirty="0" err="1">
+                <a:solidFill>
+                  <a:srgbClr val="A6E3A1"/>
+                </a:solidFill>
+                <a:latin typeface="Courier New"/>
+              </a:rPr>
+              <a:t>np.zeros</a:t>
+            </a:r>
+            <a:r>
+              <a:rPr sz="1200" dirty="0">
+                <a:solidFill>
+                  <a:srgbClr val="A6E3A1"/>
+                </a:solidFill>
+                <a:latin typeface="Courier New"/>
+              </a:rPr>
+              <a:t>(GRID_H * GRID_W, np.int32)</a:t>
+            </a:r>
+          </a:p>
+          <a:p>
+            <a:pPr algn="l">
+              <a:spcBef>
+                <a:spcPts val="0"/>
+              </a:spcBef>
+              <a:spcAft>
+                <a:spcPts val="100"/>
+              </a:spcAft>
+            </a:pPr>
+            <a:r>
+              <a:rPr sz="1200" dirty="0">
+                <a:solidFill>
+                  <a:srgbClr val="A6E3A1"/>
+                </a:solidFill>
+                <a:latin typeface="Courier New"/>
+              </a:rPr>
+              <a:t>    with open(</a:t>
+            </a:r>
+            <a:r>
+              <a:rPr sz="1200" dirty="0" err="1">
+                <a:solidFill>
+                  <a:srgbClr val="A6E3A1"/>
+                </a:solidFill>
+                <a:latin typeface="Courier New"/>
+              </a:rPr>
+              <a:t>file_path</a:t>
+            </a:r>
+            <a:r>
+              <a:rPr sz="1200" dirty="0">
+                <a:solidFill>
+                  <a:srgbClr val="A6E3A1"/>
+                </a:solidFill>
+                <a:latin typeface="Courier New"/>
+              </a:rPr>
+              <a:t>, 'r') as f:</a:t>
+            </a:r>
+          </a:p>
+          <a:p>
+            <a:pPr algn="l">
+              <a:spcBef>
+                <a:spcPts val="0"/>
+              </a:spcBef>
+              <a:spcAft>
+                <a:spcPts val="100"/>
+              </a:spcAft>
+            </a:pPr>
+            <a:r>
+              <a:rPr sz="1200" dirty="0">
+                <a:solidFill>
+                  <a:srgbClr val="A6E3A1"/>
+                </a:solidFill>
+                <a:latin typeface="Courier New"/>
+              </a:rPr>
+              <a:t>        for line in f:</a:t>
+            </a:r>
+          </a:p>
+          <a:p>
+            <a:pPr algn="l">
+              <a:spcBef>
+                <a:spcPts val="0"/>
+              </a:spcBef>
+              <a:spcAft>
+                <a:spcPts val="100"/>
+              </a:spcAft>
+            </a:pPr>
+            <a:r>
+              <a:rPr sz="1200" dirty="0">
+                <a:solidFill>
+                  <a:srgbClr val="A6E3A1"/>
+                </a:solidFill>
+                <a:latin typeface="Courier New"/>
+              </a:rPr>
+              <a:t>            # </a:t>
+            </a:r>
+            <a:r>
+              <a:rPr sz="1200" dirty="0" err="1">
+                <a:solidFill>
+                  <a:srgbClr val="A6E3A1"/>
+                </a:solidFill>
+                <a:latin typeface="Courier New"/>
+              </a:rPr>
+              <a:t>新格式</a:t>
+            </a:r>
+            <a:r>
+              <a:rPr sz="1200" dirty="0">
+                <a:solidFill>
+                  <a:srgbClr val="A6E3A1"/>
+                </a:solidFill>
+                <a:latin typeface="Courier New"/>
+              </a:rPr>
+              <a:t>：[</a:t>
+            </a:r>
+            <a:r>
+              <a:rPr sz="1200" dirty="0" err="1">
+                <a:solidFill>
+                  <a:srgbClr val="A6E3A1"/>
+                </a:solidFill>
+                <a:latin typeface="Courier New"/>
+              </a:rPr>
+              <a:t>idx</a:t>
+            </a:r>
+            <a:r>
+              <a:rPr sz="1200" dirty="0">
+                <a:solidFill>
+                  <a:srgbClr val="A6E3A1"/>
+                </a:solidFill>
+                <a:latin typeface="Courier New"/>
+              </a:rPr>
+              <a:t>]  </a:t>
+            </a:r>
+            <a:r>
+              <a:rPr sz="1200" dirty="0" err="1">
+                <a:solidFill>
+                  <a:srgbClr val="A6E3A1"/>
+                </a:solidFill>
+                <a:latin typeface="Courier New"/>
+              </a:rPr>
+              <a:t>value（Tab</a:t>
+            </a:r>
+            <a:r>
+              <a:rPr sz="1200" dirty="0">
+                <a:solidFill>
+                  <a:srgbClr val="A6E3A1"/>
+                </a:solidFill>
+                <a:latin typeface="Courier New"/>
+              </a:rPr>
+              <a:t> / </a:t>
+            </a:r>
+            <a:r>
+              <a:rPr sz="1200" dirty="0" err="1">
+                <a:solidFill>
+                  <a:srgbClr val="A6E3A1"/>
+                </a:solidFill>
+                <a:latin typeface="Courier New"/>
+              </a:rPr>
+              <a:t>空白分隔</a:t>
+            </a:r>
+            <a:r>
+              <a:rPr sz="1200" dirty="0">
+                <a:solidFill>
+                  <a:srgbClr val="A6E3A1"/>
+                </a:solidFill>
+                <a:latin typeface="Courier New"/>
+              </a:rPr>
+              <a:t>）</a:t>
+            </a:r>
+          </a:p>
+          <a:p>
+            <a:pPr algn="l">
+              <a:spcBef>
+                <a:spcPts val="0"/>
+              </a:spcBef>
+              <a:spcAft>
+                <a:spcPts val="100"/>
+              </a:spcAft>
+            </a:pPr>
+            <a:r>
+              <a:rPr sz="1200" dirty="0">
+                <a:solidFill>
+                  <a:srgbClr val="A6E3A1"/>
+                </a:solidFill>
+                <a:latin typeface="Courier New"/>
+              </a:rPr>
+              <a:t>            match = </a:t>
+            </a:r>
+            <a:r>
+              <a:rPr sz="1200" dirty="0" err="1">
+                <a:solidFill>
+                  <a:srgbClr val="A6E3A1"/>
+                </a:solidFill>
+                <a:latin typeface="Courier New"/>
+              </a:rPr>
+              <a:t>re.search</a:t>
+            </a:r>
+            <a:r>
+              <a:rPr sz="1200" dirty="0">
+                <a:solidFill>
+                  <a:srgbClr val="A6E3A1"/>
+                </a:solidFill>
+                <a:latin typeface="Courier New"/>
+              </a:rPr>
+              <a:t>(</a:t>
+            </a:r>
+          </a:p>
+          <a:p>
+            <a:pPr algn="l">
+              <a:spcBef>
+                <a:spcPts val="0"/>
+              </a:spcBef>
+              <a:spcAft>
+                <a:spcPts val="100"/>
+              </a:spcAft>
+            </a:pPr>
+            <a:r>
+              <a:rPr sz="1200" dirty="0">
+                <a:solidFill>
+                  <a:srgbClr val="A6E3A1"/>
+                </a:solidFill>
+                <a:latin typeface="Courier New"/>
+              </a:rPr>
+              <a:t>                r'\[(\d+)\]\s+(\d+)', line)</a:t>
+            </a:r>
+          </a:p>
+          <a:p>
+            <a:pPr algn="l">
+              <a:spcBef>
+                <a:spcPts val="0"/>
+              </a:spcBef>
+              <a:spcAft>
+                <a:spcPts val="100"/>
+              </a:spcAft>
+            </a:pPr>
+            <a:r>
+              <a:rPr sz="1200" dirty="0">
+                <a:solidFill>
+                  <a:srgbClr val="A6E3A1"/>
+                </a:solidFill>
+                <a:latin typeface="Courier New"/>
+              </a:rPr>
+              <a:t>            # </a:t>
+            </a:r>
+            <a:r>
+              <a:rPr sz="1200" dirty="0" err="1">
+                <a:solidFill>
+                  <a:srgbClr val="A6E3A1"/>
+                </a:solidFill>
+                <a:latin typeface="Courier New"/>
+              </a:rPr>
+              <a:t>舊格式</a:t>
+            </a:r>
+            <a:r>
+              <a:rPr sz="1200" dirty="0">
+                <a:solidFill>
+                  <a:srgbClr val="A6E3A1"/>
+                </a:solidFill>
+                <a:latin typeface="Courier New"/>
+              </a:rPr>
+              <a:t>：[</a:t>
+            </a:r>
+            <a:r>
+              <a:rPr sz="1200" dirty="0" err="1">
+                <a:solidFill>
+                  <a:srgbClr val="A6E3A1"/>
+                </a:solidFill>
+                <a:latin typeface="Courier New"/>
+              </a:rPr>
+              <a:t>idx</a:t>
+            </a:r>
+            <a:r>
+              <a:rPr sz="1200" dirty="0">
+                <a:solidFill>
+                  <a:srgbClr val="A6E3A1"/>
+                </a:solidFill>
+                <a:latin typeface="Courier New"/>
+              </a:rPr>
+              <a:t>]value0x...（</a:t>
+            </a:r>
+            <a:r>
+              <a:rPr sz="1200" dirty="0" err="1">
+                <a:solidFill>
+                  <a:srgbClr val="A6E3A1"/>
+                </a:solidFill>
+                <a:latin typeface="Courier New"/>
+              </a:rPr>
+              <a:t>無分隔符</a:t>
+            </a:r>
+            <a:r>
+              <a:rPr sz="1200" dirty="0">
+                <a:solidFill>
+                  <a:srgbClr val="A6E3A1"/>
+                </a:solidFill>
+                <a:latin typeface="Courier New"/>
+              </a:rPr>
+              <a:t>）</a:t>
+            </a:r>
+          </a:p>
+          <a:p>
+            <a:pPr algn="l">
+              <a:spcBef>
+                <a:spcPts val="0"/>
+              </a:spcBef>
+              <a:spcAft>
+                <a:spcPts val="100"/>
+              </a:spcAft>
+            </a:pPr>
+            <a:r>
+              <a:rPr sz="1200" dirty="0">
+                <a:solidFill>
+                  <a:srgbClr val="A6E3A1"/>
+                </a:solidFill>
+                <a:latin typeface="Courier New"/>
+              </a:rPr>
+              <a:t>            if not match:</a:t>
+            </a:r>
+          </a:p>
+          <a:p>
+            <a:pPr algn="l">
+              <a:spcBef>
+                <a:spcPts val="0"/>
+              </a:spcBef>
+              <a:spcAft>
+                <a:spcPts val="100"/>
+              </a:spcAft>
+            </a:pPr>
+            <a:r>
+              <a:rPr sz="1200" dirty="0">
+                <a:solidFill>
+                  <a:srgbClr val="A6E3A1"/>
+                </a:solidFill>
+                <a:latin typeface="Courier New"/>
+              </a:rPr>
+              <a:t>                match = </a:t>
+            </a:r>
+            <a:r>
+              <a:rPr sz="1200" dirty="0" err="1">
+                <a:solidFill>
+                  <a:srgbClr val="A6E3A1"/>
+                </a:solidFill>
+                <a:latin typeface="Courier New"/>
+              </a:rPr>
+              <a:t>re.search</a:t>
+            </a:r>
+            <a:r>
+              <a:rPr sz="1200" dirty="0">
+                <a:solidFill>
+                  <a:srgbClr val="A6E3A1"/>
+                </a:solidFill>
+                <a:latin typeface="Courier New"/>
+              </a:rPr>
+              <a:t>(</a:t>
+            </a:r>
+          </a:p>
+          <a:p>
+            <a:pPr algn="l">
+              <a:spcBef>
+                <a:spcPts val="0"/>
+              </a:spcBef>
+              <a:spcAft>
+                <a:spcPts val="100"/>
+              </a:spcAft>
+            </a:pPr>
+            <a:r>
+              <a:rPr sz="1200" dirty="0">
+                <a:solidFill>
+                  <a:srgbClr val="A6E3A1"/>
+                </a:solidFill>
+                <a:latin typeface="Courier New"/>
+              </a:rPr>
+              <a:t>                    r'\[(\d+)\](\d+)0x', line)</a:t>
+            </a:r>
+          </a:p>
+          <a:p>
+            <a:pPr algn="l">
+              <a:spcBef>
+                <a:spcPts val="0"/>
+              </a:spcBef>
+              <a:spcAft>
+                <a:spcPts val="100"/>
+              </a:spcAft>
+            </a:pPr>
+            <a:r>
+              <a:rPr sz="1200" dirty="0">
+                <a:solidFill>
+                  <a:srgbClr val="A6E3A1"/>
+                </a:solidFill>
+                <a:latin typeface="Courier New"/>
+              </a:rPr>
+              <a:t>            if match:</a:t>
+            </a:r>
+          </a:p>
+          <a:p>
+            <a:pPr algn="l">
+              <a:spcBef>
+                <a:spcPts val="0"/>
+              </a:spcBef>
+              <a:spcAft>
+                <a:spcPts val="100"/>
+              </a:spcAft>
+            </a:pPr>
+            <a:r>
+              <a:rPr sz="1200" dirty="0">
+                <a:solidFill>
+                  <a:srgbClr val="A6E3A1"/>
+                </a:solidFill>
+                <a:latin typeface="Courier New"/>
+              </a:rPr>
+              <a:t>                </a:t>
+            </a:r>
+            <a:r>
+              <a:rPr sz="1200" dirty="0" err="1">
+                <a:solidFill>
+                  <a:srgbClr val="A6E3A1"/>
+                </a:solidFill>
+                <a:latin typeface="Courier New"/>
+              </a:rPr>
+              <a:t>idx</a:t>
+            </a:r>
+            <a:r>
+              <a:rPr sz="1200" dirty="0">
+                <a:solidFill>
+                  <a:srgbClr val="A6E3A1"/>
+                </a:solidFill>
+                <a:latin typeface="Courier New"/>
+              </a:rPr>
+              <a:t> = </a:t>
+            </a:r>
+            <a:r>
+              <a:rPr sz="1200" dirty="0" err="1">
+                <a:solidFill>
+                  <a:srgbClr val="A6E3A1"/>
+                </a:solidFill>
+                <a:latin typeface="Courier New"/>
+              </a:rPr>
+              <a:t>int</a:t>
+            </a:r>
+            <a:r>
+              <a:rPr sz="1200" dirty="0">
+                <a:solidFill>
+                  <a:srgbClr val="A6E3A1"/>
+                </a:solidFill>
+                <a:latin typeface="Courier New"/>
+              </a:rPr>
+              <a:t>(</a:t>
+            </a:r>
+            <a:r>
+              <a:rPr sz="1200" dirty="0" err="1">
+                <a:solidFill>
+                  <a:srgbClr val="A6E3A1"/>
+                </a:solidFill>
+                <a:latin typeface="Courier New"/>
+              </a:rPr>
+              <a:t>match.group</a:t>
+            </a:r>
+            <a:r>
+              <a:rPr sz="1200" dirty="0">
+                <a:solidFill>
+                  <a:srgbClr val="A6E3A1"/>
+                </a:solidFill>
+                <a:latin typeface="Courier New"/>
+              </a:rPr>
+              <a:t>(1))</a:t>
+            </a:r>
+          </a:p>
+          <a:p>
+            <a:pPr algn="l">
+              <a:spcBef>
+                <a:spcPts val="0"/>
+              </a:spcBef>
+              <a:spcAft>
+                <a:spcPts val="100"/>
+              </a:spcAft>
+            </a:pPr>
+            <a:r>
+              <a:rPr sz="1200" dirty="0">
+                <a:solidFill>
+                  <a:srgbClr val="A6E3A1"/>
+                </a:solidFill>
+                <a:latin typeface="Courier New"/>
+              </a:rPr>
+              <a:t>                </a:t>
+            </a:r>
+            <a:r>
+              <a:rPr sz="1200" dirty="0" err="1">
+                <a:solidFill>
+                  <a:srgbClr val="A6E3A1"/>
+                </a:solidFill>
+                <a:latin typeface="Courier New"/>
+              </a:rPr>
+              <a:t>val</a:t>
+            </a:r>
+            <a:r>
+              <a:rPr sz="1200" dirty="0">
+                <a:solidFill>
+                  <a:srgbClr val="A6E3A1"/>
+                </a:solidFill>
+                <a:latin typeface="Courier New"/>
+              </a:rPr>
+              <a:t> = </a:t>
+            </a:r>
+            <a:r>
+              <a:rPr sz="1200" dirty="0" err="1">
+                <a:solidFill>
+                  <a:srgbClr val="A6E3A1"/>
+                </a:solidFill>
+                <a:latin typeface="Courier New"/>
+              </a:rPr>
+              <a:t>int</a:t>
+            </a:r>
+            <a:r>
+              <a:rPr sz="1200" dirty="0">
+                <a:solidFill>
+                  <a:srgbClr val="A6E3A1"/>
+                </a:solidFill>
+                <a:latin typeface="Courier New"/>
+              </a:rPr>
+              <a:t>(</a:t>
+            </a:r>
+            <a:r>
+              <a:rPr sz="1200" dirty="0" err="1">
+                <a:solidFill>
+                  <a:srgbClr val="A6E3A1"/>
+                </a:solidFill>
+                <a:latin typeface="Courier New"/>
+              </a:rPr>
+              <a:t>match.group</a:t>
+            </a:r>
+            <a:r>
+              <a:rPr sz="1200" dirty="0">
+                <a:solidFill>
+                  <a:srgbClr val="A6E3A1"/>
+                </a:solidFill>
+                <a:latin typeface="Courier New"/>
+              </a:rPr>
+              <a:t>(2))</a:t>
+            </a:r>
+          </a:p>
+          <a:p>
+            <a:pPr algn="l">
+              <a:spcBef>
+                <a:spcPts val="0"/>
+              </a:spcBef>
+              <a:spcAft>
+                <a:spcPts val="100"/>
+              </a:spcAft>
+            </a:pPr>
+            <a:r>
+              <a:rPr sz="1200" dirty="0">
+                <a:solidFill>
+                  <a:srgbClr val="A6E3A1"/>
+                </a:solidFill>
+                <a:latin typeface="Courier New"/>
+              </a:rPr>
+              <a:t>                </a:t>
+            </a:r>
+            <a:r>
+              <a:rPr sz="1200" dirty="0" err="1">
+                <a:solidFill>
+                  <a:srgbClr val="A6E3A1"/>
+                </a:solidFill>
+                <a:latin typeface="Courier New"/>
+              </a:rPr>
+              <a:t>dump_data</a:t>
+            </a:r>
+            <a:r>
+              <a:rPr sz="1200" dirty="0">
+                <a:solidFill>
+                  <a:srgbClr val="A6E3A1"/>
+                </a:solidFill>
+                <a:latin typeface="Courier New"/>
+              </a:rPr>
+              <a:t>[</a:t>
+            </a:r>
+            <a:r>
+              <a:rPr sz="1200" dirty="0" err="1">
+                <a:solidFill>
+                  <a:srgbClr val="A6E3A1"/>
+                </a:solidFill>
+                <a:latin typeface="Courier New"/>
+              </a:rPr>
+              <a:t>idx</a:t>
+            </a:r>
+            <a:r>
+              <a:rPr sz="1200" dirty="0">
+                <a:solidFill>
+                  <a:srgbClr val="A6E3A1"/>
+                </a:solidFill>
+                <a:latin typeface="Courier New"/>
+              </a:rPr>
+              <a:t>] = </a:t>
+            </a:r>
+            <a:r>
+              <a:rPr sz="1200" dirty="0" err="1">
+                <a:solidFill>
+                  <a:srgbClr val="A6E3A1"/>
+                </a:solidFill>
+                <a:latin typeface="Courier New"/>
+              </a:rPr>
+              <a:t>val</a:t>
+            </a:r>
+            <a:endParaRPr sz="1200" dirty="0">
+              <a:solidFill>
+                <a:srgbClr val="A6E3A1"/>
+              </a:solidFill>
+              <a:latin typeface="Courier New"/>
+            </a:endParaRPr>
+          </a:p>
+          <a:p>
+            <a:pPr algn="l">
+              <a:spcBef>
+                <a:spcPts val="0"/>
+              </a:spcBef>
+              <a:spcAft>
+                <a:spcPts val="100"/>
+              </a:spcAft>
+            </a:pPr>
+            <a:r>
+              <a:rPr sz="1200" dirty="0">
+                <a:solidFill>
+                  <a:srgbClr val="A6E3A1"/>
+                </a:solidFill>
+                <a:latin typeface="Courier New"/>
+              </a:rPr>
+              <a:t>    return </a:t>
+            </a:r>
+            <a:r>
+              <a:rPr sz="1200" dirty="0" err="1">
+                <a:solidFill>
+                  <a:srgbClr val="A6E3A1"/>
+                </a:solidFill>
+                <a:latin typeface="Courier New"/>
+              </a:rPr>
+              <a:t>dump_data.reshape</a:t>
+            </a:r>
+            <a:r>
+              <a:rPr sz="1200" dirty="0">
+                <a:solidFill>
+                  <a:srgbClr val="A6E3A1"/>
+                </a:solidFill>
+                <a:latin typeface="Courier New"/>
+              </a:rPr>
+              <a:t>((GRID_H, GRID_W))</a:t>
+            </a:r>
+          </a:p>
+        </p:txBody>
+      </p:sp>
+      <p:sp>
+        <p:nvSpPr>
+          <p:cNvPr id="8" name="Rectangle 7"/>
           <p:cNvSpPr/>
           <p:nvPr/>
         </p:nvSpPr>
         <p:spPr>
           <a:xfrm>
-            <a:off x="457200" y="2377440"/>
-            <a:ext cx="731520" cy="640080"/>
+            <a:off x="6217920" y="1234440"/>
+            <a:ext cx="5577840" cy="4572000"/>
           </a:xfrm>
           <a:prstGeom prst="rect">
             <a:avLst/>
           </a:prstGeom>
           <a:solidFill>
-            <a:srgbClr val="F38BA8"/>
+            <a:srgbClr val="0D0F18"/>
           </a:solidFill>
-          <a:ln>
-            <a:noFill/>
+          <a:ln w="12700">
+            <a:solidFill>
+              <a:srgbClr val="89B4FA"/>
+            </a:solidFill>
           </a:ln>
         </p:spPr>
         <p:style>
@@ -7107,14 +9498,1051 @@
       </p:sp>
       <p:sp>
         <p:nvSpPr>
+          <p:cNvPr id="9" name="TextBox 8"/>
+          <p:cNvSpPr txBox="1"/>
+          <p:nvPr/>
+        </p:nvSpPr>
+        <p:spPr>
+          <a:xfrm>
+            <a:off x="6355080" y="1280160"/>
+            <a:ext cx="5394959" cy="320040"/>
+          </a:xfrm>
+          <a:prstGeom prst="rect">
+            <a:avLst/>
+          </a:prstGeom>
+          <a:noFill/>
+        </p:spPr>
+        <p:txBody>
+          <a:bodyPr wrap="square">
+            <a:spAutoFit/>
+          </a:bodyPr>
+          <a:lstStyle/>
+          <a:p>
+            <a:pPr algn="l"/>
+            <a:r>
+              <a:rPr sz="1300" b="1">
+                <a:solidFill>
+                  <a:srgbClr val="A6E3A1"/>
+                </a:solidFill>
+              </a:rPr>
+              <a:t>evaluate_zones()  —  Zone 漏亮 / 多亮判斷</a:t>
+            </a:r>
+          </a:p>
+        </p:txBody>
+      </p:sp>
+      <p:sp>
+        <p:nvSpPr>
           <p:cNvPr id="10" name="TextBox 9"/>
           <p:cNvSpPr txBox="1"/>
           <p:nvPr/>
         </p:nvSpPr>
         <p:spPr>
           <a:xfrm>
-            <a:off x="1371600" y="2423160"/>
-            <a:ext cx="1371600" cy="548640"/>
+            <a:off x="6309359" y="1627632"/>
+            <a:ext cx="5394959" cy="4087368"/>
+          </a:xfrm>
+          <a:prstGeom prst="rect">
+            <a:avLst/>
+          </a:prstGeom>
+          <a:noFill/>
+        </p:spPr>
+        <p:txBody>
+          <a:bodyPr wrap="none">
+            <a:spAutoFit/>
+          </a:bodyPr>
+          <a:lstStyle/>
+          <a:p>
+            <a:pPr algn="l">
+              <a:spcBef>
+                <a:spcPts val="0"/>
+              </a:spcBef>
+              <a:spcAft>
+                <a:spcPts val="100"/>
+              </a:spcAft>
+            </a:pPr>
+            <a:r>
+              <a:rPr sz="1200" dirty="0">
+                <a:solidFill>
+                  <a:srgbClr val="A6E3A1"/>
+                </a:solidFill>
+                <a:latin typeface="Courier New"/>
+              </a:rPr>
+              <a:t>for </a:t>
+            </a:r>
+            <a:r>
+              <a:rPr sz="1200" dirty="0" err="1">
+                <a:solidFill>
+                  <a:srgbClr val="A6E3A1"/>
+                </a:solidFill>
+                <a:latin typeface="Courier New"/>
+              </a:rPr>
+              <a:t>case_id</a:t>
+            </a:r>
+            <a:r>
+              <a:rPr sz="1200" dirty="0">
+                <a:solidFill>
+                  <a:srgbClr val="A6E3A1"/>
+                </a:solidFill>
+                <a:latin typeface="Courier New"/>
+              </a:rPr>
+              <a:t> in sorted(</a:t>
+            </a:r>
+            <a:r>
+              <a:rPr sz="1200" dirty="0" err="1">
+                <a:solidFill>
+                  <a:srgbClr val="A6E3A1"/>
+                </a:solidFill>
+                <a:latin typeface="Courier New"/>
+              </a:rPr>
+              <a:t>zones.keys</a:t>
+            </a:r>
+            <a:r>
+              <a:rPr sz="1200" dirty="0">
+                <a:solidFill>
+                  <a:srgbClr val="A6E3A1"/>
+                </a:solidFill>
+                <a:latin typeface="Courier New"/>
+              </a:rPr>
+              <a:t>()):</a:t>
+            </a:r>
+          </a:p>
+          <a:p>
+            <a:pPr algn="l">
+              <a:spcBef>
+                <a:spcPts val="0"/>
+              </a:spcBef>
+              <a:spcAft>
+                <a:spcPts val="100"/>
+              </a:spcAft>
+            </a:pPr>
+            <a:r>
+              <a:rPr sz="1200" dirty="0">
+                <a:solidFill>
+                  <a:srgbClr val="A6E3A1"/>
+                </a:solidFill>
+                <a:latin typeface="Courier New"/>
+              </a:rPr>
+              <a:t>    </a:t>
+            </a:r>
+            <a:r>
+              <a:rPr sz="1200" dirty="0" err="1">
+                <a:solidFill>
+                  <a:srgbClr val="A6E3A1"/>
+                </a:solidFill>
+                <a:latin typeface="Courier New"/>
+              </a:rPr>
+              <a:t>j_s</a:t>
+            </a:r>
+            <a:r>
+              <a:rPr sz="1200" dirty="0">
+                <a:solidFill>
+                  <a:srgbClr val="A6E3A1"/>
+                </a:solidFill>
+                <a:latin typeface="Courier New"/>
+              </a:rPr>
+              <a:t>, </a:t>
+            </a:r>
+            <a:r>
+              <a:rPr sz="1200" dirty="0" err="1">
+                <a:solidFill>
+                  <a:srgbClr val="A6E3A1"/>
+                </a:solidFill>
+                <a:latin typeface="Courier New"/>
+              </a:rPr>
+              <a:t>j_e</a:t>
+            </a:r>
+            <a:r>
+              <a:rPr sz="1200" dirty="0">
+                <a:solidFill>
+                  <a:srgbClr val="A6E3A1"/>
+                </a:solidFill>
+                <a:latin typeface="Courier New"/>
+              </a:rPr>
+              <a:t>, </a:t>
+            </a:r>
+            <a:r>
+              <a:rPr sz="1200" dirty="0" err="1">
+                <a:solidFill>
+                  <a:srgbClr val="A6E3A1"/>
+                </a:solidFill>
+                <a:latin typeface="Courier New"/>
+              </a:rPr>
+              <a:t>i_s</a:t>
+            </a:r>
+            <a:r>
+              <a:rPr sz="1200" dirty="0">
+                <a:solidFill>
+                  <a:srgbClr val="A6E3A1"/>
+                </a:solidFill>
+                <a:latin typeface="Courier New"/>
+              </a:rPr>
+              <a:t>, </a:t>
+            </a:r>
+            <a:r>
+              <a:rPr sz="1200" dirty="0" err="1">
+                <a:solidFill>
+                  <a:srgbClr val="A6E3A1"/>
+                </a:solidFill>
+                <a:latin typeface="Courier New"/>
+              </a:rPr>
+              <a:t>i_e</a:t>
+            </a:r>
+            <a:r>
+              <a:rPr sz="1200" dirty="0">
+                <a:solidFill>
+                  <a:srgbClr val="A6E3A1"/>
+                </a:solidFill>
+                <a:latin typeface="Courier New"/>
+              </a:rPr>
+              <a:t> = zones[</a:t>
+            </a:r>
+            <a:r>
+              <a:rPr sz="1200" dirty="0" err="1">
+                <a:solidFill>
+                  <a:srgbClr val="A6E3A1"/>
+                </a:solidFill>
+                <a:latin typeface="Courier New"/>
+              </a:rPr>
+              <a:t>case_id</a:t>
+            </a:r>
+            <a:r>
+              <a:rPr sz="1200" dirty="0">
+                <a:solidFill>
+                  <a:srgbClr val="A6E3A1"/>
+                </a:solidFill>
+                <a:latin typeface="Courier New"/>
+              </a:rPr>
+              <a:t>]</a:t>
+            </a:r>
+          </a:p>
+          <a:p>
+            <a:pPr algn="l">
+              <a:spcBef>
+                <a:spcPts val="0"/>
+              </a:spcBef>
+              <a:spcAft>
+                <a:spcPts val="100"/>
+              </a:spcAft>
+            </a:pPr>
+            <a:endParaRPr sz="1200" dirty="0">
+              <a:solidFill>
+                <a:srgbClr val="A6E3A1"/>
+              </a:solidFill>
+              <a:latin typeface="Courier New"/>
+            </a:endParaRPr>
+          </a:p>
+          <a:p>
+            <a:pPr algn="l">
+              <a:spcBef>
+                <a:spcPts val="0"/>
+              </a:spcBef>
+              <a:spcAft>
+                <a:spcPts val="100"/>
+              </a:spcAft>
+            </a:pPr>
+            <a:r>
+              <a:rPr sz="1200" dirty="0">
+                <a:solidFill>
+                  <a:srgbClr val="A6E3A1"/>
+                </a:solidFill>
+                <a:latin typeface="Courier New"/>
+              </a:rPr>
+              <a:t>    # </a:t>
+            </a:r>
+            <a:r>
+              <a:rPr sz="1200" dirty="0" err="1">
+                <a:solidFill>
+                  <a:srgbClr val="A6E3A1"/>
+                </a:solidFill>
+                <a:latin typeface="Courier New"/>
+              </a:rPr>
+              <a:t>模擬預期：sim</a:t>
+            </a:r>
+            <a:r>
+              <a:rPr sz="1200" dirty="0">
+                <a:solidFill>
+                  <a:srgbClr val="A6E3A1"/>
+                </a:solidFill>
+                <a:latin typeface="Courier New"/>
+              </a:rPr>
+              <a:t> 在 zone </a:t>
+            </a:r>
+            <a:r>
+              <a:rPr sz="1200" dirty="0" err="1">
+                <a:solidFill>
+                  <a:srgbClr val="A6E3A1"/>
+                </a:solidFill>
+                <a:latin typeface="Courier New"/>
+              </a:rPr>
+              <a:t>範圍有任一亮</a:t>
+            </a:r>
+            <a:r>
+              <a:rPr sz="1200" dirty="0">
+                <a:solidFill>
+                  <a:srgbClr val="A6E3A1"/>
+                </a:solidFill>
+                <a:latin typeface="Courier New"/>
+              </a:rPr>
+              <a:t> block</a:t>
+            </a:r>
+          </a:p>
+          <a:p>
+            <a:pPr algn="l">
+              <a:spcBef>
+                <a:spcPts val="0"/>
+              </a:spcBef>
+              <a:spcAft>
+                <a:spcPts val="100"/>
+              </a:spcAft>
+            </a:pPr>
+            <a:r>
+              <a:rPr sz="1200" dirty="0">
+                <a:solidFill>
+                  <a:srgbClr val="A6E3A1"/>
+                </a:solidFill>
+                <a:latin typeface="Courier New"/>
+              </a:rPr>
+              <a:t>    </a:t>
+            </a:r>
+            <a:r>
+              <a:rPr sz="1200" dirty="0" err="1">
+                <a:solidFill>
+                  <a:srgbClr val="A6E3A1"/>
+                </a:solidFill>
+                <a:latin typeface="Courier New"/>
+              </a:rPr>
+              <a:t>sim_zone</a:t>
+            </a:r>
+            <a:r>
+              <a:rPr sz="1200" dirty="0">
+                <a:solidFill>
+                  <a:srgbClr val="A6E3A1"/>
+                </a:solidFill>
+                <a:latin typeface="Courier New"/>
+              </a:rPr>
+              <a:t>     = </a:t>
+            </a:r>
+            <a:r>
+              <a:rPr sz="1200" dirty="0" err="1">
+                <a:solidFill>
+                  <a:srgbClr val="A6E3A1"/>
+                </a:solidFill>
+                <a:latin typeface="Courier New"/>
+              </a:rPr>
+              <a:t>sim_data</a:t>
+            </a:r>
+            <a:r>
+              <a:rPr sz="1200" dirty="0">
+                <a:solidFill>
+                  <a:srgbClr val="A6E3A1"/>
+                </a:solidFill>
+                <a:latin typeface="Courier New"/>
+              </a:rPr>
+              <a:t>[</a:t>
+            </a:r>
+            <a:r>
+              <a:rPr sz="1200" dirty="0" err="1">
+                <a:solidFill>
+                  <a:srgbClr val="A6E3A1"/>
+                </a:solidFill>
+                <a:latin typeface="Courier New"/>
+              </a:rPr>
+              <a:t>j_s:j_e</a:t>
+            </a:r>
+            <a:r>
+              <a:rPr sz="1200" dirty="0">
+                <a:solidFill>
+                  <a:srgbClr val="A6E3A1"/>
+                </a:solidFill>
+                <a:latin typeface="Courier New"/>
+              </a:rPr>
+              <a:t>, </a:t>
+            </a:r>
+            <a:r>
+              <a:rPr sz="1200" dirty="0" err="1">
+                <a:solidFill>
+                  <a:srgbClr val="A6E3A1"/>
+                </a:solidFill>
+                <a:latin typeface="Courier New"/>
+              </a:rPr>
+              <a:t>i_s:i_e</a:t>
+            </a:r>
+            <a:r>
+              <a:rPr sz="1200" dirty="0">
+                <a:solidFill>
+                  <a:srgbClr val="A6E3A1"/>
+                </a:solidFill>
+                <a:latin typeface="Courier New"/>
+              </a:rPr>
+              <a:t>]</a:t>
+            </a:r>
+          </a:p>
+          <a:p>
+            <a:pPr algn="l">
+              <a:spcBef>
+                <a:spcPts val="0"/>
+              </a:spcBef>
+              <a:spcAft>
+                <a:spcPts val="100"/>
+              </a:spcAft>
+            </a:pPr>
+            <a:r>
+              <a:rPr sz="1200" dirty="0">
+                <a:solidFill>
+                  <a:srgbClr val="A6E3A1"/>
+                </a:solidFill>
+                <a:latin typeface="Courier New"/>
+              </a:rPr>
+              <a:t>    </a:t>
+            </a:r>
+            <a:r>
+              <a:rPr sz="1200" dirty="0" err="1">
+                <a:solidFill>
+                  <a:srgbClr val="A6E3A1"/>
+                </a:solidFill>
+                <a:latin typeface="Courier New"/>
+              </a:rPr>
+              <a:t>expected_on</a:t>
+            </a:r>
+            <a:r>
+              <a:rPr sz="1200" dirty="0">
+                <a:solidFill>
+                  <a:srgbClr val="A6E3A1"/>
+                </a:solidFill>
+                <a:latin typeface="Courier New"/>
+              </a:rPr>
+              <a:t>  = </a:t>
+            </a:r>
+            <a:r>
+              <a:rPr sz="1200" dirty="0" err="1">
+                <a:solidFill>
+                  <a:srgbClr val="A6E3A1"/>
+                </a:solidFill>
+                <a:latin typeface="Courier New"/>
+              </a:rPr>
+              <a:t>bool</a:t>
+            </a:r>
+            <a:r>
+              <a:rPr sz="1200" dirty="0">
+                <a:solidFill>
+                  <a:srgbClr val="A6E3A1"/>
+                </a:solidFill>
+                <a:latin typeface="Courier New"/>
+              </a:rPr>
+              <a:t>(</a:t>
+            </a:r>
+            <a:r>
+              <a:rPr sz="1200" dirty="0" err="1">
+                <a:solidFill>
+                  <a:srgbClr val="A6E3A1"/>
+                </a:solidFill>
+                <a:latin typeface="Courier New"/>
+              </a:rPr>
+              <a:t>np.any</a:t>
+            </a:r>
+            <a:r>
+              <a:rPr sz="1200" dirty="0">
+                <a:solidFill>
+                  <a:srgbClr val="A6E3A1"/>
+                </a:solidFill>
+                <a:latin typeface="Courier New"/>
+              </a:rPr>
+              <a:t>(</a:t>
+            </a:r>
+            <a:r>
+              <a:rPr sz="1200" dirty="0" err="1">
+                <a:solidFill>
+                  <a:srgbClr val="A6E3A1"/>
+                </a:solidFill>
+                <a:latin typeface="Courier New"/>
+              </a:rPr>
+              <a:t>sim_zone</a:t>
+            </a:r>
+            <a:r>
+              <a:rPr sz="1200" dirty="0">
+                <a:solidFill>
+                  <a:srgbClr val="A6E3A1"/>
+                </a:solidFill>
+                <a:latin typeface="Courier New"/>
+              </a:rPr>
+              <a:t> &gt; 0))</a:t>
+            </a:r>
+          </a:p>
+          <a:p>
+            <a:pPr algn="l">
+              <a:spcBef>
+                <a:spcPts val="0"/>
+              </a:spcBef>
+              <a:spcAft>
+                <a:spcPts val="100"/>
+              </a:spcAft>
+            </a:pPr>
+            <a:endParaRPr sz="1200" dirty="0">
+              <a:solidFill>
+                <a:srgbClr val="A6E3A1"/>
+              </a:solidFill>
+              <a:latin typeface="Courier New"/>
+            </a:endParaRPr>
+          </a:p>
+          <a:p>
+            <a:pPr algn="l">
+              <a:spcBef>
+                <a:spcPts val="0"/>
+              </a:spcBef>
+              <a:spcAft>
+                <a:spcPts val="100"/>
+              </a:spcAft>
+            </a:pPr>
+            <a:r>
+              <a:rPr sz="1200" dirty="0">
+                <a:solidFill>
+                  <a:srgbClr val="A6E3A1"/>
+                </a:solidFill>
+                <a:latin typeface="Courier New"/>
+              </a:rPr>
+              <a:t>    # </a:t>
+            </a:r>
+            <a:r>
+              <a:rPr sz="1200" dirty="0" err="1">
+                <a:solidFill>
+                  <a:srgbClr val="A6E3A1"/>
+                </a:solidFill>
+                <a:latin typeface="Courier New"/>
+              </a:rPr>
+              <a:t>硬體實際：dump</a:t>
+            </a:r>
+            <a:r>
+              <a:rPr sz="1200" dirty="0">
+                <a:solidFill>
+                  <a:srgbClr val="A6E3A1"/>
+                </a:solidFill>
+                <a:latin typeface="Courier New"/>
+              </a:rPr>
+              <a:t> 在 zone </a:t>
+            </a:r>
+            <a:r>
+              <a:rPr sz="1200" dirty="0" err="1">
+                <a:solidFill>
+                  <a:srgbClr val="A6E3A1"/>
+                </a:solidFill>
+                <a:latin typeface="Courier New"/>
+              </a:rPr>
+              <a:t>範圍有任一非零</a:t>
+            </a:r>
+            <a:r>
+              <a:rPr sz="1200" dirty="0">
+                <a:solidFill>
+                  <a:srgbClr val="A6E3A1"/>
+                </a:solidFill>
+                <a:latin typeface="Courier New"/>
+              </a:rPr>
+              <a:t> block</a:t>
+            </a:r>
+          </a:p>
+          <a:p>
+            <a:pPr algn="l">
+              <a:spcBef>
+                <a:spcPts val="0"/>
+              </a:spcBef>
+              <a:spcAft>
+                <a:spcPts val="100"/>
+              </a:spcAft>
+            </a:pPr>
+            <a:r>
+              <a:rPr sz="1200" dirty="0">
+                <a:solidFill>
+                  <a:srgbClr val="A6E3A1"/>
+                </a:solidFill>
+                <a:latin typeface="Courier New"/>
+              </a:rPr>
+              <a:t>    </a:t>
+            </a:r>
+            <a:r>
+              <a:rPr sz="1200" dirty="0" err="1">
+                <a:solidFill>
+                  <a:srgbClr val="A6E3A1"/>
+                </a:solidFill>
+                <a:latin typeface="Courier New"/>
+              </a:rPr>
+              <a:t>dump_zone</a:t>
+            </a:r>
+            <a:r>
+              <a:rPr sz="1200" dirty="0">
+                <a:solidFill>
+                  <a:srgbClr val="A6E3A1"/>
+                </a:solidFill>
+                <a:latin typeface="Courier New"/>
+              </a:rPr>
+              <a:t>    = </a:t>
+            </a:r>
+            <a:r>
+              <a:rPr sz="1200" dirty="0" err="1">
+                <a:solidFill>
+                  <a:srgbClr val="A6E3A1"/>
+                </a:solidFill>
+                <a:latin typeface="Courier New"/>
+              </a:rPr>
+              <a:t>dump_data</a:t>
+            </a:r>
+            <a:r>
+              <a:rPr sz="1200" dirty="0">
+                <a:solidFill>
+                  <a:srgbClr val="A6E3A1"/>
+                </a:solidFill>
+                <a:latin typeface="Courier New"/>
+              </a:rPr>
+              <a:t>[</a:t>
+            </a:r>
+            <a:r>
+              <a:rPr sz="1200" dirty="0" err="1">
+                <a:solidFill>
+                  <a:srgbClr val="A6E3A1"/>
+                </a:solidFill>
+                <a:latin typeface="Courier New"/>
+              </a:rPr>
+              <a:t>j_s:j_e</a:t>
+            </a:r>
+            <a:r>
+              <a:rPr sz="1200" dirty="0">
+                <a:solidFill>
+                  <a:srgbClr val="A6E3A1"/>
+                </a:solidFill>
+                <a:latin typeface="Courier New"/>
+              </a:rPr>
+              <a:t>, </a:t>
+            </a:r>
+            <a:r>
+              <a:rPr sz="1200" dirty="0" err="1">
+                <a:solidFill>
+                  <a:srgbClr val="A6E3A1"/>
+                </a:solidFill>
+                <a:latin typeface="Courier New"/>
+              </a:rPr>
+              <a:t>i_s:i_e</a:t>
+            </a:r>
+            <a:r>
+              <a:rPr sz="1200" dirty="0">
+                <a:solidFill>
+                  <a:srgbClr val="A6E3A1"/>
+                </a:solidFill>
+                <a:latin typeface="Courier New"/>
+              </a:rPr>
+              <a:t>]</a:t>
+            </a:r>
+          </a:p>
+          <a:p>
+            <a:pPr algn="l">
+              <a:spcBef>
+                <a:spcPts val="0"/>
+              </a:spcBef>
+              <a:spcAft>
+                <a:spcPts val="100"/>
+              </a:spcAft>
+            </a:pPr>
+            <a:r>
+              <a:rPr sz="1200" dirty="0">
+                <a:solidFill>
+                  <a:srgbClr val="A6E3A1"/>
+                </a:solidFill>
+                <a:latin typeface="Courier New"/>
+              </a:rPr>
+              <a:t>    </a:t>
+            </a:r>
+            <a:r>
+              <a:rPr sz="1200" dirty="0" err="1">
+                <a:solidFill>
+                  <a:srgbClr val="A6E3A1"/>
+                </a:solidFill>
+                <a:latin typeface="Courier New"/>
+              </a:rPr>
+              <a:t>actual_on</a:t>
+            </a:r>
+            <a:r>
+              <a:rPr sz="1200" dirty="0">
+                <a:solidFill>
+                  <a:srgbClr val="A6E3A1"/>
+                </a:solidFill>
+                <a:latin typeface="Courier New"/>
+              </a:rPr>
+              <a:t>    = </a:t>
+            </a:r>
+            <a:r>
+              <a:rPr sz="1200" dirty="0" err="1">
+                <a:solidFill>
+                  <a:srgbClr val="A6E3A1"/>
+                </a:solidFill>
+                <a:latin typeface="Courier New"/>
+              </a:rPr>
+              <a:t>bool</a:t>
+            </a:r>
+            <a:r>
+              <a:rPr sz="1200" dirty="0">
+                <a:solidFill>
+                  <a:srgbClr val="A6E3A1"/>
+                </a:solidFill>
+                <a:latin typeface="Courier New"/>
+              </a:rPr>
+              <a:t>(</a:t>
+            </a:r>
+            <a:r>
+              <a:rPr sz="1200" dirty="0" err="1">
+                <a:solidFill>
+                  <a:srgbClr val="A6E3A1"/>
+                </a:solidFill>
+                <a:latin typeface="Courier New"/>
+              </a:rPr>
+              <a:t>np.any</a:t>
+            </a:r>
+            <a:r>
+              <a:rPr sz="1200" dirty="0">
+                <a:solidFill>
+                  <a:srgbClr val="A6E3A1"/>
+                </a:solidFill>
+                <a:latin typeface="Courier New"/>
+              </a:rPr>
+              <a:t>(</a:t>
+            </a:r>
+            <a:r>
+              <a:rPr sz="1200" dirty="0" err="1">
+                <a:solidFill>
+                  <a:srgbClr val="A6E3A1"/>
+                </a:solidFill>
+                <a:latin typeface="Courier New"/>
+              </a:rPr>
+              <a:t>dump_zone</a:t>
+            </a:r>
+            <a:r>
+              <a:rPr sz="1200" dirty="0">
+                <a:solidFill>
+                  <a:srgbClr val="A6E3A1"/>
+                </a:solidFill>
+                <a:latin typeface="Courier New"/>
+              </a:rPr>
+              <a:t> &gt; 0))</a:t>
+            </a:r>
+          </a:p>
+          <a:p>
+            <a:pPr algn="l">
+              <a:spcBef>
+                <a:spcPts val="0"/>
+              </a:spcBef>
+              <a:spcAft>
+                <a:spcPts val="100"/>
+              </a:spcAft>
+            </a:pPr>
+            <a:endParaRPr sz="1200" dirty="0">
+              <a:solidFill>
+                <a:srgbClr val="A6E3A1"/>
+              </a:solidFill>
+              <a:latin typeface="Courier New"/>
+            </a:endParaRPr>
+          </a:p>
+          <a:p>
+            <a:pPr algn="l">
+              <a:spcBef>
+                <a:spcPts val="0"/>
+              </a:spcBef>
+              <a:spcAft>
+                <a:spcPts val="100"/>
+              </a:spcAft>
+            </a:pPr>
+            <a:r>
+              <a:rPr sz="1200" dirty="0">
+                <a:solidFill>
+                  <a:srgbClr val="A6E3A1"/>
+                </a:solidFill>
+                <a:latin typeface="Courier New"/>
+              </a:rPr>
+              <a:t>    if </a:t>
+            </a:r>
+            <a:r>
+              <a:rPr sz="1200" dirty="0" err="1">
+                <a:solidFill>
+                  <a:srgbClr val="A6E3A1"/>
+                </a:solidFill>
+                <a:latin typeface="Courier New"/>
+              </a:rPr>
+              <a:t>expected_on</a:t>
+            </a:r>
+            <a:r>
+              <a:rPr sz="1200" dirty="0">
+                <a:solidFill>
+                  <a:srgbClr val="A6E3A1"/>
+                </a:solidFill>
+                <a:latin typeface="Courier New"/>
+              </a:rPr>
+              <a:t> and not </a:t>
+            </a:r>
+            <a:r>
+              <a:rPr sz="1200" dirty="0" err="1">
+                <a:solidFill>
+                  <a:srgbClr val="A6E3A1"/>
+                </a:solidFill>
+                <a:latin typeface="Courier New"/>
+              </a:rPr>
+              <a:t>actual_on</a:t>
+            </a:r>
+            <a:r>
+              <a:rPr sz="1200" dirty="0">
+                <a:solidFill>
+                  <a:srgbClr val="A6E3A1"/>
+                </a:solidFill>
+                <a:latin typeface="Courier New"/>
+              </a:rPr>
+              <a:t>:</a:t>
+            </a:r>
+          </a:p>
+          <a:p>
+            <a:pPr algn="l">
+              <a:spcBef>
+                <a:spcPts val="0"/>
+              </a:spcBef>
+              <a:spcAft>
+                <a:spcPts val="100"/>
+              </a:spcAft>
+            </a:pPr>
+            <a:r>
+              <a:rPr sz="1200" dirty="0">
+                <a:solidFill>
+                  <a:srgbClr val="A6E3A1"/>
+                </a:solidFill>
+                <a:latin typeface="Courier New"/>
+              </a:rPr>
+              <a:t>        </a:t>
+            </a:r>
+            <a:r>
+              <a:rPr sz="1200" dirty="0" err="1">
+                <a:solidFill>
+                  <a:srgbClr val="A6E3A1"/>
+                </a:solidFill>
+                <a:latin typeface="Courier New"/>
+              </a:rPr>
+              <a:t>error_type</a:t>
+            </a:r>
+            <a:r>
+              <a:rPr sz="1200" dirty="0">
+                <a:solidFill>
+                  <a:srgbClr val="A6E3A1"/>
+                </a:solidFill>
+                <a:latin typeface="Courier New"/>
+              </a:rPr>
+              <a:t> = '</a:t>
+            </a:r>
+            <a:r>
+              <a:rPr sz="1200" dirty="0" err="1">
+                <a:solidFill>
+                  <a:srgbClr val="A6E3A1"/>
+                </a:solidFill>
+                <a:latin typeface="Courier New"/>
+              </a:rPr>
+              <a:t>漏亮</a:t>
+            </a:r>
+            <a:r>
+              <a:rPr sz="1200" dirty="0">
+                <a:solidFill>
+                  <a:srgbClr val="A6E3A1"/>
+                </a:solidFill>
+                <a:latin typeface="Courier New"/>
+              </a:rPr>
+              <a:t>'   # ERROR</a:t>
+            </a:r>
+          </a:p>
+          <a:p>
+            <a:pPr algn="l">
+              <a:spcBef>
+                <a:spcPts val="0"/>
+              </a:spcBef>
+              <a:spcAft>
+                <a:spcPts val="100"/>
+              </a:spcAft>
+            </a:pPr>
+            <a:r>
+              <a:rPr sz="1200" dirty="0">
+                <a:solidFill>
+                  <a:srgbClr val="A6E3A1"/>
+                </a:solidFill>
+                <a:latin typeface="Courier New"/>
+              </a:rPr>
+              <a:t>    </a:t>
+            </a:r>
+            <a:r>
+              <a:rPr sz="1200" dirty="0" err="1">
+                <a:solidFill>
+                  <a:srgbClr val="A6E3A1"/>
+                </a:solidFill>
+                <a:latin typeface="Courier New"/>
+              </a:rPr>
+              <a:t>elif</a:t>
+            </a:r>
+            <a:r>
+              <a:rPr sz="1200" dirty="0">
+                <a:solidFill>
+                  <a:srgbClr val="A6E3A1"/>
+                </a:solidFill>
+                <a:latin typeface="Courier New"/>
+              </a:rPr>
+              <a:t> not </a:t>
+            </a:r>
+            <a:r>
+              <a:rPr sz="1200" dirty="0" err="1">
+                <a:solidFill>
+                  <a:srgbClr val="A6E3A1"/>
+                </a:solidFill>
+                <a:latin typeface="Courier New"/>
+              </a:rPr>
+              <a:t>expected_on</a:t>
+            </a:r>
+            <a:r>
+              <a:rPr sz="1200" dirty="0">
+                <a:solidFill>
+                  <a:srgbClr val="A6E3A1"/>
+                </a:solidFill>
+                <a:latin typeface="Courier New"/>
+              </a:rPr>
+              <a:t> and </a:t>
+            </a:r>
+            <a:r>
+              <a:rPr sz="1200" dirty="0" err="1">
+                <a:solidFill>
+                  <a:srgbClr val="A6E3A1"/>
+                </a:solidFill>
+                <a:latin typeface="Courier New"/>
+              </a:rPr>
+              <a:t>actual_on</a:t>
+            </a:r>
+            <a:r>
+              <a:rPr sz="1200" dirty="0">
+                <a:solidFill>
+                  <a:srgbClr val="A6E3A1"/>
+                </a:solidFill>
+                <a:latin typeface="Courier New"/>
+              </a:rPr>
+              <a:t>:</a:t>
+            </a:r>
+          </a:p>
+          <a:p>
+            <a:pPr algn="l">
+              <a:spcBef>
+                <a:spcPts val="0"/>
+              </a:spcBef>
+              <a:spcAft>
+                <a:spcPts val="100"/>
+              </a:spcAft>
+            </a:pPr>
+            <a:r>
+              <a:rPr sz="1200" dirty="0">
+                <a:solidFill>
+                  <a:srgbClr val="A6E3A1"/>
+                </a:solidFill>
+                <a:latin typeface="Courier New"/>
+              </a:rPr>
+              <a:t>        </a:t>
+            </a:r>
+            <a:r>
+              <a:rPr sz="1200" dirty="0" err="1">
+                <a:solidFill>
+                  <a:srgbClr val="A6E3A1"/>
+                </a:solidFill>
+                <a:latin typeface="Courier New"/>
+              </a:rPr>
+              <a:t>error_type</a:t>
+            </a:r>
+            <a:r>
+              <a:rPr sz="1200" dirty="0">
+                <a:solidFill>
+                  <a:srgbClr val="A6E3A1"/>
+                </a:solidFill>
+                <a:latin typeface="Courier New"/>
+              </a:rPr>
+              <a:t> = '</a:t>
+            </a:r>
+            <a:r>
+              <a:rPr sz="1200" dirty="0" err="1">
+                <a:solidFill>
+                  <a:srgbClr val="A6E3A1"/>
+                </a:solidFill>
+                <a:latin typeface="Courier New"/>
+              </a:rPr>
+              <a:t>多亮</a:t>
+            </a:r>
+            <a:r>
+              <a:rPr sz="1200" dirty="0">
+                <a:solidFill>
+                  <a:srgbClr val="A6E3A1"/>
+                </a:solidFill>
+                <a:latin typeface="Courier New"/>
+              </a:rPr>
+              <a:t>'   # ERROR</a:t>
+            </a:r>
+          </a:p>
+          <a:p>
+            <a:pPr algn="l">
+              <a:spcBef>
+                <a:spcPts val="0"/>
+              </a:spcBef>
+              <a:spcAft>
+                <a:spcPts val="100"/>
+              </a:spcAft>
+            </a:pPr>
+            <a:r>
+              <a:rPr sz="1200" dirty="0">
+                <a:solidFill>
+                  <a:srgbClr val="A6E3A1"/>
+                </a:solidFill>
+                <a:latin typeface="Courier New"/>
+              </a:rPr>
+              <a:t>    else:</a:t>
+            </a:r>
+          </a:p>
+          <a:p>
+            <a:pPr algn="l">
+              <a:spcBef>
+                <a:spcPts val="0"/>
+              </a:spcBef>
+              <a:spcAft>
+                <a:spcPts val="100"/>
+              </a:spcAft>
+            </a:pPr>
+            <a:r>
+              <a:rPr sz="1200" dirty="0">
+                <a:solidFill>
+                  <a:srgbClr val="A6E3A1"/>
+                </a:solidFill>
+                <a:latin typeface="Courier New"/>
+              </a:rPr>
+              <a:t>        </a:t>
+            </a:r>
+            <a:r>
+              <a:rPr sz="1200" dirty="0" err="1">
+                <a:solidFill>
+                  <a:srgbClr val="A6E3A1"/>
+                </a:solidFill>
+                <a:latin typeface="Courier New"/>
+              </a:rPr>
+              <a:t>error_type</a:t>
+            </a:r>
+            <a:r>
+              <a:rPr sz="1200" dirty="0">
+                <a:solidFill>
+                  <a:srgbClr val="A6E3A1"/>
+                </a:solidFill>
+                <a:latin typeface="Courier New"/>
+              </a:rPr>
+              <a:t> = None     # OK</a:t>
+            </a:r>
+          </a:p>
+        </p:txBody>
+      </p:sp>
+      <p:sp>
+        <p:nvSpPr>
+          <p:cNvPr id="11" name="TextBox 10"/>
+          <p:cNvSpPr txBox="1"/>
+          <p:nvPr/>
+        </p:nvSpPr>
+        <p:spPr>
+          <a:xfrm>
+            <a:off x="457200" y="5989320"/>
+            <a:ext cx="11247120" cy="457200"/>
           </a:xfrm>
           <a:prstGeom prst="rect">
             <a:avLst/>
@@ -7127,408 +10555,14 @@
           </a:bodyPr>
           <a:lstStyle/>
           <a:p>
-            <a:pPr algn="l"/>
-            <a:r>
-              <a:rPr sz="1800" b="1">
-                <a:solidFill>
-                  <a:srgbClr val="F38BA8"/>
-                </a:solidFill>
-              </a:rPr>
-              <a:t>紅色</a:t>
-            </a:r>
-          </a:p>
-        </p:txBody>
-      </p:sp>
-      <p:sp>
-        <p:nvSpPr>
-          <p:cNvPr id="11" name="TextBox 10"/>
-          <p:cNvSpPr txBox="1"/>
-          <p:nvPr/>
-        </p:nvSpPr>
-        <p:spPr>
-          <a:xfrm>
-            <a:off x="2834640" y="2423160"/>
-            <a:ext cx="4114800" cy="548640"/>
-          </a:xfrm>
-          <a:prstGeom prst="rect">
-            <a:avLst/>
-          </a:prstGeom>
-          <a:noFill/>
-        </p:spPr>
-        <p:txBody>
-          <a:bodyPr wrap="square">
-            <a:spAutoFit/>
-          </a:bodyPr>
-          <a:lstStyle/>
-          <a:p>
-            <a:pPr algn="l"/>
-            <a:r>
-              <a:rPr sz="1600" b="0">
-                <a:solidFill>
-                  <a:srgbClr val="BAC2D8"/>
-                </a:solidFill>
-              </a:rPr>
-              <a:t>漏亮 (sim ON, dump OFF)</a:t>
-            </a:r>
-          </a:p>
-        </p:txBody>
-      </p:sp>
-      <p:sp>
-        <p:nvSpPr>
-          <p:cNvPr id="12" name="TextBox 11"/>
-          <p:cNvSpPr txBox="1"/>
-          <p:nvPr/>
-        </p:nvSpPr>
-        <p:spPr>
-          <a:xfrm>
-            <a:off x="7132320" y="2423160"/>
-            <a:ext cx="4572000" cy="548640"/>
-          </a:xfrm>
-          <a:prstGeom prst="rect">
-            <a:avLst/>
-          </a:prstGeom>
-          <a:noFill/>
-        </p:spPr>
-        <p:txBody>
-          <a:bodyPr wrap="square">
-            <a:spAutoFit/>
-          </a:bodyPr>
-          <a:lstStyle/>
-          <a:p>
-            <a:pPr algn="l"/>
-            <a:r>
-              <a:rPr sz="1600" b="0">
-                <a:solidFill>
-                  <a:srgbClr val="FFFFFF"/>
-                </a:solidFill>
-              </a:rPr>
-              <a:t>韌體未點亮但應該要亮</a:t>
-            </a:r>
-          </a:p>
-        </p:txBody>
-      </p:sp>
-      <p:sp>
-        <p:nvSpPr>
-          <p:cNvPr id="13" name="Rectangle 12"/>
-          <p:cNvSpPr/>
-          <p:nvPr/>
-        </p:nvSpPr>
-        <p:spPr>
-          <a:xfrm>
-            <a:off x="457200" y="3383280"/>
-            <a:ext cx="731520" cy="640080"/>
-          </a:xfrm>
-          <a:prstGeom prst="rect">
-            <a:avLst/>
-          </a:prstGeom>
-          <a:solidFill>
-            <a:srgbClr val="89B4FA"/>
-          </a:solidFill>
-          <a:ln>
-            <a:noFill/>
-          </a:ln>
-        </p:spPr>
-        <p:style>
-          <a:lnRef idx="1">
-            <a:schemeClr val="accent1"/>
-          </a:lnRef>
-          <a:fillRef idx="3">
-            <a:schemeClr val="accent1"/>
-          </a:fillRef>
-          <a:effectRef idx="2">
-            <a:schemeClr val="accent1"/>
-          </a:effectRef>
-          <a:fontRef idx="minor">
-            <a:schemeClr val="lt1"/>
-          </a:fontRef>
-        </p:style>
-        <p:txBody>
-          <a:bodyPr rtlCol="0" anchor="ctr"/>
-          <a:lstStyle/>
-          <a:p>
             <a:pPr algn="ctr"/>
-            <a:endParaRPr/>
-          </a:p>
-        </p:txBody>
-      </p:sp>
-      <p:sp>
-        <p:nvSpPr>
-          <p:cNvPr id="14" name="TextBox 13"/>
-          <p:cNvSpPr txBox="1"/>
-          <p:nvPr/>
-        </p:nvSpPr>
-        <p:spPr>
-          <a:xfrm>
-            <a:off x="1371600" y="3429000"/>
-            <a:ext cx="1371600" cy="548640"/>
-          </a:xfrm>
-          <a:prstGeom prst="rect">
-            <a:avLst/>
-          </a:prstGeom>
-          <a:noFill/>
-        </p:spPr>
-        <p:txBody>
-          <a:bodyPr wrap="square">
-            <a:spAutoFit/>
-          </a:bodyPr>
-          <a:lstStyle/>
-          <a:p>
-            <a:pPr algn="l"/>
-            <a:r>
-              <a:rPr sz="1800" b="1">
-                <a:solidFill>
-                  <a:srgbClr val="89B4FA"/>
-                </a:solidFill>
-              </a:rPr>
-              <a:t>藍色</a:t>
-            </a:r>
-          </a:p>
-        </p:txBody>
-      </p:sp>
-      <p:sp>
-        <p:nvSpPr>
-          <p:cNvPr id="15" name="TextBox 14"/>
-          <p:cNvSpPr txBox="1"/>
-          <p:nvPr/>
-        </p:nvSpPr>
-        <p:spPr>
-          <a:xfrm>
-            <a:off x="2834640" y="3429000"/>
-            <a:ext cx="4114800" cy="548640"/>
-          </a:xfrm>
-          <a:prstGeom prst="rect">
-            <a:avLst/>
-          </a:prstGeom>
-          <a:noFill/>
-        </p:spPr>
-        <p:txBody>
-          <a:bodyPr wrap="square">
-            <a:spAutoFit/>
-          </a:bodyPr>
-          <a:lstStyle/>
-          <a:p>
-            <a:pPr algn="l"/>
-            <a:r>
-              <a:rPr sz="1600" b="0">
-                <a:solidFill>
-                  <a:srgbClr val="BAC2D8"/>
-                </a:solidFill>
-              </a:rPr>
-              <a:t>多亮 (sim OFF, dump ON)</a:t>
-            </a:r>
-          </a:p>
-        </p:txBody>
-      </p:sp>
-      <p:sp>
-        <p:nvSpPr>
-          <p:cNvPr id="16" name="TextBox 15"/>
-          <p:cNvSpPr txBox="1"/>
-          <p:nvPr/>
-        </p:nvSpPr>
-        <p:spPr>
-          <a:xfrm>
-            <a:off x="7132320" y="3429000"/>
-            <a:ext cx="4572000" cy="548640"/>
-          </a:xfrm>
-          <a:prstGeom prst="rect">
-            <a:avLst/>
-          </a:prstGeom>
-          <a:noFill/>
-        </p:spPr>
-        <p:txBody>
-          <a:bodyPr wrap="square">
-            <a:spAutoFit/>
-          </a:bodyPr>
-          <a:lstStyle/>
-          <a:p>
-            <a:pPr algn="l"/>
-            <a:r>
-              <a:rPr sz="1600" b="0">
-                <a:solidFill>
-                  <a:srgbClr val="FFFFFF"/>
-                </a:solidFill>
-              </a:rPr>
-              <a:t>韌體多點亮，不應該亮</a:t>
-            </a:r>
-          </a:p>
-        </p:txBody>
-      </p:sp>
-      <p:sp>
-        <p:nvSpPr>
-          <p:cNvPr id="17" name="Rectangle 16"/>
-          <p:cNvSpPr/>
-          <p:nvPr/>
-        </p:nvSpPr>
-        <p:spPr>
-          <a:xfrm>
-            <a:off x="457200" y="4389120"/>
-            <a:ext cx="731520" cy="640080"/>
-          </a:xfrm>
-          <a:prstGeom prst="rect">
-            <a:avLst/>
-          </a:prstGeom>
-          <a:solidFill>
-            <a:srgbClr val="BAC2D8"/>
-          </a:solidFill>
-          <a:ln>
-            <a:noFill/>
-          </a:ln>
-        </p:spPr>
-        <p:style>
-          <a:lnRef idx="1">
-            <a:schemeClr val="accent1"/>
-          </a:lnRef>
-          <a:fillRef idx="3">
-            <a:schemeClr val="accent1"/>
-          </a:fillRef>
-          <a:effectRef idx="2">
-            <a:schemeClr val="accent1"/>
-          </a:effectRef>
-          <a:fontRef idx="minor">
-            <a:schemeClr val="lt1"/>
-          </a:fontRef>
-        </p:style>
-        <p:txBody>
-          <a:bodyPr rtlCol="0" anchor="ctr"/>
-          <a:lstStyle/>
-          <a:p>
-            <a:pPr algn="ctr"/>
-            <a:endParaRPr/>
-          </a:p>
-        </p:txBody>
-      </p:sp>
-      <p:sp>
-        <p:nvSpPr>
-          <p:cNvPr id="18" name="TextBox 17"/>
-          <p:cNvSpPr txBox="1"/>
-          <p:nvPr/>
-        </p:nvSpPr>
-        <p:spPr>
-          <a:xfrm>
-            <a:off x="1371600" y="4434840"/>
-            <a:ext cx="1371600" cy="548640"/>
-          </a:xfrm>
-          <a:prstGeom prst="rect">
-            <a:avLst/>
-          </a:prstGeom>
-          <a:noFill/>
-        </p:spPr>
-        <p:txBody>
-          <a:bodyPr wrap="square">
-            <a:spAutoFit/>
-          </a:bodyPr>
-          <a:lstStyle/>
-          <a:p>
-            <a:pPr algn="l"/>
-            <a:r>
-              <a:rPr sz="1800" b="1">
-                <a:solidFill>
-                  <a:srgbClr val="BAC2D8"/>
-                </a:solidFill>
-              </a:rPr>
-              <a:t>黑色</a:t>
-            </a:r>
-          </a:p>
-        </p:txBody>
-      </p:sp>
-      <p:sp>
-        <p:nvSpPr>
-          <p:cNvPr id="19" name="TextBox 18"/>
-          <p:cNvSpPr txBox="1"/>
-          <p:nvPr/>
-        </p:nvSpPr>
-        <p:spPr>
-          <a:xfrm>
-            <a:off x="2834640" y="4434840"/>
-            <a:ext cx="4114800" cy="548640"/>
-          </a:xfrm>
-          <a:prstGeom prst="rect">
-            <a:avLst/>
-          </a:prstGeom>
-          <a:noFill/>
-        </p:spPr>
-        <p:txBody>
-          <a:bodyPr wrap="square">
-            <a:spAutoFit/>
-          </a:bodyPr>
-          <a:lstStyle/>
-          <a:p>
-            <a:pPr algn="l"/>
-            <a:r>
-              <a:rPr sz="1600" b="0">
-                <a:solidFill>
-                  <a:srgbClr val="BAC2D8"/>
-                </a:solidFill>
-              </a:rPr>
-              <a:t>兩者皆滅 (Both OFF)</a:t>
-            </a:r>
-          </a:p>
-        </p:txBody>
-      </p:sp>
-      <p:sp>
-        <p:nvSpPr>
-          <p:cNvPr id="20" name="TextBox 19"/>
-          <p:cNvSpPr txBox="1"/>
-          <p:nvPr/>
-        </p:nvSpPr>
-        <p:spPr>
-          <a:xfrm>
-            <a:off x="7132320" y="4434840"/>
-            <a:ext cx="4572000" cy="548640"/>
-          </a:xfrm>
-          <a:prstGeom prst="rect">
-            <a:avLst/>
-          </a:prstGeom>
-          <a:noFill/>
-        </p:spPr>
-        <p:txBody>
-          <a:bodyPr wrap="square">
-            <a:spAutoFit/>
-          </a:bodyPr>
-          <a:lstStyle/>
-          <a:p>
-            <a:pPr algn="l"/>
-            <a:r>
-              <a:rPr sz="1600" b="0">
-                <a:solidFill>
-                  <a:srgbClr val="FFFFFF"/>
-                </a:solidFill>
-              </a:rPr>
-              <a:t>正常熄滅，背景</a:t>
-            </a:r>
-          </a:p>
-        </p:txBody>
-      </p:sp>
-      <p:sp>
-        <p:nvSpPr>
-          <p:cNvPr id="21" name="TextBox 20"/>
-          <p:cNvSpPr txBox="1"/>
-          <p:nvPr/>
-        </p:nvSpPr>
-        <p:spPr>
-          <a:xfrm>
-            <a:off x="457200" y="5486400"/>
-            <a:ext cx="11247120" cy="457200"/>
-          </a:xfrm>
-          <a:prstGeom prst="rect">
-            <a:avLst/>
-          </a:prstGeom>
-          <a:noFill/>
-        </p:spPr>
-        <p:txBody>
-          <a:bodyPr wrap="square">
-            <a:spAutoFit/>
-          </a:bodyPr>
-          <a:lstStyle/>
-          <a:p>
-            <a:pPr algn="ctr"/>
-            <a:r>
-              <a:rPr sz="1500" b="0">
-                <a:solidFill>
-                  <a:srgbClr val="BAC2D8"/>
-                </a:solidFill>
-              </a:rPr>
-              <a:t>輸出尺寸：1280×640（與輸入影像相同），含圖例文字說明</a:t>
+            <a:r>
+              <a:rPr sz="1500" b="1">
+                <a:solidFill>
+                  <a:srgbClr val="F9E2AF"/>
+                </a:solidFill>
+              </a:rPr>
+              <a:t>兩種 Dump 格式無需手動切換；Zone 判斷以 np.any() 一行完成</a:t>
             </a:r>
           </a:p>
         </p:txBody>
@@ -7538,6 +10572,13 @@
   <p:clrMapOvr>
     <a:masterClrMapping/>
   </p:clrMapOvr>
+  <p:timing>
+    <p:tnLst>
+      <p:par>
+        <p:cTn id="1" dur="indefinite" restart="never" nodeType="tmRoot"/>
+      </p:par>
+    </p:tnLst>
+  </p:timing>
 </p:sld>
 </file>
 
@@ -7639,7 +10680,7 @@
                   <a:srgbClr val="89B4FA"/>
                 </a:solidFill>
               </a:rPr>
-              <a:t>輸出報告</a:t>
+              <a:t>輸入格式</a:t>
             </a:r>
           </a:p>
         </p:txBody>
@@ -7673,7 +10714,7 @@
                   <a:srgbClr val="BAC2D8"/>
                 </a:solidFill>
               </a:rPr>
-              <a:t>彙總統計範例</a:t>
+              <a:t>影像、Dump 檔、Zone 定義</a:t>
             </a:r>
           </a:p>
         </p:txBody>
@@ -7686,17 +10727,19 @@
         </p:nvSpPr>
         <p:spPr>
           <a:xfrm>
-            <a:off x="457200" y="1280160"/>
-            <a:ext cx="11247120" cy="4389120"/>
+            <a:off x="365760" y="1280160"/>
+            <a:ext cx="3291840" cy="2011680"/>
           </a:xfrm>
           <a:prstGeom prst="rect">
             <a:avLst/>
           </a:prstGeom>
           <a:solidFill>
-            <a:srgbClr val="121420"/>
+            <a:srgbClr val="282C42"/>
           </a:solidFill>
-          <a:ln>
-            <a:noFill/>
+          <a:ln w="12700">
+            <a:solidFill>
+              <a:srgbClr val="89B4FA"/>
+            </a:solidFill>
           </a:ln>
         </p:spPr>
         <p:style>
@@ -7730,8 +10773,8 @@
         </p:nvSpPr>
         <p:spPr>
           <a:xfrm>
-            <a:off x="640080" y="1417320"/>
-            <a:ext cx="10881360" cy="4114800"/>
+            <a:off x="502920" y="1371600"/>
+            <a:ext cx="3017520" cy="457200"/>
           </a:xfrm>
           <a:prstGeom prst="rect">
             <a:avLst/>
@@ -7746,25 +10789,396 @@
           <a:p>
             <a:pPr algn="l"/>
             <a:r>
-              <a:rPr sz="1400" b="0">
-                <a:solidFill>
-                  <a:srgbClr val="A6E3A1"/>
-                </a:solidFill>
-              </a:rPr>
-              <a:t>========== 彙總統計 ==========
-成功處理 case 數: 28 / 30
-總 Block 誤差: 1579
-總 Zone 錯誤: 115
---- Zone 錯誤分佈 ---
-   zone    漏亮    多亮   Total
-  ----------------------------------
-       0       0      28      28
-       1       0      28      28
-       2       1       2       3
---- Top-5 Block 誤差最高 Case ---
-Case  5 : 87 block diffs
-Case 12 : 74 block diffs
-Case  3 : 68 block diffs</a:t>
+              <a:rPr sz="1600" b="1">
+                <a:solidFill>
+                  <a:srgbClr val="89B4FA"/>
+                </a:solidFill>
+              </a:rPr>
+              <a:t>影像規格</a:t>
+            </a:r>
+          </a:p>
+        </p:txBody>
+      </p:sp>
+      <p:sp>
+        <p:nvSpPr>
+          <p:cNvPr id="7" name="TextBox 6"/>
+          <p:cNvSpPr txBox="1"/>
+          <p:nvPr/>
+        </p:nvSpPr>
+        <p:spPr>
+          <a:xfrm>
+            <a:off x="502920" y="1828800"/>
+            <a:ext cx="3017520" cy="1169551"/>
+          </a:xfrm>
+          <a:prstGeom prst="rect">
+            <a:avLst/>
+          </a:prstGeom>
+          <a:noFill/>
+        </p:spPr>
+        <p:txBody>
+          <a:bodyPr wrap="square">
+            <a:spAutoFit/>
+          </a:bodyPr>
+          <a:lstStyle/>
+          <a:p>
+            <a:pPr algn="l"/>
+            <a:r>
+              <a:rPr sz="1400" b="0" dirty="0" err="1">
+                <a:solidFill>
+                  <a:srgbClr val="FFFFFF"/>
+                </a:solidFill>
+              </a:rPr>
+              <a:t>路徑：input</a:t>
+            </a:r>
+            <a:r>
+              <a:rPr sz="1400" b="0" dirty="0">
+                <a:solidFill>
+                  <a:srgbClr val="FFFFFF"/>
+                </a:solidFill>
+              </a:rPr>
+              <a:t>/input_{N}.png
+尺寸：1280 × 640 </a:t>
+            </a:r>
+            <a:r>
+              <a:rPr sz="1400" b="0" dirty="0" err="1">
+                <a:solidFill>
+                  <a:srgbClr val="FFFFFF"/>
+                </a:solidFill>
+              </a:rPr>
+              <a:t>px</a:t>
+            </a:r>
+            <a:r>
+              <a:rPr sz="1400" b="0" dirty="0">
+                <a:solidFill>
+                  <a:srgbClr val="FFFFFF"/>
+                </a:solidFill>
+              </a:rPr>
+              <a:t>
+→ </a:t>
+            </a:r>
+            <a:r>
+              <a:rPr sz="1400" b="0" dirty="0" err="1">
+                <a:solidFill>
+                  <a:srgbClr val="FFFFFF"/>
+                </a:solidFill>
+              </a:rPr>
+              <a:t>不符尺寸自動跳過</a:t>
+            </a:r>
+            <a:endParaRPr sz="1400" b="0" dirty="0">
+              <a:solidFill>
+                <a:srgbClr val="FFFFFF"/>
+              </a:solidFill>
+            </a:endParaRPr>
+          </a:p>
+        </p:txBody>
+      </p:sp>
+      <p:sp>
+        <p:nvSpPr>
+          <p:cNvPr id="8" name="Rectangle 7"/>
+          <p:cNvSpPr/>
+          <p:nvPr/>
+        </p:nvSpPr>
+        <p:spPr>
+          <a:xfrm>
+            <a:off x="3931920" y="1280160"/>
+            <a:ext cx="3931920" cy="2011680"/>
+          </a:xfrm>
+          <a:prstGeom prst="rect">
+            <a:avLst/>
+          </a:prstGeom>
+          <a:solidFill>
+            <a:srgbClr val="282C42"/>
+          </a:solidFill>
+          <a:ln w="12700">
+            <a:solidFill>
+              <a:srgbClr val="A6E3A1"/>
+            </a:solidFill>
+          </a:ln>
+        </p:spPr>
+        <p:style>
+          <a:lnRef idx="1">
+            <a:schemeClr val="accent1"/>
+          </a:lnRef>
+          <a:fillRef idx="3">
+            <a:schemeClr val="accent1"/>
+          </a:fillRef>
+          <a:effectRef idx="2">
+            <a:schemeClr val="accent1"/>
+          </a:effectRef>
+          <a:fontRef idx="minor">
+            <a:schemeClr val="lt1"/>
+          </a:fontRef>
+        </p:style>
+        <p:txBody>
+          <a:bodyPr rtlCol="0" anchor="ctr"/>
+          <a:lstStyle/>
+          <a:p>
+            <a:pPr algn="ctr"/>
+            <a:endParaRPr/>
+          </a:p>
+        </p:txBody>
+      </p:sp>
+      <p:sp>
+        <p:nvSpPr>
+          <p:cNvPr id="9" name="TextBox 8"/>
+          <p:cNvSpPr txBox="1"/>
+          <p:nvPr/>
+        </p:nvSpPr>
+        <p:spPr>
+          <a:xfrm>
+            <a:off x="4069080" y="1371600"/>
+            <a:ext cx="3657600" cy="457200"/>
+          </a:xfrm>
+          <a:prstGeom prst="rect">
+            <a:avLst/>
+          </a:prstGeom>
+          <a:noFill/>
+        </p:spPr>
+        <p:txBody>
+          <a:bodyPr wrap="square">
+            <a:spAutoFit/>
+          </a:bodyPr>
+          <a:lstStyle/>
+          <a:p>
+            <a:pPr algn="l"/>
+            <a:r>
+              <a:rPr sz="1600" b="1">
+                <a:solidFill>
+                  <a:srgbClr val="A6E3A1"/>
+                </a:solidFill>
+              </a:rPr>
+              <a:t>Dump 格式（兩種）</a:t>
+            </a:r>
+          </a:p>
+        </p:txBody>
+      </p:sp>
+      <p:sp>
+        <p:nvSpPr>
+          <p:cNvPr id="10" name="TextBox 9"/>
+          <p:cNvSpPr txBox="1"/>
+          <p:nvPr/>
+        </p:nvSpPr>
+        <p:spPr>
+          <a:xfrm>
+            <a:off x="4069080" y="1828800"/>
+            <a:ext cx="3657600" cy="1371600"/>
+          </a:xfrm>
+          <a:prstGeom prst="rect">
+            <a:avLst/>
+          </a:prstGeom>
+          <a:noFill/>
+        </p:spPr>
+        <p:txBody>
+          <a:bodyPr wrap="square">
+            <a:spAutoFit/>
+          </a:bodyPr>
+          <a:lstStyle/>
+          <a:p>
+            <a:pPr algn="l"/>
+            <a:r>
+              <a:rPr sz="1300" b="0" dirty="0" err="1">
+                <a:solidFill>
+                  <a:srgbClr val="FFFFFF"/>
+                </a:solidFill>
+              </a:rPr>
+              <a:t>新格式（Tab</a:t>
+            </a:r>
+            <a:r>
+              <a:rPr sz="1300" b="0" dirty="0">
+                <a:solidFill>
+                  <a:srgbClr val="FFFFFF"/>
+                </a:solidFill>
+              </a:rPr>
+              <a:t> </a:t>
+            </a:r>
+            <a:r>
+              <a:rPr sz="1300" b="0" dirty="0" err="1">
+                <a:solidFill>
+                  <a:srgbClr val="FFFFFF"/>
+                </a:solidFill>
+              </a:rPr>
+              <a:t>分隔</a:t>
+            </a:r>
+            <a:r>
+              <a:rPr sz="1300" b="0" dirty="0">
+                <a:solidFill>
+                  <a:srgbClr val="FFFFFF"/>
+                </a:solidFill>
+              </a:rPr>
+              <a:t>）：
+[0]  0  0x2000'8f1c  UCHAR
+</a:t>
+            </a:r>
+            <a:r>
+              <a:rPr sz="1300" b="0" dirty="0" err="1">
+                <a:solidFill>
+                  <a:srgbClr val="FFFFFF"/>
+                </a:solidFill>
+              </a:rPr>
+              <a:t>舊格式（無分隔符</a:t>
+            </a:r>
+            <a:r>
+              <a:rPr sz="1300" b="0" dirty="0">
+                <a:solidFill>
+                  <a:srgbClr val="FFFFFF"/>
+                </a:solidFill>
+              </a:rPr>
+              <a:t>）：
+[168]1750x2000'8fc4UCHAR
+共 3200 筆（40×80 Grid）</a:t>
+            </a:r>
+          </a:p>
+        </p:txBody>
+      </p:sp>
+      <p:sp>
+        <p:nvSpPr>
+          <p:cNvPr id="11" name="Rectangle 10"/>
+          <p:cNvSpPr/>
+          <p:nvPr/>
+        </p:nvSpPr>
+        <p:spPr>
+          <a:xfrm>
+            <a:off x="8138160" y="1280160"/>
+            <a:ext cx="3657600" cy="2011680"/>
+          </a:xfrm>
+          <a:prstGeom prst="rect">
+            <a:avLst/>
+          </a:prstGeom>
+          <a:solidFill>
+            <a:srgbClr val="282C42"/>
+          </a:solidFill>
+          <a:ln w="12700">
+            <a:solidFill>
+              <a:srgbClr val="F9E2AF"/>
+            </a:solidFill>
+          </a:ln>
+        </p:spPr>
+        <p:style>
+          <a:lnRef idx="1">
+            <a:schemeClr val="accent1"/>
+          </a:lnRef>
+          <a:fillRef idx="3">
+            <a:schemeClr val="accent1"/>
+          </a:fillRef>
+          <a:effectRef idx="2">
+            <a:schemeClr val="accent1"/>
+          </a:effectRef>
+          <a:fontRef idx="minor">
+            <a:schemeClr val="lt1"/>
+          </a:fontRef>
+        </p:style>
+        <p:txBody>
+          <a:bodyPr rtlCol="0" anchor="ctr"/>
+          <a:lstStyle/>
+          <a:p>
+            <a:pPr algn="ctr"/>
+            <a:endParaRPr/>
+          </a:p>
+        </p:txBody>
+      </p:sp>
+      <p:sp>
+        <p:nvSpPr>
+          <p:cNvPr id="12" name="TextBox 11"/>
+          <p:cNvSpPr txBox="1"/>
+          <p:nvPr/>
+        </p:nvSpPr>
+        <p:spPr>
+          <a:xfrm>
+            <a:off x="8275320" y="1371600"/>
+            <a:ext cx="3383280" cy="457200"/>
+          </a:xfrm>
+          <a:prstGeom prst="rect">
+            <a:avLst/>
+          </a:prstGeom>
+          <a:noFill/>
+        </p:spPr>
+        <p:txBody>
+          <a:bodyPr wrap="square">
+            <a:spAutoFit/>
+          </a:bodyPr>
+          <a:lstStyle/>
+          <a:p>
+            <a:pPr algn="l"/>
+            <a:r>
+              <a:rPr sz="1600" b="1">
+                <a:solidFill>
+                  <a:srgbClr val="F9E2AF"/>
+                </a:solidFill>
+              </a:rPr>
+              <a:t>Zone 定義 (zone.txt)</a:t>
+            </a:r>
+          </a:p>
+        </p:txBody>
+      </p:sp>
+      <p:sp>
+        <p:nvSpPr>
+          <p:cNvPr id="13" name="TextBox 12"/>
+          <p:cNvSpPr txBox="1"/>
+          <p:nvPr/>
+        </p:nvSpPr>
+        <p:spPr>
+          <a:xfrm>
+            <a:off x="8275320" y="1828800"/>
+            <a:ext cx="3383280" cy="1371600"/>
+          </a:xfrm>
+          <a:prstGeom prst="rect">
+            <a:avLst/>
+          </a:prstGeom>
+          <a:noFill/>
+        </p:spPr>
+        <p:txBody>
+          <a:bodyPr wrap="square">
+            <a:spAutoFit/>
+          </a:bodyPr>
+          <a:lstStyle/>
+          <a:p>
+            <a:pPr algn="l"/>
+            <a:r>
+              <a:rPr sz="1300" b="0">
+                <a:solidFill>
+                  <a:srgbClr val="FFFFFF"/>
+                </a:solidFill>
+              </a:rPr>
+              <a:t>case 0:
+  j_start=4; j_end=10;
+  i_start=0; i_end=14;
+j = row (垂直, 0–39)
+i = col (水平, 0–79)
+共 30 個 Zone</a:t>
+            </a:r>
+          </a:p>
+        </p:txBody>
+      </p:sp>
+      <p:sp>
+        <p:nvSpPr>
+          <p:cNvPr id="14" name="TextBox 13"/>
+          <p:cNvSpPr txBox="1"/>
+          <p:nvPr/>
+        </p:nvSpPr>
+        <p:spPr>
+          <a:xfrm>
+            <a:off x="457200" y="3520440"/>
+            <a:ext cx="11247120" cy="457200"/>
+          </a:xfrm>
+          <a:prstGeom prst="rect">
+            <a:avLst/>
+          </a:prstGeom>
+          <a:noFill/>
+        </p:spPr>
+        <p:txBody>
+          <a:bodyPr wrap="square">
+            <a:spAutoFit/>
+          </a:bodyPr>
+          <a:lstStyle/>
+          <a:p>
+            <a:pPr algn="ctr"/>
+            <a:r>
+              <a:rPr sz="1500" b="1">
+                <a:solidFill>
+                  <a:srgbClr val="A6E3A1"/>
+                </a:solidFill>
+              </a:rPr>
+              <a:t>工具同時支援新舊兩種 Dump 格式，自動偵測，不需手動切換</a:t>
             </a:r>
           </a:p>
         </p:txBody>
@@ -7774,6 +11188,13 @@
   <p:clrMapOvr>
     <a:masterClrMapping/>
   </p:clrMapOvr>
+  <p:timing>
+    <p:tnLst>
+      <p:par>
+        <p:cTn id="1" dur="indefinite" restart="never" nodeType="tmRoot"/>
+      </p:par>
+    </p:tnLst>
+  </p:timing>
 </p:sld>
 </file>
 
@@ -7875,7 +11296,7 @@
                   <a:srgbClr val="89B4FA"/>
                 </a:solidFill>
               </a:rPr>
-              <a:t>打包與部署</a:t>
+              <a:t>程式碼改善</a:t>
             </a:r>
           </a:p>
         </p:txBody>
@@ -7909,7 +11330,7 @@
                   <a:srgbClr val="BAC2D8"/>
                 </a:solidFill>
               </a:rPr>
-              <a:t>Windows 執行檔 — 無需安裝 Python</a:t>
+              <a:t>Code Review 重構摘要 (v1.5.0)</a:t>
             </a:r>
           </a:p>
         </p:txBody>
@@ -7922,19 +11343,17 @@
         </p:nvSpPr>
         <p:spPr>
           <a:xfrm>
-            <a:off x="457200" y="1280160"/>
-            <a:ext cx="5303520" cy="3200400"/>
+            <a:off x="5989320" y="1234440"/>
+            <a:ext cx="27432" cy="5303520"/>
           </a:xfrm>
           <a:prstGeom prst="rect">
             <a:avLst/>
           </a:prstGeom>
           <a:solidFill>
-            <a:srgbClr val="282C42"/>
+            <a:srgbClr val="BAC2D8"/>
           </a:solidFill>
-          <a:ln w="12700">
-            <a:solidFill>
-              <a:srgbClr val="89B4FA"/>
-            </a:solidFill>
+          <a:ln>
+            <a:noFill/>
           </a:ln>
         </p:spPr>
         <p:style>
@@ -7968,8 +11387,8 @@
         </p:nvSpPr>
         <p:spPr>
           <a:xfrm>
-            <a:off x="640080" y="1371600"/>
-            <a:ext cx="4937760" cy="457200"/>
+            <a:off x="365760" y="1234440"/>
+            <a:ext cx="5394960" cy="457200"/>
           </a:xfrm>
           <a:prstGeom prst="rect">
             <a:avLst/>
@@ -7986,24 +11405,24 @@
             <a:r>
               <a:rPr sz="1600" b="1">
                 <a:solidFill>
-                  <a:srgbClr val="89B4FA"/>
-                </a:solidFill>
-              </a:rPr>
-              <a:t>建置方式</a:t>
-            </a:r>
-          </a:p>
-        </p:txBody>
-      </p:sp>
-      <p:sp>
-        <p:nvSpPr>
-          <p:cNvPr id="7" name="TextBox 6"/>
-          <p:cNvSpPr txBox="1"/>
-          <p:nvPr/>
-        </p:nvSpPr>
-        <p:spPr>
-          <a:xfrm>
-            <a:off x="640080" y="1874519"/>
-            <a:ext cx="4937760" cy="2468880"/>
+                  <a:srgbClr val="A6E3A1"/>
+                </a:solidFill>
+              </a:rPr>
+              <a:t>修正項目</a:t>
+            </a:r>
+          </a:p>
+        </p:txBody>
+      </p:sp>
+      <p:sp>
+        <p:nvSpPr>
+          <p:cNvPr id="9" name="TextBox 8"/>
+          <p:cNvSpPr txBox="1"/>
+          <p:nvPr/>
+        </p:nvSpPr>
+        <p:spPr>
+          <a:xfrm>
+            <a:off x="365760" y="1828800"/>
+            <a:ext cx="5394960" cy="640080"/>
           </a:xfrm>
           <a:prstGeom prst="rect">
             <a:avLst/>
@@ -8018,77 +11437,26 @@
           <a:p>
             <a:pPr algn="l"/>
             <a:r>
-              <a:rPr sz="1400" b="0">
+              <a:rPr sz="1600" b="0">
                 <a:solidFill>
                   <a:srgbClr val="FFFFFF"/>
                 </a:solidFill>
               </a:rPr>
-              <a:t>pip install pyinstaller
-build.bat
-→ 輸出：local_dimming_validator.exe
-→ 位置：專案根目錄（~55 MB）
-→ 模式：onefile（單一執行檔）
-→ 每次執行解壓至 temp，完成後清除</a:t>
-            </a:r>
-          </a:p>
-        </p:txBody>
-      </p:sp>
-      <p:sp>
-        <p:nvSpPr>
-          <p:cNvPr id="8" name="Rectangle 7"/>
-          <p:cNvSpPr/>
-          <p:nvPr/>
-        </p:nvSpPr>
-        <p:spPr>
-          <a:xfrm>
-            <a:off x="6217920" y="1280160"/>
-            <a:ext cx="5486400" cy="3200400"/>
-          </a:xfrm>
-          <a:prstGeom prst="rect">
-            <a:avLst/>
-          </a:prstGeom>
-          <a:solidFill>
-            <a:srgbClr val="282C42"/>
-          </a:solidFill>
-          <a:ln w="12700">
-            <a:solidFill>
-              <a:srgbClr val="A6E3A1"/>
-            </a:solidFill>
-          </a:ln>
-        </p:spPr>
-        <p:style>
-          <a:lnRef idx="1">
-            <a:schemeClr val="accent1"/>
-          </a:lnRef>
-          <a:fillRef idx="3">
-            <a:schemeClr val="accent1"/>
-          </a:fillRef>
-          <a:effectRef idx="2">
-            <a:schemeClr val="accent1"/>
-          </a:effectRef>
-          <a:fontRef idx="minor">
-            <a:schemeClr val="lt1"/>
-          </a:fontRef>
-        </p:style>
-        <p:txBody>
-          <a:bodyPr rtlCol="0" anchor="ctr"/>
-          <a:lstStyle/>
-          <a:p>
-            <a:pPr algn="ctr"/>
-            <a:endParaRPr/>
-          </a:p>
-        </p:txBody>
-      </p:sp>
-      <p:sp>
-        <p:nvSpPr>
-          <p:cNvPr id="9" name="TextBox 8"/>
-          <p:cNvSpPr txBox="1"/>
-          <p:nvPr/>
-        </p:nvSpPr>
-        <p:spPr>
-          <a:xfrm>
-            <a:off x="6400800" y="1371600"/>
-            <a:ext cx="5120640" cy="457200"/>
+              <a:t>• 新增舊格式 Dump 備用 regex</a:t>
+            </a:r>
+          </a:p>
+        </p:txBody>
+      </p:sp>
+      <p:sp>
+        <p:nvSpPr>
+          <p:cNvPr id="10" name="TextBox 9"/>
+          <p:cNvSpPr txBox="1"/>
+          <p:nvPr/>
+        </p:nvSpPr>
+        <p:spPr>
+          <a:xfrm>
+            <a:off x="365760" y="2390503"/>
+            <a:ext cx="5394960" cy="640080"/>
           </a:xfrm>
           <a:prstGeom prst="rect">
             <a:avLst/>
@@ -8103,26 +11471,94 @@
           <a:p>
             <a:pPr algn="l"/>
             <a:r>
+              <a:rPr sz="1600" b="0">
+                <a:solidFill>
+                  <a:srgbClr val="FFFFFF"/>
+                </a:solidFill>
+              </a:rPr>
+              <a:t>• 新增影像尺寸驗證，不符早返回</a:t>
+            </a:r>
+          </a:p>
+        </p:txBody>
+      </p:sp>
+      <p:sp>
+        <p:nvSpPr>
+          <p:cNvPr id="11" name="TextBox 10"/>
+          <p:cNvSpPr txBox="1"/>
+          <p:nvPr/>
+        </p:nvSpPr>
+        <p:spPr>
+          <a:xfrm>
+            <a:off x="365760" y="2952206"/>
+            <a:ext cx="5394960" cy="640080"/>
+          </a:xfrm>
+          <a:prstGeom prst="rect">
+            <a:avLst/>
+          </a:prstGeom>
+          <a:noFill/>
+        </p:spPr>
+        <p:txBody>
+          <a:bodyPr wrap="square">
+            <a:spAutoFit/>
+          </a:bodyPr>
+          <a:lstStyle/>
+          <a:p>
+            <a:pPr algn="l"/>
+            <a:r>
+              <a:rPr sz="1600" b="0">
+                <a:solidFill>
+                  <a:srgbClr val="FFFFFF"/>
+                </a:solidFill>
+              </a:rPr>
+              <a:t>• 彙整報告只列有異常的測試組</a:t>
+            </a:r>
+          </a:p>
+        </p:txBody>
+      </p:sp>
+      <p:sp>
+        <p:nvSpPr>
+          <p:cNvPr id="12" name="TextBox 11"/>
+          <p:cNvSpPr txBox="1"/>
+          <p:nvPr/>
+        </p:nvSpPr>
+        <p:spPr>
+          <a:xfrm>
+            <a:off x="6217920" y="1234440"/>
+            <a:ext cx="5577840" cy="457200"/>
+          </a:xfrm>
+          <a:prstGeom prst="rect">
+            <a:avLst/>
+          </a:prstGeom>
+          <a:noFill/>
+        </p:spPr>
+        <p:txBody>
+          <a:bodyPr wrap="square">
+            <a:spAutoFit/>
+          </a:bodyPr>
+          <a:lstStyle/>
+          <a:p>
+            <a:pPr algn="l"/>
+            <a:r>
               <a:rPr sz="1600" b="1">
                 <a:solidFill>
                   <a:srgbClr val="A6E3A1"/>
                 </a:solidFill>
               </a:rPr>
-              <a:t>部署只需三樣東西</a:t>
-            </a:r>
-          </a:p>
-        </p:txBody>
-      </p:sp>
-      <p:sp>
-        <p:nvSpPr>
-          <p:cNvPr id="10" name="TextBox 9"/>
-          <p:cNvSpPr txBox="1"/>
-          <p:nvPr/>
-        </p:nvSpPr>
-        <p:spPr>
-          <a:xfrm>
-            <a:off x="6400800" y="1874519"/>
-            <a:ext cx="5120640" cy="2468880"/>
+              <a:t>效能優化</a:t>
+            </a:r>
+          </a:p>
+        </p:txBody>
+      </p:sp>
+      <p:sp>
+        <p:nvSpPr>
+          <p:cNvPr id="13" name="TextBox 12"/>
+          <p:cNvSpPr txBox="1"/>
+          <p:nvPr/>
+        </p:nvSpPr>
+        <p:spPr>
+          <a:xfrm>
+            <a:off x="6217920" y="1737360"/>
+            <a:ext cx="5577840" cy="640080"/>
           </a:xfrm>
           <a:prstGeom prst="rect">
             <a:avLst/>
@@ -8137,31 +11573,26 @@
           <a:p>
             <a:pPr algn="l"/>
             <a:r>
-              <a:rPr sz="1400" b="0">
+              <a:rPr sz="1600" b="0">
                 <a:solidFill>
                   <a:srgbClr val="FFFFFF"/>
                 </a:solidFill>
               </a:rPr>
-              <a:t>local_dimming_validator.exe
-zone.txt
-input/、dump/、LED/
-執行方式：
-local_dimming_validator.exe
-  [data_dir] [-c COUNT]</a:t>
-            </a:r>
-          </a:p>
-        </p:txBody>
-      </p:sp>
-      <p:sp>
-        <p:nvSpPr>
-          <p:cNvPr id="11" name="TextBox 10"/>
-          <p:cNvSpPr txBox="1"/>
-          <p:nvPr/>
-        </p:nvSpPr>
-        <p:spPr>
-          <a:xfrm>
-            <a:off x="457200" y="4709160"/>
-            <a:ext cx="11247120" cy="457200"/>
+              <a:t>• process_local_dimming：雙層迴圈 → NumPy reshape+max</a:t>
+            </a:r>
+          </a:p>
+        </p:txBody>
+      </p:sp>
+      <p:sp>
+        <p:nvSpPr>
+          <p:cNvPr id="14" name="TextBox 13"/>
+          <p:cNvSpPr txBox="1"/>
+          <p:nvPr/>
+        </p:nvSpPr>
+        <p:spPr>
+          <a:xfrm>
+            <a:off x="6217920" y="2423160"/>
+            <a:ext cx="5577840" cy="640080"/>
           </a:xfrm>
           <a:prstGeom prst="rect">
             <a:avLst/>
@@ -8174,14 +11605,48 @@
           </a:bodyPr>
           <a:lstStyle/>
           <a:p>
-            <a:pPr algn="ctr"/>
-            <a:r>
-              <a:rPr sz="1600" b="1">
-                <a:solidFill>
-                  <a:srgbClr val="F9E2AF"/>
-                </a:solidFill>
-              </a:rPr>
-              <a:t>GitHub Releases v1.7.0 — 可直接下載 .exe，無需建置環境</a:t>
+            <a:pPr algn="l"/>
+            <a:r>
+              <a:rPr sz="1600" b="0">
+                <a:solidFill>
+                  <a:srgbClr val="FFFFFF"/>
+                </a:solidFill>
+              </a:rPr>
+              <a:t>• visualize_diff：條件迴圈 → Boolean mask 向量化</a:t>
+            </a:r>
+          </a:p>
+        </p:txBody>
+      </p:sp>
+      <p:sp>
+        <p:nvSpPr>
+          <p:cNvPr id="15" name="TextBox 14"/>
+          <p:cNvSpPr txBox="1"/>
+          <p:nvPr/>
+        </p:nvSpPr>
+        <p:spPr>
+          <a:xfrm>
+            <a:off x="6217920" y="3108960"/>
+            <a:ext cx="5577840" cy="640080"/>
+          </a:xfrm>
+          <a:prstGeom prst="rect">
+            <a:avLst/>
+          </a:prstGeom>
+          <a:noFill/>
+        </p:spPr>
+        <p:txBody>
+          <a:bodyPr wrap="square">
+            <a:spAutoFit/>
+          </a:bodyPr>
+          <a:lstStyle/>
+          <a:p>
+            <a:pPr algn="l"/>
+            <a:r>
+              <a:rPr sz="1600" b="0">
+                <a:solidFill>
+                  <a:srgbClr val="FFFFFF"/>
+                </a:solidFill>
+              </a:rPr>
+              <a:t>• sim_out_img 填色 → repeat × 255 向量化</a:t>
             </a:r>
           </a:p>
         </p:txBody>
